--- a/hub/presentaciones/presentacion-v1.pptx
+++ b/hub/presentaciones/presentacion-v1.pptx
@@ -3055,7 +3055,7 @@
                 <a:ea typeface="Gilroy" pitchFamily="34" charset="-122"/>
                 <a:cs typeface="Gilroy" pitchFamily="34" charset="-120"/>
               </a:rPr>
-              <a:t>6 categorías visibles, con </a:t>
+              <a:t>4 categorías visibles hoy, con </a:t>
             </a:r>
             <a:pPr indent="0" marL="0">
               <a:lnSpc>
@@ -3089,7 +3089,7 @@
                 <a:ea typeface="Gilroy" pitchFamily="34" charset="-122"/>
                 <a:cs typeface="Gilroy" pitchFamily="34" charset="-120"/>
               </a:rPr>
-              <a:t> en vez de Franquicias.</a:t>
+              <a:t> en vez de Franquicias (mismas 2 ocultas por defecto).</a:t>
             </a:r>
             <a:pPr indent="0" marL="0">
               <a:lnSpc>
@@ -5670,7 +5670,7 @@
                 <a:ea typeface="Gilroy" pitchFamily="34" charset="-122"/>
                 <a:cs typeface="Gilroy" pitchFamily="34" charset="-120"/>
               </a:rPr>
-              <a:t>Paquetería Internacional y Mis Comunicaciones Digitales necesitan gestiones reales que reemplacen el contenido inventado.</a:t>
+              <a:t>Paquetería Internacional y Mis Comunicaciones Digitales necesitan gestiones reales que reemplacen el contenido inventado — hasta entonces quedan ocultas por defecto.</a:t>
             </a:r>
             <a:endParaRPr lang="en-US" sz="1100" dirty="0"/>
           </a:p>
@@ -8792,7 +8792,7 @@
                 <a:ea typeface="Gilroy" pitchFamily="34" charset="-122"/>
                 <a:cs typeface="Gilroy" pitchFamily="34" charset="-120"/>
               </a:rPr>
-              <a:t>17 gestiones</a:t>
+              <a:t>9 gestiones</a:t>
             </a:r>
             <a:pPr indent="0" marL="0">
               <a:lnSpc>
@@ -10127,6 +10127,58 @@
                 <a:ea typeface="Gilroy" pitchFamily="34" charset="-122"/>
                 <a:cs typeface="Gilroy" pitchFamily="34" charset="-120"/>
               </a:rPr>
+              <a:t>Por eso estas 2 categorías están ocultas por defecto hasta que exista contenido real — sólo se muestran activando un switch puntual.</a:t>
+            </a:r>
+            <a:pPr indent="0" marL="0">
+              <a:lnSpc>
+                <a:spcPct val="125000"/>
+              </a:lnSpc>
+              <a:buNone/>
+            </a:pPr>
+            <a:r>
+              <a:rPr lang="en-US" sz="1250" dirty="0">
+                <a:solidFill>
+                  <a:srgbClr val="49454F"/>
+                </a:solidFill>
+                <a:latin typeface="Gilroy" pitchFamily="34" charset="0"/>
+                <a:ea typeface="Gilroy" pitchFamily="34" charset="-122"/>
+                <a:cs typeface="Gilroy" pitchFamily="34" charset="-120"/>
+              </a:rPr>
+              <a:t>
+</a:t>
+            </a:r>
+            <a:pPr indent="0" marL="0">
+              <a:lnSpc>
+                <a:spcPct val="125000"/>
+              </a:lnSpc>
+              <a:buNone/>
+            </a:pPr>
+            <a:r>
+              <a:rPr lang="en-US" sz="1250" b="1" dirty="0">
+                <a:solidFill>
+                  <a:srgbClr val="152663"/>
+                </a:solidFill>
+                <a:latin typeface="Gilroy" pitchFamily="34" charset="0"/>
+                <a:ea typeface="Gilroy" pitchFamily="34" charset="-122"/>
+                <a:cs typeface="Gilroy" pitchFamily="34" charset="-120"/>
+              </a:rPr>
+              <a:t>•  </a:t>
+            </a:r>
+            <a:pPr indent="0" marL="0">
+              <a:lnSpc>
+                <a:spcPct val="125000"/>
+              </a:lnSpc>
+              <a:buNone/>
+            </a:pPr>
+            <a:r>
+              <a:rPr lang="en-US" sz="1250" dirty="0">
+                <a:solidFill>
+                  <a:srgbClr val="49454F"/>
+                </a:solidFill>
+                <a:latin typeface="Gilroy" pitchFamily="34" charset="0"/>
+                <a:ea typeface="Gilroy" pitchFamily="34" charset="-122"/>
+                <a:cs typeface="Gilroy" pitchFamily="34" charset="-120"/>
+              </a:rPr>
               <a:t>Franquicias y Fulfillment, en cambio, sí tienen contenido confirmado por el negocio.</a:t>
             </a:r>
             <a:endParaRPr lang="en-US" sz="1250" dirty="0"/>
@@ -10754,7 +10806,7 @@
                 <a:ea typeface="Gilroy" pitchFamily="34" charset="-122"/>
                 <a:cs typeface="Gilroy" pitchFamily="34" charset="-120"/>
               </a:rPr>
-              <a:t>6 categorías visibles: Mi Cuenta, Paquetería Nacional, Paquetería Internacional, </a:t>
+              <a:t>4 categorías visibles hoy: Mi Cuenta, Paquetería Nacional, </a:t>
             </a:r>
             <a:pPr indent="0" marL="0">
               <a:lnSpc>
@@ -10788,7 +10840,7 @@
                 <a:ea typeface="Gilroy" pitchFamily="34" charset="-122"/>
                 <a:cs typeface="Gilroy" pitchFamily="34" charset="-120"/>
               </a:rPr>
-              <a:t>, Mis Comunicaciones Digitales, Oficios Judiciales.</a:t>
+              <a:t>, Oficios Judiciales (Paquetería Internacional y Comunicaciones Digitales siguen ocultas por defecto).</a:t>
             </a:r>
             <a:pPr indent="0" marL="0">
               <a:lnSpc>
@@ -10857,7 +10909,7 @@
                 <a:ea typeface="Gilroy" pitchFamily="34" charset="-122"/>
                 <a:cs typeface="Gilroy" pitchFamily="34" charset="-120"/>
               </a:rPr>
-              <a:t>21 gestiones</a:t>
+              <a:t>13 gestiones</a:t>
             </a:r>
             <a:pPr indent="0" marL="0">
               <a:lnSpc>

--- a/hub/presentaciones/presentacion-v1.pptx
+++ b/hub/presentaciones/presentacion-v1.pptx
@@ -21,9 +21,10 @@
     <p:sldId id="269" r:id="rId15"/>
     <p:sldId id="270" r:id="rId16"/>
     <p:sldId id="271" r:id="rId17"/>
+    <p:sldId id="272" r:id="rId18"/>
   </p:sldIdLst>
   <p:notesMasterIdLst>
-    <p:notesMasterId r:id="rId18"/>
+    <p:notesMasterId r:id="rId19"/>
   </p:notesMasterIdLst>
   <p:sldSz cx="12191695" cy="6858000"/>
   <p:notesSz cx="6858000" cy="12191695"/>
@@ -1157,6 +1158,94 @@
             <a:fld id="{F7021451-1387-4CA6-816F-3879F97B5CBC}" type="slidenum">
               <a:rPr lang="en-US"/>
               <a:t>16</a:t>
+            </a:fld>
+            <a:endParaRPr lang="en-US"/>
+          </a:p>
+        </p:txBody>
+      </p:sp>
+    </p:spTree>
+    <p:extLst>
+      <p:ext uri="{BB962C8B-B14F-4D97-AF65-F5344CB8AC3E}">
+        <p14:creationId xmlns:p14="http://schemas.microsoft.com/office/powerpoint/2010/main" val="1024086991"/>
+      </p:ext>
+    </p:extLst>
+  </p:cSld>
+  <p:clrMapOvr>
+    <a:masterClrMapping/>
+  </p:clrMapOvr>
+</p:notes>
+</file>
+
+<file path=ppt/notesSlides/notesSlide17.xml><?xml version="1.0" encoding="utf-8"?>
+<p:notes xmlns:a="http://schemas.openxmlformats.org/drawingml/2006/main" xmlns:r="http://schemas.openxmlformats.org/officeDocument/2006/relationships" xmlns:p="http://schemas.openxmlformats.org/presentationml/2006/main">
+  <p:cSld>
+    <p:spTree>
+      <p:nvGrpSpPr>
+        <p:cNvPr id="1" name=""/>
+        <p:cNvGrpSpPr/>
+        <p:nvPr/>
+      </p:nvGrpSpPr>
+      <p:grpSpPr>
+        <a:xfrm>
+          <a:off x="0" y="0"/>
+          <a:ext cx="0" cy="0"/>
+          <a:chOff x="0" y="0"/>
+          <a:chExt cx="0" cy="0"/>
+        </a:xfrm>
+      </p:grpSpPr>
+      <p:sp>
+        <p:nvSpPr>
+          <p:cNvPr id="2" name="Slide Image Placeholder 1"/>
+          <p:cNvSpPr>
+            <a:spLocks noGrp="1" noRot="1" noChangeAspect="1"/>
+          </p:cNvSpPr>
+          <p:nvPr>
+            <p:ph type="sldImg"/>
+          </p:nvPr>
+        </p:nvSpPr>
+        <p:spPr/>
+      </p:sp>
+      <p:sp>
+        <p:nvSpPr>
+          <p:cNvPr id="3" name="Notes Placeholder 2"/>
+          <p:cNvSpPr>
+            <a:spLocks noGrp="1"/>
+          </p:cNvSpPr>
+          <p:nvPr>
+            <p:ph type="body" idx="1"/>
+          </p:nvPr>
+        </p:nvSpPr>
+        <p:spPr/>
+        <p:txBody>
+          <a:bodyPr/>
+          <a:lstStyle/>
+          <a:p>
+            <a:r>
+              <a:rPr lang="en-US" dirty="0"/>
+              <a:t/>
+            </a:r>
+            <a:endParaRPr lang="en-US" dirty="0"/>
+          </a:p>
+        </p:txBody>
+      </p:sp>
+      <p:sp>
+        <p:nvSpPr>
+          <p:cNvPr id="4" name="Slide Number Placeholder 3"/>
+          <p:cNvSpPr>
+            <a:spLocks noGrp="1"/>
+          </p:cNvSpPr>
+          <p:nvPr>
+            <p:ph type="sldNum" sz="quarter" idx="10"/>
+          </p:nvPr>
+        </p:nvSpPr>
+        <p:spPr/>
+        <p:txBody>
+          <a:bodyPr/>
+          <a:lstStyle/>
+          <a:p>
+            <a:fld id="{F7021451-1387-4CA6-816F-3879F97B5CBC}" type="slidenum">
+              <a:rPr lang="en-US"/>
+              <a:t>17</a:t>
             </a:fld>
             <a:endParaRPr lang="en-US"/>
           </a:p>
@@ -2362,7 +2451,7 @@
         <p:spPr>
           <a:xfrm>
             <a:off x="685800" y="4343400"/>
-            <a:ext cx="1188720" cy="365760"/>
+            <a:ext cx="1920240" cy="365760"/>
           </a:xfrm>
           <a:prstGeom prst="roundRect">
             <a:avLst>
@@ -2385,8 +2474,8 @@
         </p:nvSpPr>
         <p:spPr>
           <a:xfrm>
-            <a:off x="704088" y="4343400"/>
-            <a:ext cx="1152144" cy="365760"/>
+            <a:off x="731520" y="4343400"/>
+            <a:ext cx="1828800" cy="365760"/>
           </a:xfrm>
           <a:prstGeom prst="rect">
             <a:avLst/>
@@ -2424,7 +2513,7 @@
         </p:nvSpPr>
         <p:spPr>
           <a:xfrm>
-            <a:off x="1856232" y="4343400"/>
+            <a:off x="2587752" y="4343400"/>
             <a:ext cx="201168" cy="365760"/>
           </a:xfrm>
           <a:prstGeom prst="rect">
@@ -2463,8 +2552,8 @@
         </p:nvSpPr>
         <p:spPr>
           <a:xfrm>
-            <a:off x="2075688" y="4343400"/>
-            <a:ext cx="1737360" cy="365760"/>
+            <a:off x="2807208" y="4343400"/>
+            <a:ext cx="2798064" cy="365760"/>
           </a:xfrm>
           <a:prstGeom prst="roundRect">
             <a:avLst>
@@ -2487,8 +2576,8 @@
         </p:nvSpPr>
         <p:spPr>
           <a:xfrm>
-            <a:off x="2093976" y="4343400"/>
-            <a:ext cx="1700784" cy="365760"/>
+            <a:off x="2852928" y="4343400"/>
+            <a:ext cx="2706624" cy="365760"/>
           </a:xfrm>
           <a:prstGeom prst="rect">
             <a:avLst/>
@@ -2526,7 +2615,7 @@
         </p:nvSpPr>
         <p:spPr>
           <a:xfrm>
-            <a:off x="3794760" y="4343400"/>
+            <a:off x="5586984" y="4343400"/>
             <a:ext cx="201168" cy="365760"/>
           </a:xfrm>
           <a:prstGeom prst="rect">
@@ -2565,8 +2654,8 @@
         </p:nvSpPr>
         <p:spPr>
           <a:xfrm>
-            <a:off x="4014216" y="4343400"/>
-            <a:ext cx="1005840" cy="365760"/>
+            <a:off x="5806440" y="4343400"/>
+            <a:ext cx="1627632" cy="365760"/>
           </a:xfrm>
           <a:prstGeom prst="roundRect">
             <a:avLst>
@@ -2589,8 +2678,8 @@
         </p:nvSpPr>
         <p:spPr>
           <a:xfrm>
-            <a:off x="4032504" y="4343400"/>
-            <a:ext cx="969264" cy="365760"/>
+            <a:off x="5852160" y="4343400"/>
+            <a:ext cx="1536192" cy="365760"/>
           </a:xfrm>
           <a:prstGeom prst="rect">
             <a:avLst/>
@@ -2628,7 +2717,7 @@
         </p:nvSpPr>
         <p:spPr>
           <a:xfrm>
-            <a:off x="5001768" y="4343400"/>
+            <a:off x="7415784" y="4343400"/>
             <a:ext cx="201168" cy="365760"/>
           </a:xfrm>
           <a:prstGeom prst="rect">
@@ -2667,8 +2756,8 @@
         </p:nvSpPr>
         <p:spPr>
           <a:xfrm>
-            <a:off x="5221224" y="4343400"/>
-            <a:ext cx="1463040" cy="365760"/>
+            <a:off x="7635240" y="4343400"/>
+            <a:ext cx="2359152" cy="365760"/>
           </a:xfrm>
           <a:prstGeom prst="roundRect">
             <a:avLst>
@@ -2691,8 +2780,8 @@
         </p:nvSpPr>
         <p:spPr>
           <a:xfrm>
-            <a:off x="5239512" y="4343400"/>
-            <a:ext cx="1426464" cy="365760"/>
+            <a:off x="7680960" y="4343400"/>
+            <a:ext cx="2267712" cy="365760"/>
           </a:xfrm>
           <a:prstGeom prst="rect">
             <a:avLst/>
@@ -2851,7 +2940,7 @@
                 <a:ea typeface="Gilroy" pitchFamily="34" charset="-122"/>
                 <a:cs typeface="Gilroy" pitchFamily="34" charset="-120"/>
               </a:rPr>
-              <a:t>Fulfillment</a:t>
+              <a:t>Franquicias</a:t>
             </a:r>
             <a:endParaRPr lang="en-US" sz="1500" dirty="0"/>
           </a:p>
@@ -2865,8 +2954,8 @@
         </p:nvSpPr>
         <p:spPr>
           <a:xfrm>
-            <a:off x="7482535" y="1234440"/>
-            <a:ext cx="2272284" cy="329184"/>
+            <a:off x="548640" y="1234440"/>
+            <a:ext cx="2889504" cy="329184"/>
           </a:xfrm>
           <a:prstGeom prst="roundRect">
             <a:avLst>
@@ -2887,8 +2976,8 @@
         </p:nvSpPr>
         <p:spPr>
           <a:xfrm>
-            <a:off x="7528255" y="1234440"/>
-            <a:ext cx="2180844" cy="329184"/>
+            <a:off x="594360" y="1234440"/>
+            <a:ext cx="2798064" cy="329184"/>
           </a:xfrm>
           <a:prstGeom prst="rect">
             <a:avLst/>
@@ -2912,7 +3001,7 @@
                 <a:ea typeface="Gilroy" pitchFamily="34" charset="-122"/>
                 <a:cs typeface="Gilroy" pitchFamily="34" charset="-120"/>
               </a:rPr>
-              <a:t>REGLA SIMÉTRICA</a:t>
+              <a:t>REGLA DE VISIBILIDAD</a:t>
             </a:r>
             <a:endParaRPr lang="en-US" sz="1050" dirty="0"/>
           </a:p>
@@ -2926,7 +3015,7 @@
         </p:nvSpPr>
         <p:spPr>
           <a:xfrm>
-            <a:off x="7482535" y="1691640"/>
+            <a:off x="548640" y="1691640"/>
             <a:ext cx="4160520" cy="914400"/>
           </a:xfrm>
           <a:prstGeom prst="rect">
@@ -2954,7 +3043,7 @@
                 <a:ea typeface="Gilroy" pitchFamily="34" charset="-122"/>
                 <a:cs typeface="Gilroy" pitchFamily="34" charset="-120"/>
               </a:rPr>
-              <a:t>Fulfillment no ve la categoría Franquicias</a:t>
+              <a:t>Franquicias no ve la categoría Fulfillment</a:t>
             </a:r>
             <a:endParaRPr lang="en-US" sz="1900" dirty="0"/>
           </a:p>
@@ -2968,7 +3057,7 @@
         </p:nvSpPr>
         <p:spPr>
           <a:xfrm>
-            <a:off x="7482535" y="2350008"/>
+            <a:off x="548640" y="2350008"/>
             <a:ext cx="4160520" cy="822960"/>
           </a:xfrm>
           <a:prstGeom prst="rect">
@@ -2996,7 +3085,7 @@
                 <a:ea typeface="Gilroy" pitchFamily="34" charset="-122"/>
                 <a:cs typeface="Gilroy" pitchFamily="34" charset="-120"/>
               </a:rPr>
-              <a:t>La regla es simétrica a la anterior — nunca conviven ambas categorías para un mismo usuario.</a:t>
+              <a:t>Ve todo lo demás que ve Individuo, más su propia categoría.</a:t>
             </a:r>
             <a:endParaRPr lang="en-US" sz="1150" dirty="0"/>
           </a:p>
@@ -3010,7 +3099,7 @@
         </p:nvSpPr>
         <p:spPr>
           <a:xfrm>
-            <a:off x="7482535" y="3127248"/>
+            <a:off x="548640" y="3127248"/>
             <a:ext cx="4160520" cy="2377440"/>
           </a:xfrm>
           <a:prstGeom prst="rect">
@@ -3055,7 +3144,7 @@
                 <a:ea typeface="Gilroy" pitchFamily="34" charset="-122"/>
                 <a:cs typeface="Gilroy" pitchFamily="34" charset="-120"/>
               </a:rPr>
-              <a:t>4 categorías visibles hoy, con </a:t>
+              <a:t>4 categorías visibles hoy: Mi Cuenta, Paquetería Nacional, </a:t>
             </a:r>
             <a:pPr indent="0" marL="0">
               <a:lnSpc>
@@ -3072,7 +3161,7 @@
                 <a:ea typeface="Gilroy" pitchFamily="34" charset="-122"/>
                 <a:cs typeface="Gilroy" pitchFamily="34" charset="-120"/>
               </a:rPr>
-              <a:t>Fulfillment</a:t>
+              <a:t>Franquicias</a:t>
             </a:r>
             <a:pPr indent="0" marL="0">
               <a:lnSpc>
@@ -3089,7 +3178,7 @@
                 <a:ea typeface="Gilroy" pitchFamily="34" charset="-122"/>
                 <a:cs typeface="Gilroy" pitchFamily="34" charset="-120"/>
               </a:rPr>
-              <a:t> en vez de Franquicias (mismas 2 ocultas por defecto).</a:t>
+              <a:t>, Oficios Judiciales (Paquetería Internacional y Comunicaciones Digitales siguen ocultas por defecto).</a:t>
             </a:r>
             <a:pPr indent="0" marL="0">
               <a:lnSpc>
@@ -3141,7 +3230,41 @@
                 <a:ea typeface="Gilroy" pitchFamily="34" charset="-122"/>
                 <a:cs typeface="Gilroy" pitchFamily="34" charset="-120"/>
               </a:rPr>
-              <a:t>Acá filtrado por su propia categoría: 6 gestiones confirmadas por el negocio.</a:t>
+              <a:t>"Todos" para este usuario trae </a:t>
+            </a:r>
+            <a:pPr indent="0" marL="0">
+              <a:lnSpc>
+                <a:spcPct val="125000"/>
+              </a:lnSpc>
+              <a:buNone/>
+            </a:pPr>
+            <a:r>
+              <a:rPr lang="en-US" sz="1250" b="1" dirty="0">
+                <a:solidFill>
+                  <a:srgbClr val="49454F"/>
+                </a:solidFill>
+                <a:latin typeface="Gilroy" pitchFamily="34" charset="0"/>
+                <a:ea typeface="Gilroy" pitchFamily="34" charset="-122"/>
+                <a:cs typeface="Gilroy" pitchFamily="34" charset="-120"/>
+              </a:rPr>
+              <a:t>13 gestiones</a:t>
+            </a:r>
+            <a:pPr indent="0" marL="0">
+              <a:lnSpc>
+                <a:spcPct val="125000"/>
+              </a:lnSpc>
+              <a:buNone/>
+            </a:pPr>
+            <a:r>
+              <a:rPr lang="en-US" sz="1250" dirty="0">
+                <a:solidFill>
+                  <a:srgbClr val="49454F"/>
+                </a:solidFill>
+                <a:latin typeface="Gilroy" pitchFamily="34" charset="0"/>
+                <a:ea typeface="Gilroy" pitchFamily="34" charset="-122"/>
+                <a:cs typeface="Gilroy" pitchFamily="34" charset="-120"/>
+              </a:rPr>
+              <a:t>, no 27.</a:t>
             </a:r>
             <a:pPr indent="0" marL="0">
               <a:lnSpc>
@@ -3193,7 +3316,7 @@
                 <a:ea typeface="Gilroy" pitchFamily="34" charset="-122"/>
                 <a:cs typeface="Gilroy" pitchFamily="34" charset="-120"/>
               </a:rPr>
-              <a:t>Individuo y Pyme, en cambio, no ven ni Franquicias ni Fulfillment.</a:t>
+              <a:t>La categoría "Fulfillment" directamente no existe en esta vista.</a:t>
             </a:r>
             <a:endParaRPr lang="en-US" sz="1250" dirty="0"/>
           </a:p>
@@ -3207,8 +3330,8 @@
         </p:nvSpPr>
         <p:spPr>
           <a:xfrm>
-            <a:off x="7482535" y="5989320"/>
-            <a:ext cx="1472184" cy="310896"/>
+            <a:off x="548640" y="5989320"/>
+            <a:ext cx="1815084" cy="310896"/>
           </a:xfrm>
           <a:prstGeom prst="roundRect">
             <a:avLst>
@@ -3216,7 +3339,7 @@
             </a:avLst>
           </a:prstGeom>
           <a:solidFill>
-            <a:srgbClr val="FFF4D6"/>
+            <a:srgbClr val="F6E8F4"/>
           </a:solidFill>
           <a:ln/>
         </p:spPr>
@@ -3229,17 +3352,17 @@
         </p:nvSpPr>
         <p:spPr>
           <a:xfrm>
-            <a:off x="7482535" y="5989320"/>
-            <a:ext cx="1472184" cy="310896"/>
-          </a:xfrm>
-          <a:prstGeom prst="rect">
-            <a:avLst/>
-          </a:prstGeom>
-          <a:noFill/>
-          <a:ln/>
-        </p:spPr>
-        <p:txBody>
-          <a:bodyPr wrap="square" rtlCol="0" anchor="ctr"/>
+            <a:off x="594360" y="5989320"/>
+            <a:ext cx="1723644" cy="310896"/>
+          </a:xfrm>
+          <a:prstGeom prst="rect">
+            <a:avLst/>
+          </a:prstGeom>
+          <a:noFill/>
+          <a:ln/>
+        </p:spPr>
+        <p:txBody>
+          <a:bodyPr wrap="none" rtlCol="0" anchor="ctr"/>
           <a:lstStyle/>
           <a:p>
             <a:pPr algn="ctr" indent="0" marL="0">
@@ -3248,13 +3371,13 @@
             <a:r>
               <a:rPr lang="en-US" sz="1150" b="1" dirty="0">
                 <a:solidFill>
-                  <a:srgbClr val="A97C00"/>
-                </a:solidFill>
-                <a:latin typeface="Gilroy" pitchFamily="34" charset="0"/>
-                <a:ea typeface="Gilroy" pitchFamily="34" charset="-122"/>
-                <a:cs typeface="Gilroy" pitchFamily="34" charset="-120"/>
-              </a:rPr>
-              <a:t>Fulfillment</a:t>
+                  <a:srgbClr val="A02B93"/>
+                </a:solidFill>
+                <a:latin typeface="Gilroy" pitchFamily="34" charset="0"/>
+                <a:ea typeface="Gilroy" pitchFamily="34" charset="-122"/>
+                <a:cs typeface="Gilroy" pitchFamily="34" charset="-120"/>
+              </a:rPr>
+              <a:t>Franquicias</a:t>
             </a:r>
             <a:endParaRPr lang="en-US" sz="1150" dirty="0"/>
           </a:p>
@@ -3268,7 +3391,7 @@
         </p:nvSpPr>
         <p:spPr>
           <a:xfrm>
-            <a:off x="521208" y="1344168"/>
+            <a:off x="5001768" y="1344168"/>
             <a:ext cx="6668719" cy="4188524"/>
           </a:xfrm>
           <a:prstGeom prst="roundRect">
@@ -3291,7 +3414,7 @@
       </p:sp>
       <p:pic>
         <p:nvPicPr>
-          <p:cNvPr id="14" name="Image 1" descr="C:\MLOF 01\VORTEX\CORREO ARGENTINO\Reclamos\Reclamos claude\hub\presentaciones\screenshots\05-fulfillment.png">    </p:cNvPr>
+          <p:cNvPr id="14" name="Image 1" descr="C:\MLOF 01\VORTEX\CORREO ARGENTINO\Reclamos\Reclamos claude\hub\presentaciones\screenshots\04-franquicias.png">    </p:cNvPr>
           <p:cNvPicPr>
             <a:picLocks noChangeAspect="1"/>
           </p:cNvPicPr>
@@ -3304,7 +3427,7 @@
         </p:blipFill>
         <p:spPr>
           <a:xfrm>
-            <a:off x="548640" y="1371600"/>
+            <a:off x="5029200" y="1371600"/>
             <a:ext cx="6613855" cy="4133660"/>
           </a:xfrm>
           <a:prstGeom prst="rect">
@@ -3323,6 +3446,596 @@
 <file path=ppt/slides/slide11.xml><?xml version="1.0" encoding="utf-8"?>
 <p:sld xmlns:a="http://schemas.openxmlformats.org/drawingml/2006/main" xmlns:r="http://schemas.openxmlformats.org/officeDocument/2006/relationships" xmlns:p="http://schemas.openxmlformats.org/presentationml/2006/main">
   <p:cSld name="Slide 11">
+    <p:bg>
+      <p:bgPr>
+        <a:solidFill>
+          <a:srgbClr val="FFFFFF"/>
+        </a:solidFill>
+      </p:bgPr>
+    </p:bg>
+    <p:spTree>
+      <p:nvGrpSpPr>
+        <p:cNvPr id="1" name=""/>
+        <p:cNvGrpSpPr/>
+        <p:nvPr/>
+      </p:nvGrpSpPr>
+      <p:grpSpPr>
+        <a:xfrm>
+          <a:off x="0" y="0"/>
+          <a:ext cx="0" cy="0"/>
+          <a:chOff x="0" y="0"/>
+          <a:chExt cx="0" cy="0"/>
+        </a:xfrm>
+      </p:grpSpPr>
+      <p:sp>
+        <p:nvSpPr>
+          <p:cNvPr id="2" name="Shape 0"/>
+          <p:cNvSpPr/>
+          <p:nvPr/>
+        </p:nvSpPr>
+        <p:spPr>
+          <a:xfrm>
+            <a:off x="0" y="0"/>
+            <a:ext cx="12191695" cy="54864"/>
+          </a:xfrm>
+          <a:prstGeom prst="rect">
+            <a:avLst/>
+          </a:prstGeom>
+          <a:solidFill>
+            <a:srgbClr val="152663"/>
+          </a:solidFill>
+          <a:ln/>
+        </p:spPr>
+      </p:sp>
+      <p:sp>
+        <p:nvSpPr>
+          <p:cNvPr id="3" name="Shape 1"/>
+          <p:cNvSpPr/>
+          <p:nvPr/>
+        </p:nvSpPr>
+        <p:spPr>
+          <a:xfrm>
+            <a:off x="0" y="54864"/>
+            <a:ext cx="12191695" cy="566928"/>
+          </a:xfrm>
+          <a:prstGeom prst="rect">
+            <a:avLst/>
+          </a:prstGeom>
+          <a:solidFill>
+            <a:srgbClr val="FFCE00"/>
+          </a:solidFill>
+          <a:ln/>
+        </p:spPr>
+      </p:sp>
+      <p:pic>
+        <p:nvPicPr>
+          <p:cNvPr id="4" name="Image 0" descr="C:\MLOF 01\VORTEX\CORREO ARGENTINO\Reclamos\Reclamos claude\hub\assets\CorreoArgentino-MiCorreo.png">    </p:cNvPr>
+          <p:cNvPicPr>
+            <a:picLocks noChangeAspect="1"/>
+          </p:cNvPicPr>
+          <p:nvPr/>
+        </p:nvPicPr>
+        <p:blipFill>
+          <a:blip r:embed="rId1"/>
+          <a:stretch>
+            <a:fillRect/>
+          </a:stretch>
+        </p:blipFill>
+        <p:spPr>
+          <a:xfrm>
+            <a:off x="457200" y="219456"/>
+            <a:ext cx="1672699" cy="237744"/>
+          </a:xfrm>
+          <a:prstGeom prst="rect">
+            <a:avLst/>
+          </a:prstGeom>
+        </p:spPr>
+      </p:pic>
+      <p:sp>
+        <p:nvSpPr>
+          <p:cNvPr id="5" name="Text 2"/>
+          <p:cNvSpPr/>
+          <p:nvPr/>
+        </p:nvSpPr>
+        <p:spPr>
+          <a:xfrm>
+            <a:off x="2312779" y="54864"/>
+            <a:ext cx="5486400" cy="566928"/>
+          </a:xfrm>
+          <a:prstGeom prst="rect">
+            <a:avLst/>
+          </a:prstGeom>
+          <a:noFill/>
+          <a:ln/>
+        </p:spPr>
+        <p:txBody>
+          <a:bodyPr wrap="square" rtlCol="0" anchor="ctr"/>
+          <a:lstStyle/>
+          <a:p>
+            <a:pPr indent="0" marL="0">
+              <a:buNone/>
+            </a:pPr>
+            <a:r>
+              <a:rPr lang="en-US" sz="1500" b="1" dirty="0">
+                <a:solidFill>
+                  <a:srgbClr val="152663"/>
+                </a:solidFill>
+                <a:latin typeface="Gilroy" pitchFamily="34" charset="0"/>
+                <a:ea typeface="Gilroy" pitchFamily="34" charset="-122"/>
+                <a:cs typeface="Gilroy" pitchFamily="34" charset="-120"/>
+              </a:rPr>
+              <a:t>Fulfillment</a:t>
+            </a:r>
+            <a:endParaRPr lang="en-US" sz="1500" dirty="0"/>
+          </a:p>
+        </p:txBody>
+      </p:sp>
+      <p:sp>
+        <p:nvSpPr>
+          <p:cNvPr id="6" name="Shape 3"/>
+          <p:cNvSpPr/>
+          <p:nvPr/>
+        </p:nvSpPr>
+        <p:spPr>
+          <a:xfrm>
+            <a:off x="7482535" y="1234440"/>
+            <a:ext cx="2272284" cy="329184"/>
+          </a:xfrm>
+          <a:prstGeom prst="roundRect">
+            <a:avLst>
+              <a:gd name="adj" fmla="val 50000"/>
+            </a:avLst>
+          </a:prstGeom>
+          <a:solidFill>
+            <a:srgbClr val="F2F2F2"/>
+          </a:solidFill>
+          <a:ln/>
+        </p:spPr>
+      </p:sp>
+      <p:sp>
+        <p:nvSpPr>
+          <p:cNvPr id="7" name="Text 4"/>
+          <p:cNvSpPr/>
+          <p:nvPr/>
+        </p:nvSpPr>
+        <p:spPr>
+          <a:xfrm>
+            <a:off x="7528255" y="1234440"/>
+            <a:ext cx="2180844" cy="329184"/>
+          </a:xfrm>
+          <a:prstGeom prst="rect">
+            <a:avLst/>
+          </a:prstGeom>
+          <a:noFill/>
+          <a:ln/>
+        </p:spPr>
+        <p:txBody>
+          <a:bodyPr wrap="none" rtlCol="0" anchor="ctr"/>
+          <a:lstStyle/>
+          <a:p>
+            <a:pPr algn="ctr" indent="0" marL="0">
+              <a:buNone/>
+            </a:pPr>
+            <a:r>
+              <a:rPr lang="en-US" sz="1050" b="1" spc="100" kern="0" dirty="0">
+                <a:solidFill>
+                  <a:srgbClr val="152663"/>
+                </a:solidFill>
+                <a:latin typeface="Gilroy" pitchFamily="34" charset="0"/>
+                <a:ea typeface="Gilroy" pitchFamily="34" charset="-122"/>
+                <a:cs typeface="Gilroy" pitchFamily="34" charset="-120"/>
+              </a:rPr>
+              <a:t>REGLA SIMÉTRICA</a:t>
+            </a:r>
+            <a:endParaRPr lang="en-US" sz="1050" dirty="0"/>
+          </a:p>
+        </p:txBody>
+      </p:sp>
+      <p:sp>
+        <p:nvSpPr>
+          <p:cNvPr id="8" name="Text 5"/>
+          <p:cNvSpPr/>
+          <p:nvPr/>
+        </p:nvSpPr>
+        <p:spPr>
+          <a:xfrm>
+            <a:off x="7482535" y="1691640"/>
+            <a:ext cx="4160520" cy="914400"/>
+          </a:xfrm>
+          <a:prstGeom prst="rect">
+            <a:avLst/>
+          </a:prstGeom>
+          <a:noFill/>
+          <a:ln/>
+        </p:spPr>
+        <p:txBody>
+          <a:bodyPr wrap="square" rtlCol="0" anchor="ctr"/>
+          <a:lstStyle/>
+          <a:p>
+            <a:pPr indent="0" marL="0">
+              <a:lnSpc>
+                <a:spcPct val="110000"/>
+              </a:lnSpc>
+              <a:buNone/>
+            </a:pPr>
+            <a:r>
+              <a:rPr lang="en-US" sz="1900" b="1" dirty="0">
+                <a:solidFill>
+                  <a:srgbClr val="191919"/>
+                </a:solidFill>
+                <a:latin typeface="Gilroy" pitchFamily="34" charset="0"/>
+                <a:ea typeface="Gilroy" pitchFamily="34" charset="-122"/>
+                <a:cs typeface="Gilroy" pitchFamily="34" charset="-120"/>
+              </a:rPr>
+              <a:t>Fulfillment no ve la categoría Franquicias</a:t>
+            </a:r>
+            <a:endParaRPr lang="en-US" sz="1900" dirty="0"/>
+          </a:p>
+        </p:txBody>
+      </p:sp>
+      <p:sp>
+        <p:nvSpPr>
+          <p:cNvPr id="9" name="Text 6"/>
+          <p:cNvSpPr/>
+          <p:nvPr/>
+        </p:nvSpPr>
+        <p:spPr>
+          <a:xfrm>
+            <a:off x="7482535" y="2350008"/>
+            <a:ext cx="4160520" cy="822960"/>
+          </a:xfrm>
+          <a:prstGeom prst="rect">
+            <a:avLst/>
+          </a:prstGeom>
+          <a:noFill/>
+          <a:ln/>
+        </p:spPr>
+        <p:txBody>
+          <a:bodyPr wrap="square" rtlCol="0" anchor="ctr"/>
+          <a:lstStyle/>
+          <a:p>
+            <a:pPr indent="0" marL="0">
+              <a:lnSpc>
+                <a:spcPct val="130000"/>
+              </a:lnSpc>
+              <a:buNone/>
+            </a:pPr>
+            <a:r>
+              <a:rPr lang="en-US" sz="1150" dirty="0">
+                <a:solidFill>
+                  <a:srgbClr val="49454F"/>
+                </a:solidFill>
+                <a:latin typeface="Gilroy" pitchFamily="34" charset="0"/>
+                <a:ea typeface="Gilroy" pitchFamily="34" charset="-122"/>
+                <a:cs typeface="Gilroy" pitchFamily="34" charset="-120"/>
+              </a:rPr>
+              <a:t>La regla es simétrica a la anterior — nunca conviven ambas categorías para un mismo usuario.</a:t>
+            </a:r>
+            <a:endParaRPr lang="en-US" sz="1150" dirty="0"/>
+          </a:p>
+        </p:txBody>
+      </p:sp>
+      <p:sp>
+        <p:nvSpPr>
+          <p:cNvPr id="10" name="Text 7"/>
+          <p:cNvSpPr/>
+          <p:nvPr/>
+        </p:nvSpPr>
+        <p:spPr>
+          <a:xfrm>
+            <a:off x="7482535" y="3127248"/>
+            <a:ext cx="4160520" cy="2377440"/>
+          </a:xfrm>
+          <a:prstGeom prst="rect">
+            <a:avLst/>
+          </a:prstGeom>
+          <a:noFill/>
+          <a:ln/>
+        </p:spPr>
+        <p:txBody>
+          <a:bodyPr wrap="square" rtlCol="0" anchor="t"/>
+          <a:lstStyle/>
+          <a:p>
+            <a:pPr indent="0" marL="0">
+              <a:lnSpc>
+                <a:spcPct val="125000"/>
+              </a:lnSpc>
+              <a:buNone/>
+            </a:pPr>
+            <a:r>
+              <a:rPr lang="en-US" sz="1250" b="1" dirty="0">
+                <a:solidFill>
+                  <a:srgbClr val="152663"/>
+                </a:solidFill>
+                <a:latin typeface="Gilroy" pitchFamily="34" charset="0"/>
+                <a:ea typeface="Gilroy" pitchFamily="34" charset="-122"/>
+                <a:cs typeface="Gilroy" pitchFamily="34" charset="-120"/>
+              </a:rPr>
+              <a:t>•  </a:t>
+            </a:r>
+            <a:pPr indent="0" marL="0">
+              <a:lnSpc>
+                <a:spcPct val="125000"/>
+              </a:lnSpc>
+              <a:buNone/>
+            </a:pPr>
+            <a:r>
+              <a:rPr lang="en-US" sz="1250" dirty="0">
+                <a:solidFill>
+                  <a:srgbClr val="49454F"/>
+                </a:solidFill>
+                <a:latin typeface="Gilroy" pitchFamily="34" charset="0"/>
+                <a:ea typeface="Gilroy" pitchFamily="34" charset="-122"/>
+                <a:cs typeface="Gilroy" pitchFamily="34" charset="-120"/>
+              </a:rPr>
+              <a:t>4 categorías visibles hoy, con </a:t>
+            </a:r>
+            <a:pPr indent="0" marL="0">
+              <a:lnSpc>
+                <a:spcPct val="125000"/>
+              </a:lnSpc>
+              <a:buNone/>
+            </a:pPr>
+            <a:r>
+              <a:rPr lang="en-US" sz="1250" b="1" dirty="0">
+                <a:solidFill>
+                  <a:srgbClr val="49454F"/>
+                </a:solidFill>
+                <a:latin typeface="Gilroy" pitchFamily="34" charset="0"/>
+                <a:ea typeface="Gilroy" pitchFamily="34" charset="-122"/>
+                <a:cs typeface="Gilroy" pitchFamily="34" charset="-120"/>
+              </a:rPr>
+              <a:t>Fulfillment</a:t>
+            </a:r>
+            <a:pPr indent="0" marL="0">
+              <a:lnSpc>
+                <a:spcPct val="125000"/>
+              </a:lnSpc>
+              <a:buNone/>
+            </a:pPr>
+            <a:r>
+              <a:rPr lang="en-US" sz="1250" dirty="0">
+                <a:solidFill>
+                  <a:srgbClr val="49454F"/>
+                </a:solidFill>
+                <a:latin typeface="Gilroy" pitchFamily="34" charset="0"/>
+                <a:ea typeface="Gilroy" pitchFamily="34" charset="-122"/>
+                <a:cs typeface="Gilroy" pitchFamily="34" charset="-120"/>
+              </a:rPr>
+              <a:t> en vez de Franquicias (mismas 2 ocultas por defecto).</a:t>
+            </a:r>
+            <a:pPr indent="0" marL="0">
+              <a:lnSpc>
+                <a:spcPct val="125000"/>
+              </a:lnSpc>
+              <a:buNone/>
+            </a:pPr>
+            <a:r>
+              <a:rPr lang="en-US" sz="1250" dirty="0">
+                <a:solidFill>
+                  <a:srgbClr val="49454F"/>
+                </a:solidFill>
+                <a:latin typeface="Gilroy" pitchFamily="34" charset="0"/>
+                <a:ea typeface="Gilroy" pitchFamily="34" charset="-122"/>
+                <a:cs typeface="Gilroy" pitchFamily="34" charset="-120"/>
+              </a:rPr>
+              <a:t>
+</a:t>
+            </a:r>
+            <a:pPr indent="0" marL="0">
+              <a:lnSpc>
+                <a:spcPct val="125000"/>
+              </a:lnSpc>
+              <a:buNone/>
+            </a:pPr>
+            <a:r>
+              <a:rPr lang="en-US" sz="1250" b="1" dirty="0">
+                <a:solidFill>
+                  <a:srgbClr val="152663"/>
+                </a:solidFill>
+                <a:latin typeface="Gilroy" pitchFamily="34" charset="0"/>
+                <a:ea typeface="Gilroy" pitchFamily="34" charset="-122"/>
+                <a:cs typeface="Gilroy" pitchFamily="34" charset="-120"/>
+              </a:rPr>
+              <a:t>•  </a:t>
+            </a:r>
+            <a:pPr indent="0" marL="0">
+              <a:lnSpc>
+                <a:spcPct val="125000"/>
+              </a:lnSpc>
+              <a:buNone/>
+            </a:pPr>
+            <a:r>
+              <a:rPr lang="en-US" sz="1250" dirty="0">
+                <a:solidFill>
+                  <a:srgbClr val="49454F"/>
+                </a:solidFill>
+                <a:latin typeface="Gilroy" pitchFamily="34" charset="0"/>
+                <a:ea typeface="Gilroy" pitchFamily="34" charset="-122"/>
+                <a:cs typeface="Gilroy" pitchFamily="34" charset="-120"/>
+              </a:rPr>
+              <a:t>Acá filtrado por su propia categoría: 6 gestiones confirmadas por el negocio.</a:t>
+            </a:r>
+            <a:pPr indent="0" marL="0">
+              <a:lnSpc>
+                <a:spcPct val="125000"/>
+              </a:lnSpc>
+              <a:buNone/>
+            </a:pPr>
+            <a:r>
+              <a:rPr lang="en-US" sz="1250" dirty="0">
+                <a:solidFill>
+                  <a:srgbClr val="49454F"/>
+                </a:solidFill>
+                <a:latin typeface="Gilroy" pitchFamily="34" charset="0"/>
+                <a:ea typeface="Gilroy" pitchFamily="34" charset="-122"/>
+                <a:cs typeface="Gilroy" pitchFamily="34" charset="-120"/>
+              </a:rPr>
+              <a:t>
+</a:t>
+            </a:r>
+            <a:pPr indent="0" marL="0">
+              <a:lnSpc>
+                <a:spcPct val="125000"/>
+              </a:lnSpc>
+              <a:buNone/>
+            </a:pPr>
+            <a:r>
+              <a:rPr lang="en-US" sz="1250" b="1" dirty="0">
+                <a:solidFill>
+                  <a:srgbClr val="152663"/>
+                </a:solidFill>
+                <a:latin typeface="Gilroy" pitchFamily="34" charset="0"/>
+                <a:ea typeface="Gilroy" pitchFamily="34" charset="-122"/>
+                <a:cs typeface="Gilroy" pitchFamily="34" charset="-120"/>
+              </a:rPr>
+              <a:t>•  </a:t>
+            </a:r>
+            <a:pPr indent="0" marL="0">
+              <a:lnSpc>
+                <a:spcPct val="125000"/>
+              </a:lnSpc>
+              <a:buNone/>
+            </a:pPr>
+            <a:r>
+              <a:rPr lang="en-US" sz="1250" dirty="0">
+                <a:solidFill>
+                  <a:srgbClr val="49454F"/>
+                </a:solidFill>
+                <a:latin typeface="Gilroy" pitchFamily="34" charset="0"/>
+                <a:ea typeface="Gilroy" pitchFamily="34" charset="-122"/>
+                <a:cs typeface="Gilroy" pitchFamily="34" charset="-120"/>
+              </a:rPr>
+              <a:t>Individuo y Pyme, en cambio, no ven ni Franquicias ni Fulfillment.</a:t>
+            </a:r>
+            <a:endParaRPr lang="en-US" sz="1250" dirty="0"/>
+          </a:p>
+        </p:txBody>
+      </p:sp>
+      <p:sp>
+        <p:nvSpPr>
+          <p:cNvPr id="11" name="Shape 8"/>
+          <p:cNvSpPr/>
+          <p:nvPr/>
+        </p:nvSpPr>
+        <p:spPr>
+          <a:xfrm>
+            <a:off x="7482535" y="5989320"/>
+            <a:ext cx="1815084" cy="310896"/>
+          </a:xfrm>
+          <a:prstGeom prst="roundRect">
+            <a:avLst>
+              <a:gd name="adj" fmla="val 50000"/>
+            </a:avLst>
+          </a:prstGeom>
+          <a:solidFill>
+            <a:srgbClr val="FFF4D6"/>
+          </a:solidFill>
+          <a:ln/>
+        </p:spPr>
+      </p:sp>
+      <p:sp>
+        <p:nvSpPr>
+          <p:cNvPr id="12" name="Text 9"/>
+          <p:cNvSpPr/>
+          <p:nvPr/>
+        </p:nvSpPr>
+        <p:spPr>
+          <a:xfrm>
+            <a:off x="7528255" y="5989320"/>
+            <a:ext cx="1723644" cy="310896"/>
+          </a:xfrm>
+          <a:prstGeom prst="rect">
+            <a:avLst/>
+          </a:prstGeom>
+          <a:noFill/>
+          <a:ln/>
+        </p:spPr>
+        <p:txBody>
+          <a:bodyPr wrap="none" rtlCol="0" anchor="ctr"/>
+          <a:lstStyle/>
+          <a:p>
+            <a:pPr algn="ctr" indent="0" marL="0">
+              <a:buNone/>
+            </a:pPr>
+            <a:r>
+              <a:rPr lang="en-US" sz="1150" b="1" dirty="0">
+                <a:solidFill>
+                  <a:srgbClr val="A97C00"/>
+                </a:solidFill>
+                <a:latin typeface="Gilroy" pitchFamily="34" charset="0"/>
+                <a:ea typeface="Gilroy" pitchFamily="34" charset="-122"/>
+                <a:cs typeface="Gilroy" pitchFamily="34" charset="-120"/>
+              </a:rPr>
+              <a:t>Fulfillment</a:t>
+            </a:r>
+            <a:endParaRPr lang="en-US" sz="1150" dirty="0"/>
+          </a:p>
+        </p:txBody>
+      </p:sp>
+      <p:sp>
+        <p:nvSpPr>
+          <p:cNvPr id="13" name="Shape 10"/>
+          <p:cNvSpPr/>
+          <p:nvPr/>
+        </p:nvSpPr>
+        <p:spPr>
+          <a:xfrm>
+            <a:off x="521208" y="1344168"/>
+            <a:ext cx="6668719" cy="4188524"/>
+          </a:xfrm>
+          <a:prstGeom prst="roundRect">
+            <a:avLst>
+              <a:gd name="adj" fmla="val 1746"/>
+            </a:avLst>
+          </a:prstGeom>
+          <a:solidFill>
+            <a:srgbClr val="191919"/>
+          </a:solidFill>
+          <a:ln/>
+          <a:effectLst>
+            <a:outerShdw sx="100000" sy="100000" kx="0" ky="0" algn="bl" rotWithShape="0" blurRad="152400" dist="50800" dir="5400000">
+              <a:srgbClr val="152663">
+                <a:alpha val="35000"/>
+              </a:srgbClr>
+            </a:outerShdw>
+          </a:effectLst>
+        </p:spPr>
+      </p:sp>
+      <p:pic>
+        <p:nvPicPr>
+          <p:cNvPr id="14" name="Image 1" descr="C:\MLOF 01\VORTEX\CORREO ARGENTINO\Reclamos\Reclamos claude\hub\presentaciones\screenshots\05-fulfillment.png">    </p:cNvPr>
+          <p:cNvPicPr>
+            <a:picLocks noChangeAspect="1"/>
+          </p:cNvPicPr>
+          <p:nvPr/>
+        </p:nvPicPr>
+        <p:blipFill>
+          <a:blip r:embed="rId2"/>
+          <a:srcRect l="0" r="0" t="0" b="0"/>
+          <a:stretch/>
+        </p:blipFill>
+        <p:spPr>
+          <a:xfrm>
+            <a:off x="548640" y="1371600"/>
+            <a:ext cx="6613855" cy="4133660"/>
+          </a:xfrm>
+          <a:prstGeom prst="rect">
+            <a:avLst/>
+          </a:prstGeom>
+        </p:spPr>
+      </p:pic>
+    </p:spTree>
+  </p:cSld>
+  <p:clrMapOvr>
+    <a:masterClrMapping/>
+  </p:clrMapOvr>
+</p:sld>
+</file>
+
+<file path=ppt/slides/slide12.xml><?xml version="1.0" encoding="utf-8"?>
+<p:sld xmlns:a="http://schemas.openxmlformats.org/drawingml/2006/main" xmlns:r="http://schemas.openxmlformats.org/officeDocument/2006/relationships" xmlns:p="http://schemas.openxmlformats.org/presentationml/2006/main">
+  <p:cSld name="Slide 12">
     <p:bg>
       <p:bgPr>
         <a:solidFill>
@@ -3487,603 +4200,6 @@
           </a:p>
         </p:txBody>
       </p:sp>
-    </p:spTree>
-  </p:cSld>
-  <p:clrMapOvr>
-    <a:masterClrMapping/>
-  </p:clrMapOvr>
-</p:sld>
-</file>
-
-<file path=ppt/slides/slide12.xml><?xml version="1.0" encoding="utf-8"?>
-<p:sld xmlns:a="http://schemas.openxmlformats.org/drawingml/2006/main" xmlns:r="http://schemas.openxmlformats.org/officeDocument/2006/relationships" xmlns:p="http://schemas.openxmlformats.org/presentationml/2006/main">
-  <p:cSld name="Slide 12">
-    <p:bg>
-      <p:bgPr>
-        <a:solidFill>
-          <a:srgbClr val="FFFFFF"/>
-        </a:solidFill>
-      </p:bgPr>
-    </p:bg>
-    <p:spTree>
-      <p:nvGrpSpPr>
-        <p:cNvPr id="1" name=""/>
-        <p:cNvGrpSpPr/>
-        <p:nvPr/>
-      </p:nvGrpSpPr>
-      <p:grpSpPr>
-        <a:xfrm>
-          <a:off x="0" y="0"/>
-          <a:ext cx="0" cy="0"/>
-          <a:chOff x="0" y="0"/>
-          <a:chExt cx="0" cy="0"/>
-        </a:xfrm>
-      </p:grpSpPr>
-      <p:sp>
-        <p:nvSpPr>
-          <p:cNvPr id="2" name="Shape 0"/>
-          <p:cNvSpPr/>
-          <p:nvPr/>
-        </p:nvSpPr>
-        <p:spPr>
-          <a:xfrm>
-            <a:off x="0" y="0"/>
-            <a:ext cx="12191695" cy="54864"/>
-          </a:xfrm>
-          <a:prstGeom prst="rect">
-            <a:avLst/>
-          </a:prstGeom>
-          <a:solidFill>
-            <a:srgbClr val="152663"/>
-          </a:solidFill>
-          <a:ln/>
-        </p:spPr>
-      </p:sp>
-      <p:sp>
-        <p:nvSpPr>
-          <p:cNvPr id="3" name="Shape 1"/>
-          <p:cNvSpPr/>
-          <p:nvPr/>
-        </p:nvSpPr>
-        <p:spPr>
-          <a:xfrm>
-            <a:off x="0" y="54864"/>
-            <a:ext cx="12191695" cy="566928"/>
-          </a:xfrm>
-          <a:prstGeom prst="rect">
-            <a:avLst/>
-          </a:prstGeom>
-          <a:solidFill>
-            <a:srgbClr val="FFCE00"/>
-          </a:solidFill>
-          <a:ln/>
-        </p:spPr>
-      </p:sp>
-      <p:pic>
-        <p:nvPicPr>
-          <p:cNvPr id="4" name="Image 0" descr="C:\MLOF 01\VORTEX\CORREO ARGENTINO\Reclamos\Reclamos claude\hub\assets\CorreoArgentino-MiCorreo.png">    </p:cNvPr>
-          <p:cNvPicPr>
-            <a:picLocks noChangeAspect="1"/>
-          </p:cNvPicPr>
-          <p:nvPr/>
-        </p:nvPicPr>
-        <p:blipFill>
-          <a:blip r:embed="rId1"/>
-          <a:stretch>
-            <a:fillRect/>
-          </a:stretch>
-        </p:blipFill>
-        <p:spPr>
-          <a:xfrm>
-            <a:off x="457200" y="219456"/>
-            <a:ext cx="1672699" cy="237744"/>
-          </a:xfrm>
-          <a:prstGeom prst="rect">
-            <a:avLst/>
-          </a:prstGeom>
-        </p:spPr>
-      </p:pic>
-      <p:sp>
-        <p:nvSpPr>
-          <p:cNvPr id="5" name="Text 2"/>
-          <p:cNvSpPr/>
-          <p:nvPr/>
-        </p:nvSpPr>
-        <p:spPr>
-          <a:xfrm>
-            <a:off x="2312779" y="54864"/>
-            <a:ext cx="5486400" cy="566928"/>
-          </a:xfrm>
-          <a:prstGeom prst="rect">
-            <a:avLst/>
-          </a:prstGeom>
-          <a:noFill/>
-          <a:ln/>
-        </p:spPr>
-        <p:txBody>
-          <a:bodyPr wrap="square" rtlCol="0" anchor="ctr"/>
-          <a:lstStyle/>
-          <a:p>
-            <a:pPr indent="0" marL="0">
-              <a:buNone/>
-            </a:pPr>
-            <a:r>
-              <a:rPr lang="en-US" sz="1500" b="1" dirty="0">
-                <a:solidFill>
-                  <a:srgbClr val="152663"/>
-                </a:solidFill>
-                <a:latin typeface="Gilroy" pitchFamily="34" charset="0"/>
-                <a:ea typeface="Gilroy" pitchFamily="34" charset="-122"/>
-                <a:cs typeface="Gilroy" pitchFamily="34" charset="-120"/>
-              </a:rPr>
-              <a:t>Buscador</a:t>
-            </a:r>
-            <a:endParaRPr lang="en-US" sz="1500" dirty="0"/>
-          </a:p>
-        </p:txBody>
-      </p:sp>
-      <p:sp>
-        <p:nvSpPr>
-          <p:cNvPr id="6" name="Shape 3"/>
-          <p:cNvSpPr/>
-          <p:nvPr/>
-        </p:nvSpPr>
-        <p:spPr>
-          <a:xfrm>
-            <a:off x="548640" y="1234440"/>
-            <a:ext cx="2395728" cy="329184"/>
-          </a:xfrm>
-          <a:prstGeom prst="roundRect">
-            <a:avLst>
-              <a:gd name="adj" fmla="val 50000"/>
-            </a:avLst>
-          </a:prstGeom>
-          <a:solidFill>
-            <a:srgbClr val="F2F2F2"/>
-          </a:solidFill>
-          <a:ln/>
-        </p:spPr>
-      </p:sp>
-      <p:sp>
-        <p:nvSpPr>
-          <p:cNvPr id="7" name="Text 4"/>
-          <p:cNvSpPr/>
-          <p:nvPr/>
-        </p:nvSpPr>
-        <p:spPr>
-          <a:xfrm>
-            <a:off x="594360" y="1234440"/>
-            <a:ext cx="2304288" cy="329184"/>
-          </a:xfrm>
-          <a:prstGeom prst="rect">
-            <a:avLst/>
-          </a:prstGeom>
-          <a:noFill/>
-          <a:ln/>
-        </p:spPr>
-        <p:txBody>
-          <a:bodyPr wrap="none" rtlCol="0" anchor="ctr"/>
-          <a:lstStyle/>
-          <a:p>
-            <a:pPr algn="ctr" indent="0" marL="0">
-              <a:buNone/>
-            </a:pPr>
-            <a:r>
-              <a:rPr lang="en-US" sz="1050" b="1" spc="100" kern="0" dirty="0">
-                <a:solidFill>
-                  <a:srgbClr val="152663"/>
-                </a:solidFill>
-                <a:latin typeface="Gilroy" pitchFamily="34" charset="0"/>
-                <a:ea typeface="Gilroy" pitchFamily="34" charset="-122"/>
-                <a:cs typeface="Gilroy" pitchFamily="34" charset="-120"/>
-              </a:rPr>
-              <a:t>TAGS DE SINÓNIMO</a:t>
-            </a:r>
-            <a:endParaRPr lang="en-US" sz="1050" dirty="0"/>
-          </a:p>
-        </p:txBody>
-      </p:sp>
-      <p:sp>
-        <p:nvSpPr>
-          <p:cNvPr id="8" name="Text 5"/>
-          <p:cNvSpPr/>
-          <p:nvPr/>
-        </p:nvSpPr>
-        <p:spPr>
-          <a:xfrm>
-            <a:off x="548640" y="1691640"/>
-            <a:ext cx="4160520" cy="914400"/>
-          </a:xfrm>
-          <a:prstGeom prst="rect">
-            <a:avLst/>
-          </a:prstGeom>
-          <a:noFill/>
-          <a:ln/>
-        </p:spPr>
-        <p:txBody>
-          <a:bodyPr wrap="square" rtlCol="0" anchor="ctr"/>
-          <a:lstStyle/>
-          <a:p>
-            <a:pPr indent="0" marL="0">
-              <a:lnSpc>
-                <a:spcPct val="110000"/>
-              </a:lnSpc>
-              <a:buNone/>
-            </a:pPr>
-            <a:r>
-              <a:rPr lang="en-US" sz="1900" b="1" dirty="0">
-                <a:solidFill>
-                  <a:srgbClr val="191919"/>
-                </a:solidFill>
-                <a:latin typeface="Gilroy" pitchFamily="34" charset="0"/>
-                <a:ea typeface="Gilroy" pitchFamily="34" charset="-122"/>
-                <a:cs typeface="Gilroy" pitchFamily="34" charset="-120"/>
-              </a:rPr>
-              <a:t>"Justicia" encuentra un motivo que no dice "justicia"</a:t>
-            </a:r>
-            <a:endParaRPr lang="en-US" sz="1900" dirty="0"/>
-          </a:p>
-        </p:txBody>
-      </p:sp>
-      <p:sp>
-        <p:nvSpPr>
-          <p:cNvPr id="9" name="Text 6"/>
-          <p:cNvSpPr/>
-          <p:nvPr/>
-        </p:nvSpPr>
-        <p:spPr>
-          <a:xfrm>
-            <a:off x="548640" y="2606040"/>
-            <a:ext cx="4160520" cy="822960"/>
-          </a:xfrm>
-          <a:prstGeom prst="rect">
-            <a:avLst/>
-          </a:prstGeom>
-          <a:noFill/>
-          <a:ln/>
-        </p:spPr>
-        <p:txBody>
-          <a:bodyPr wrap="square" rtlCol="0" anchor="ctr"/>
-          <a:lstStyle/>
-          <a:p>
-            <a:pPr indent="0" marL="0">
-              <a:lnSpc>
-                <a:spcPct val="130000"/>
-              </a:lnSpc>
-              <a:buNone/>
-            </a:pPr>
-            <a:r>
-              <a:rPr lang="en-US" sz="1150" dirty="0">
-                <a:solidFill>
-                  <a:srgbClr val="49454F"/>
-                </a:solidFill>
-                <a:latin typeface="Gilroy" pitchFamily="34" charset="0"/>
-                <a:ea typeface="Gilroy" pitchFamily="34" charset="-122"/>
-                <a:cs typeface="Gilroy" pitchFamily="34" charset="-120"/>
-              </a:rPr>
-              <a:t>La gestión se llama "Inconvenientes con el pago de oficios judiciales" — la palabra no está en el texto visible.</a:t>
-            </a:r>
-            <a:endParaRPr lang="en-US" sz="1150" dirty="0"/>
-          </a:p>
-        </p:txBody>
-      </p:sp>
-      <p:sp>
-        <p:nvSpPr>
-          <p:cNvPr id="10" name="Text 7"/>
-          <p:cNvSpPr/>
-          <p:nvPr/>
-        </p:nvSpPr>
-        <p:spPr>
-          <a:xfrm>
-            <a:off x="548640" y="3383280"/>
-            <a:ext cx="4160520" cy="2377440"/>
-          </a:xfrm>
-          <a:prstGeom prst="rect">
-            <a:avLst/>
-          </a:prstGeom>
-          <a:noFill/>
-          <a:ln/>
-        </p:spPr>
-        <p:txBody>
-          <a:bodyPr wrap="square" rtlCol="0" anchor="t"/>
-          <a:lstStyle/>
-          <a:p>
-            <a:pPr indent="0" marL="0">
-              <a:lnSpc>
-                <a:spcPct val="125000"/>
-              </a:lnSpc>
-              <a:buNone/>
-            </a:pPr>
-            <a:r>
-              <a:rPr lang="en-US" sz="1250" b="1" dirty="0">
-                <a:solidFill>
-                  <a:srgbClr val="152663"/>
-                </a:solidFill>
-                <a:latin typeface="Gilroy" pitchFamily="34" charset="0"/>
-                <a:ea typeface="Gilroy" pitchFamily="34" charset="-122"/>
-                <a:cs typeface="Gilroy" pitchFamily="34" charset="-120"/>
-              </a:rPr>
-              <a:t>•  </a:t>
-            </a:r>
-            <a:pPr indent="0" marL="0">
-              <a:lnSpc>
-                <a:spcPct val="125000"/>
-              </a:lnSpc>
-              <a:buNone/>
-            </a:pPr>
-            <a:r>
-              <a:rPr lang="en-US" sz="1250" dirty="0">
-                <a:solidFill>
-                  <a:srgbClr val="49454F"/>
-                </a:solidFill>
-                <a:latin typeface="Gilroy" pitchFamily="34" charset="0"/>
-                <a:ea typeface="Gilroy" pitchFamily="34" charset="-122"/>
-                <a:cs typeface="Gilroy" pitchFamily="34" charset="-120"/>
-              </a:rPr>
-              <a:t>Tags de esa gestión: </a:t>
-            </a:r>
-            <a:pPr indent="0" marL="0">
-              <a:lnSpc>
-                <a:spcPct val="125000"/>
-              </a:lnSpc>
-              <a:buNone/>
-            </a:pPr>
-            <a:r>
-              <a:rPr lang="en-US" sz="1250" i="1" dirty="0">
-                <a:solidFill>
-                  <a:srgbClr val="49454F"/>
-                </a:solidFill>
-                <a:latin typeface="Gilroy" pitchFamily="34" charset="0"/>
-                <a:ea typeface="Gilroy" pitchFamily="34" charset="-122"/>
-                <a:cs typeface="Gilroy" pitchFamily="34" charset="-120"/>
-              </a:rPr>
-              <a:t>justicia, citación, oficial, cobro, error, falla, judicial, pago, problema</a:t>
-            </a:r>
-            <a:pPr indent="0" marL="0">
-              <a:lnSpc>
-                <a:spcPct val="125000"/>
-              </a:lnSpc>
-              <a:buNone/>
-            </a:pPr>
-            <a:r>
-              <a:rPr lang="en-US" sz="1250" dirty="0">
-                <a:solidFill>
-                  <a:srgbClr val="49454F"/>
-                </a:solidFill>
-                <a:latin typeface="Gilroy" pitchFamily="34" charset="0"/>
-                <a:ea typeface="Gilroy" pitchFamily="34" charset="-122"/>
-                <a:cs typeface="Gilroy" pitchFamily="34" charset="-120"/>
-              </a:rPr>
-              <a:t>.</a:t>
-            </a:r>
-            <a:pPr indent="0" marL="0">
-              <a:lnSpc>
-                <a:spcPct val="125000"/>
-              </a:lnSpc>
-              <a:buNone/>
-            </a:pPr>
-            <a:r>
-              <a:rPr lang="en-US" sz="1250" dirty="0">
-                <a:solidFill>
-                  <a:srgbClr val="49454F"/>
-                </a:solidFill>
-                <a:latin typeface="Gilroy" pitchFamily="34" charset="0"/>
-                <a:ea typeface="Gilroy" pitchFamily="34" charset="-122"/>
-                <a:cs typeface="Gilroy" pitchFamily="34" charset="-120"/>
-              </a:rPr>
-              <a:t>
-</a:t>
-            </a:r>
-            <a:pPr indent="0" marL="0">
-              <a:lnSpc>
-                <a:spcPct val="125000"/>
-              </a:lnSpc>
-              <a:buNone/>
-            </a:pPr>
-            <a:r>
-              <a:rPr lang="en-US" sz="1250" b="1" dirty="0">
-                <a:solidFill>
-                  <a:srgbClr val="152663"/>
-                </a:solidFill>
-                <a:latin typeface="Gilroy" pitchFamily="34" charset="0"/>
-                <a:ea typeface="Gilroy" pitchFamily="34" charset="-122"/>
-                <a:cs typeface="Gilroy" pitchFamily="34" charset="-120"/>
-              </a:rPr>
-              <a:t>•  </a:t>
-            </a:r>
-            <a:pPr indent="0" marL="0">
-              <a:lnSpc>
-                <a:spcPct val="125000"/>
-              </a:lnSpc>
-              <a:buNone/>
-            </a:pPr>
-            <a:r>
-              <a:rPr lang="en-US" sz="1250" dirty="0">
-                <a:solidFill>
-                  <a:srgbClr val="49454F"/>
-                </a:solidFill>
-                <a:latin typeface="Gilroy" pitchFamily="34" charset="0"/>
-                <a:ea typeface="Gilroy" pitchFamily="34" charset="-122"/>
-                <a:cs typeface="Gilroy" pitchFamily="34" charset="-120"/>
-              </a:rPr>
-              <a:t>Reglas de patrón aplicadas a las 27 gestiones: "error" → tag </a:t>
-            </a:r>
-            <a:pPr indent="0" marL="0">
-              <a:lnSpc>
-                <a:spcPct val="125000"/>
-              </a:lnSpc>
-              <a:buNone/>
-            </a:pPr>
-            <a:r>
-              <a:rPr lang="en-US" sz="1250" b="1" dirty="0">
-                <a:solidFill>
-                  <a:srgbClr val="49454F"/>
-                </a:solidFill>
-                <a:latin typeface="Gilroy" pitchFamily="34" charset="0"/>
-                <a:ea typeface="Gilroy" pitchFamily="34" charset="-122"/>
-                <a:cs typeface="Gilroy" pitchFamily="34" charset="-120"/>
-              </a:rPr>
-              <a:t>falla</a:t>
-            </a:r>
-            <a:pPr indent="0" marL="0">
-              <a:lnSpc>
-                <a:spcPct val="125000"/>
-              </a:lnSpc>
-              <a:buNone/>
-            </a:pPr>
-            <a:r>
-              <a:rPr lang="en-US" sz="1250" dirty="0">
-                <a:solidFill>
-                  <a:srgbClr val="49454F"/>
-                </a:solidFill>
-                <a:latin typeface="Gilroy" pitchFamily="34" charset="0"/>
-                <a:ea typeface="Gilroy" pitchFamily="34" charset="-122"/>
-                <a:cs typeface="Gilroy" pitchFamily="34" charset="-120"/>
-              </a:rPr>
-              <a:t>; "demora"/"problema(s)" → tag </a:t>
-            </a:r>
-            <a:pPr indent="0" marL="0">
-              <a:lnSpc>
-                <a:spcPct val="125000"/>
-              </a:lnSpc>
-              <a:buNone/>
-            </a:pPr>
-            <a:r>
-              <a:rPr lang="en-US" sz="1250" b="1" dirty="0">
-                <a:solidFill>
-                  <a:srgbClr val="49454F"/>
-                </a:solidFill>
-                <a:latin typeface="Gilroy" pitchFamily="34" charset="0"/>
-                <a:ea typeface="Gilroy" pitchFamily="34" charset="-122"/>
-                <a:cs typeface="Gilroy" pitchFamily="34" charset="-120"/>
-              </a:rPr>
-              <a:t>problema</a:t>
-            </a:r>
-            <a:pPr indent="0" marL="0">
-              <a:lnSpc>
-                <a:spcPct val="125000"/>
-              </a:lnSpc>
-              <a:buNone/>
-            </a:pPr>
-            <a:r>
-              <a:rPr lang="en-US" sz="1250" dirty="0">
-                <a:solidFill>
-                  <a:srgbClr val="49454F"/>
-                </a:solidFill>
-                <a:latin typeface="Gilroy" pitchFamily="34" charset="0"/>
-                <a:ea typeface="Gilroy" pitchFamily="34" charset="-122"/>
-                <a:cs typeface="Gilroy" pitchFamily="34" charset="-120"/>
-              </a:rPr>
-              <a:t>.</a:t>
-            </a:r>
-            <a:pPr indent="0" marL="0">
-              <a:lnSpc>
-                <a:spcPct val="125000"/>
-              </a:lnSpc>
-              <a:buNone/>
-            </a:pPr>
-            <a:r>
-              <a:rPr lang="en-US" sz="1250" dirty="0">
-                <a:solidFill>
-                  <a:srgbClr val="49454F"/>
-                </a:solidFill>
-                <a:latin typeface="Gilroy" pitchFamily="34" charset="0"/>
-                <a:ea typeface="Gilroy" pitchFamily="34" charset="-122"/>
-                <a:cs typeface="Gilroy" pitchFamily="34" charset="-120"/>
-              </a:rPr>
-              <a:t>
-</a:t>
-            </a:r>
-            <a:pPr indent="0" marL="0">
-              <a:lnSpc>
-                <a:spcPct val="125000"/>
-              </a:lnSpc>
-              <a:buNone/>
-            </a:pPr>
-            <a:r>
-              <a:rPr lang="en-US" sz="1250" b="1" dirty="0">
-                <a:solidFill>
-                  <a:srgbClr val="152663"/>
-                </a:solidFill>
-                <a:latin typeface="Gilroy" pitchFamily="34" charset="0"/>
-                <a:ea typeface="Gilroy" pitchFamily="34" charset="-122"/>
-                <a:cs typeface="Gilroy" pitchFamily="34" charset="-120"/>
-              </a:rPr>
-              <a:t>•  </a:t>
-            </a:r>
-            <a:pPr indent="0" marL="0">
-              <a:lnSpc>
-                <a:spcPct val="125000"/>
-              </a:lnSpc>
-              <a:buNone/>
-            </a:pPr>
-            <a:r>
-              <a:rPr lang="en-US" sz="1250" dirty="0">
-                <a:solidFill>
-                  <a:srgbClr val="49454F"/>
-                </a:solidFill>
-                <a:latin typeface="Gilroy" pitchFamily="34" charset="0"/>
-                <a:ea typeface="Gilroy" pitchFamily="34" charset="-122"/>
-                <a:cs typeface="Gilroy" pitchFamily="34" charset="-120"/>
-              </a:rPr>
-              <a:t>Los tags no son un dato de negocio confirmado — son una propuesta de diseño.</a:t>
-            </a:r>
-            <a:endParaRPr lang="en-US" sz="1250" dirty="0"/>
-          </a:p>
-        </p:txBody>
-      </p:sp>
-      <p:sp>
-        <p:nvSpPr>
-          <p:cNvPr id="11" name="Shape 8"/>
-          <p:cNvSpPr/>
-          <p:nvPr/>
-        </p:nvSpPr>
-        <p:spPr>
-          <a:xfrm>
-            <a:off x="5001768" y="1344168"/>
-            <a:ext cx="6668719" cy="4188524"/>
-          </a:xfrm>
-          <a:prstGeom prst="roundRect">
-            <a:avLst>
-              <a:gd name="adj" fmla="val 1746"/>
-            </a:avLst>
-          </a:prstGeom>
-          <a:solidFill>
-            <a:srgbClr val="191919"/>
-          </a:solidFill>
-          <a:ln/>
-          <a:effectLst>
-            <a:outerShdw sx="100000" sy="100000" kx="0" ky="0" algn="bl" rotWithShape="0" blurRad="152400" dist="50800" dir="5400000">
-              <a:srgbClr val="152663">
-                <a:alpha val="35000"/>
-              </a:srgbClr>
-            </a:outerShdw>
-          </a:effectLst>
-        </p:spPr>
-      </p:sp>
-      <p:pic>
-        <p:nvPicPr>
-          <p:cNvPr id="12" name="Image 1" descr="C:\MLOF 01\VORTEX\CORREO ARGENTINO\Reclamos\Reclamos claude\hub\presentaciones\screenshots\06-buscar-justicia.png">    </p:cNvPr>
-          <p:cNvPicPr>
-            <a:picLocks noChangeAspect="1"/>
-          </p:cNvPicPr>
-          <p:nvPr/>
-        </p:nvPicPr>
-        <p:blipFill>
-          <a:blip r:embed="rId2"/>
-          <a:srcRect l="0" r="0" t="0" b="0"/>
-          <a:stretch/>
-        </p:blipFill>
-        <p:spPr>
-          <a:xfrm>
-            <a:off x="5029200" y="1371600"/>
-            <a:ext cx="6613855" cy="4133660"/>
-          </a:xfrm>
-          <a:prstGeom prst="rect">
-            <a:avLst/>
-          </a:prstGeom>
-        </p:spPr>
-      </p:pic>
     </p:spTree>
   </p:cSld>
   <p:clrMapOvr>
@@ -4227,8 +4343,8 @@
         </p:nvSpPr>
         <p:spPr>
           <a:xfrm>
-            <a:off x="7482535" y="1234440"/>
-            <a:ext cx="3877056" cy="329184"/>
+            <a:off x="548640" y="1234440"/>
+            <a:ext cx="2395728" cy="329184"/>
           </a:xfrm>
           <a:prstGeom prst="roundRect">
             <a:avLst>
@@ -4249,8 +4365,8 @@
         </p:nvSpPr>
         <p:spPr>
           <a:xfrm>
-            <a:off x="7528255" y="1234440"/>
-            <a:ext cx="3785616" cy="329184"/>
+            <a:off x="594360" y="1234440"/>
+            <a:ext cx="2304288" cy="329184"/>
           </a:xfrm>
           <a:prstGeom prst="rect">
             <a:avLst/>
@@ -4274,7 +4390,7 @@
                 <a:ea typeface="Gilroy" pitchFamily="34" charset="-122"/>
                 <a:cs typeface="Gilroy" pitchFamily="34" charset="-120"/>
               </a:rPr>
-              <a:t>NOMBRE DE CATEGORÍA COMO TAG</a:t>
+              <a:t>TAGS DE SINÓNIMO</a:t>
             </a:r>
             <a:endParaRPr lang="en-US" sz="1050" dirty="0"/>
           </a:p>
@@ -4288,7 +4404,7 @@
         </p:nvSpPr>
         <p:spPr>
           <a:xfrm>
-            <a:off x="7482535" y="1691640"/>
+            <a:off x="548640" y="1691640"/>
             <a:ext cx="4160520" cy="914400"/>
           </a:xfrm>
           <a:prstGeom prst="rect">
@@ -4316,7 +4432,7 @@
                 <a:ea typeface="Gilroy" pitchFamily="34" charset="-122"/>
                 <a:cs typeface="Gilroy" pitchFamily="34" charset="-120"/>
               </a:rPr>
-              <a:t>Buscar "Mi Cuenta" trae todo su contenido</a:t>
+              <a:t>"Justicia" encuentra un motivo que no dice "justicia"</a:t>
             </a:r>
             <a:endParaRPr lang="en-US" sz="1900" dirty="0"/>
           </a:p>
@@ -4330,7 +4446,7 @@
         </p:nvSpPr>
         <p:spPr>
           <a:xfrm>
-            <a:off x="7482535" y="2350008"/>
+            <a:off x="548640" y="2606040"/>
             <a:ext cx="4160520" cy="822960"/>
           </a:xfrm>
           <a:prstGeom prst="rect">
@@ -4358,7 +4474,7 @@
                 <a:ea typeface="Gilroy" pitchFamily="34" charset="-122"/>
                 <a:cs typeface="Gilroy" pitchFamily="34" charset="-120"/>
               </a:rPr>
-              <a:t>Sin tocar ninguna categoría — con "Todos" seleccionado, escribir el nombre de una categoría alcanza.</a:t>
+              <a:t>La gestión se llama "Inconvenientes con el pago de oficios judiciales" — la palabra no está en el texto visible.</a:t>
             </a:r>
             <a:endParaRPr lang="en-US" sz="1150" dirty="0"/>
           </a:p>
@@ -4372,7 +4488,7 @@
         </p:nvSpPr>
         <p:spPr>
           <a:xfrm>
-            <a:off x="7482535" y="3127248"/>
+            <a:off x="548640" y="3383280"/>
             <a:ext cx="4160520" cy="2377440"/>
           </a:xfrm>
           <a:prstGeom prst="rect">
@@ -4417,7 +4533,41 @@
                 <a:ea typeface="Gilroy" pitchFamily="34" charset="-122"/>
                 <a:cs typeface="Gilroy" pitchFamily="34" charset="-120"/>
               </a:rPr>
-              <a:t>Cada gestión lleva el nombre de su propia categoría como tag más.</a:t>
+              <a:t>Tags de esa gestión: </a:t>
+            </a:r>
+            <a:pPr indent="0" marL="0">
+              <a:lnSpc>
+                <a:spcPct val="125000"/>
+              </a:lnSpc>
+              <a:buNone/>
+            </a:pPr>
+            <a:r>
+              <a:rPr lang="en-US" sz="1250" i="1" dirty="0">
+                <a:solidFill>
+                  <a:srgbClr val="49454F"/>
+                </a:solidFill>
+                <a:latin typeface="Gilroy" pitchFamily="34" charset="0"/>
+                <a:ea typeface="Gilroy" pitchFamily="34" charset="-122"/>
+                <a:cs typeface="Gilroy" pitchFamily="34" charset="-120"/>
+              </a:rPr>
+              <a:t>justicia, citación, oficial, cobro, error, falla, judicial, pago, problema</a:t>
+            </a:r>
+            <a:pPr indent="0" marL="0">
+              <a:lnSpc>
+                <a:spcPct val="125000"/>
+              </a:lnSpc>
+              <a:buNone/>
+            </a:pPr>
+            <a:r>
+              <a:rPr lang="en-US" sz="1250" dirty="0">
+                <a:solidFill>
+                  <a:srgbClr val="49454F"/>
+                </a:solidFill>
+                <a:latin typeface="Gilroy" pitchFamily="34" charset="0"/>
+                <a:ea typeface="Gilroy" pitchFamily="34" charset="-122"/>
+                <a:cs typeface="Gilroy" pitchFamily="34" charset="-120"/>
+              </a:rPr>
+              <a:t>.</a:t>
             </a:r>
             <a:pPr indent="0" marL="0">
               <a:lnSpc>
@@ -4469,7 +4619,75 @@
                 <a:ea typeface="Gilroy" pitchFamily="34" charset="-122"/>
                 <a:cs typeface="Gilroy" pitchFamily="34" charset="-120"/>
               </a:rPr>
-              <a:t>Se matchea igual que cualquier otro tag de búsqueda.</a:t>
+              <a:t>Reglas de patrón aplicadas a las 27 gestiones: "error" → tag </a:t>
+            </a:r>
+            <a:pPr indent="0" marL="0">
+              <a:lnSpc>
+                <a:spcPct val="125000"/>
+              </a:lnSpc>
+              <a:buNone/>
+            </a:pPr>
+            <a:r>
+              <a:rPr lang="en-US" sz="1250" b="1" dirty="0">
+                <a:solidFill>
+                  <a:srgbClr val="49454F"/>
+                </a:solidFill>
+                <a:latin typeface="Gilroy" pitchFamily="34" charset="0"/>
+                <a:ea typeface="Gilroy" pitchFamily="34" charset="-122"/>
+                <a:cs typeface="Gilroy" pitchFamily="34" charset="-120"/>
+              </a:rPr>
+              <a:t>falla</a:t>
+            </a:r>
+            <a:pPr indent="0" marL="0">
+              <a:lnSpc>
+                <a:spcPct val="125000"/>
+              </a:lnSpc>
+              <a:buNone/>
+            </a:pPr>
+            <a:r>
+              <a:rPr lang="en-US" sz="1250" dirty="0">
+                <a:solidFill>
+                  <a:srgbClr val="49454F"/>
+                </a:solidFill>
+                <a:latin typeface="Gilroy" pitchFamily="34" charset="0"/>
+                <a:ea typeface="Gilroy" pitchFamily="34" charset="-122"/>
+                <a:cs typeface="Gilroy" pitchFamily="34" charset="-120"/>
+              </a:rPr>
+              <a:t>; "demora"/"problema(s)" → tag </a:t>
+            </a:r>
+            <a:pPr indent="0" marL="0">
+              <a:lnSpc>
+                <a:spcPct val="125000"/>
+              </a:lnSpc>
+              <a:buNone/>
+            </a:pPr>
+            <a:r>
+              <a:rPr lang="en-US" sz="1250" b="1" dirty="0">
+                <a:solidFill>
+                  <a:srgbClr val="49454F"/>
+                </a:solidFill>
+                <a:latin typeface="Gilroy" pitchFamily="34" charset="0"/>
+                <a:ea typeface="Gilroy" pitchFamily="34" charset="-122"/>
+                <a:cs typeface="Gilroy" pitchFamily="34" charset="-120"/>
+              </a:rPr>
+              <a:t>problema</a:t>
+            </a:r>
+            <a:pPr indent="0" marL="0">
+              <a:lnSpc>
+                <a:spcPct val="125000"/>
+              </a:lnSpc>
+              <a:buNone/>
+            </a:pPr>
+            <a:r>
+              <a:rPr lang="en-US" sz="1250" dirty="0">
+                <a:solidFill>
+                  <a:srgbClr val="49454F"/>
+                </a:solidFill>
+                <a:latin typeface="Gilroy" pitchFamily="34" charset="0"/>
+                <a:ea typeface="Gilroy" pitchFamily="34" charset="-122"/>
+                <a:cs typeface="Gilroy" pitchFamily="34" charset="-120"/>
+              </a:rPr>
+              <a:t>.</a:t>
             </a:r>
             <a:pPr indent="0" marL="0">
               <a:lnSpc>
@@ -4521,7 +4739,7 @@
                 <a:ea typeface="Gilroy" pitchFamily="34" charset="-122"/>
                 <a:cs typeface="Gilroy" pitchFamily="34" charset="-120"/>
               </a:rPr>
-              <a:t>Aplica a las 7 categorías por igual.</a:t>
+              <a:t>Los tags no son un dato de negocio confirmado — son una propuesta de diseño.</a:t>
             </a:r>
             <a:endParaRPr lang="en-US" sz="1250" dirty="0"/>
           </a:p>
@@ -4535,7 +4753,7 @@
         </p:nvSpPr>
         <p:spPr>
           <a:xfrm>
-            <a:off x="521208" y="1344168"/>
+            <a:off x="5001768" y="1344168"/>
             <a:ext cx="6668719" cy="4188524"/>
           </a:xfrm>
           <a:prstGeom prst="roundRect">
@@ -4558,7 +4776,7 @@
       </p:sp>
       <p:pic>
         <p:nvPicPr>
-          <p:cNvPr id="12" name="Image 1" descr="C:\MLOF 01\VORTEX\CORREO ARGENTINO\Reclamos\Reclamos claude\hub\presentaciones\screenshots\07-buscar-mi_cuenta.png">    </p:cNvPr>
+          <p:cNvPr id="12" name="Image 1" descr="C:\MLOF 01\VORTEX\CORREO ARGENTINO\Reclamos\Reclamos claude\hub\presentaciones\screenshots\06-buscar-justicia.png">    </p:cNvPr>
           <p:cNvPicPr>
             <a:picLocks noChangeAspect="1"/>
           </p:cNvPicPr>
@@ -4571,7 +4789,7 @@
         </p:blipFill>
         <p:spPr>
           <a:xfrm>
-            <a:off x="548640" y="1371600"/>
+            <a:off x="5029200" y="1371600"/>
             <a:ext cx="6613855" cy="4133660"/>
           </a:xfrm>
           <a:prstGeom prst="rect">
@@ -4708,7 +4926,7 @@
                 <a:ea typeface="Gilroy" pitchFamily="34" charset="-122"/>
                 <a:cs typeface="Gilroy" pitchFamily="34" charset="-120"/>
               </a:rPr>
-              <a:t>Responsive</a:t>
+              <a:t>Buscador</a:t>
             </a:r>
             <a:endParaRPr lang="en-US" sz="1500" dirty="0"/>
           </a:p>
@@ -4722,8 +4940,8 @@
         </p:nvSpPr>
         <p:spPr>
           <a:xfrm>
-            <a:off x="548640" y="1234440"/>
-            <a:ext cx="2395728" cy="329184"/>
+            <a:off x="7482535" y="1234440"/>
+            <a:ext cx="3877056" cy="329184"/>
           </a:xfrm>
           <a:prstGeom prst="roundRect">
             <a:avLst>
@@ -4744,8 +4962,8 @@
         </p:nvSpPr>
         <p:spPr>
           <a:xfrm>
-            <a:off x="594360" y="1234440"/>
-            <a:ext cx="2304288" cy="329184"/>
+            <a:off x="7528255" y="1234440"/>
+            <a:ext cx="3785616" cy="329184"/>
           </a:xfrm>
           <a:prstGeom prst="rect">
             <a:avLst/>
@@ -4769,7 +4987,7 @@
                 <a:ea typeface="Gilroy" pitchFamily="34" charset="-122"/>
                 <a:cs typeface="Gilroy" pitchFamily="34" charset="-120"/>
               </a:rPr>
-              <a:t>PANTALLA ANGOSTA</a:t>
+              <a:t>NOMBRE DE CATEGORÍA COMO TAG</a:t>
             </a:r>
             <a:endParaRPr lang="en-US" sz="1050" dirty="0"/>
           </a:p>
@@ -4783,7 +5001,7 @@
         </p:nvSpPr>
         <p:spPr>
           <a:xfrm>
-            <a:off x="548640" y="1691640"/>
+            <a:off x="7482535" y="1691640"/>
             <a:ext cx="4160520" cy="914400"/>
           </a:xfrm>
           <a:prstGeom prst="rect">
@@ -4811,7 +5029,7 @@
                 <a:ea typeface="Gilroy" pitchFamily="34" charset="-122"/>
                 <a:cs typeface="Gilroy" pitchFamily="34" charset="-120"/>
               </a:rPr>
-              <a:t>El mismo modelo en ancho de smartphone</a:t>
+              <a:t>Buscar "Mi Cuenta" trae todo su contenido</a:t>
             </a:r>
             <a:endParaRPr lang="en-US" sz="1900" dirty="0"/>
           </a:p>
@@ -4825,7 +5043,7 @@
         </p:nvSpPr>
         <p:spPr>
           <a:xfrm>
-            <a:off x="548640" y="2350008"/>
+            <a:off x="7482535" y="2350008"/>
             <a:ext cx="4160520" cy="822960"/>
           </a:xfrm>
           <a:prstGeom prst="rect">
@@ -4853,7 +5071,7 @@
                 <a:ea typeface="Gilroy" pitchFamily="34" charset="-122"/>
                 <a:cs typeface="Gilroy" pitchFamily="34" charset="-120"/>
               </a:rPr>
-              <a:t>La misma pantalla, adaptada a un ancho típico de mobile.</a:t>
+              <a:t>Sin tocar ninguna categoría — con "Todos" seleccionado, escribir el nombre de una categoría alcanza.</a:t>
             </a:r>
             <a:endParaRPr lang="en-US" sz="1150" dirty="0"/>
           </a:p>
@@ -4867,7 +5085,7 @@
         </p:nvSpPr>
         <p:spPr>
           <a:xfrm>
-            <a:off x="548640" y="3127248"/>
+            <a:off x="7482535" y="3127248"/>
             <a:ext cx="4160520" cy="2377440"/>
           </a:xfrm>
           <a:prstGeom prst="rect">
@@ -4912,7 +5130,7 @@
                 <a:ea typeface="Gilroy" pitchFamily="34" charset="-122"/>
                 <a:cs typeface="Gilroy" pitchFamily="34" charset="-120"/>
               </a:rPr>
-              <a:t>El menú lateral se colapsa a un ícono de hamburguesa; el encabezado queda vacío salvo ese menú.</a:t>
+              <a:t>Cada gestión lleva el nombre de su propia categoría como tag más.</a:t>
             </a:r>
             <a:pPr indent="0" marL="0">
               <a:lnSpc>
@@ -4964,7 +5182,7 @@
                 <a:ea typeface="Gilroy" pitchFamily="34" charset="-122"/>
                 <a:cs typeface="Gilroy" pitchFamily="34" charset="-120"/>
               </a:rPr>
-              <a:t>El padding lateral del contenido se reduce.</a:t>
+              <a:t>Se matchea igual que cualquier otro tag de búsqueda.</a:t>
             </a:r>
             <a:pPr indent="0" marL="0">
               <a:lnSpc>
@@ -5016,7 +5234,7 @@
                 <a:ea typeface="Gilroy" pitchFamily="34" charset="-122"/>
                 <a:cs typeface="Gilroy" pitchFamily="34" charset="-120"/>
               </a:rPr>
-              <a:t>Categorías, buscador y listado se recalculan igual que en desktop.</a:t>
+              <a:t>Aplica a las 7 categorías por igual.</a:t>
             </a:r>
             <a:endParaRPr lang="en-US" sz="1250" dirty="0"/>
           </a:p>
@@ -5030,7 +5248,7 @@
         </p:nvSpPr>
         <p:spPr>
           <a:xfrm>
-            <a:off x="5001768" y="1344168"/>
+            <a:off x="521208" y="1344168"/>
             <a:ext cx="6668719" cy="4188524"/>
           </a:xfrm>
           <a:prstGeom prst="roundRect">
@@ -5053,7 +5271,7 @@
       </p:sp>
       <p:pic>
         <p:nvPicPr>
-          <p:cNvPr id="12" name="Image 1" descr="C:\MLOF 01\VORTEX\CORREO ARGENTINO\Reclamos\Reclamos claude\hub\presentaciones\screenshots\08-responsive.png">    </p:cNvPr>
+          <p:cNvPr id="12" name="Image 1" descr="C:\MLOF 01\VORTEX\CORREO ARGENTINO\Reclamos\Reclamos claude\hub\presentaciones\screenshots\07-buscar-mi_cuenta.png">    </p:cNvPr>
           <p:cNvPicPr>
             <a:picLocks noChangeAspect="1"/>
           </p:cNvPicPr>
@@ -5066,7 +5284,7 @@
         </p:blipFill>
         <p:spPr>
           <a:xfrm>
-            <a:off x="5029200" y="1371600"/>
+            <a:off x="548640" y="1371600"/>
             <a:ext cx="6613855" cy="4133660"/>
           </a:xfrm>
           <a:prstGeom prst="rect">
@@ -5203,7 +5421,7 @@
                 <a:ea typeface="Gilroy" pitchFamily="34" charset="-122"/>
                 <a:cs typeface="Gilroy" pitchFamily="34" charset="-120"/>
               </a:rPr>
-              <a:t>Pendiente</a:t>
+              <a:t>Responsive</a:t>
             </a:r>
             <a:endParaRPr lang="en-US" sz="1500" dirty="0"/>
           </a:p>
@@ -5217,8 +5435,8 @@
         </p:nvSpPr>
         <p:spPr>
           <a:xfrm>
-            <a:off x="548640" y="960120"/>
-            <a:ext cx="4617720" cy="329184"/>
+            <a:off x="548640" y="1234440"/>
+            <a:ext cx="2395728" cy="329184"/>
           </a:xfrm>
           <a:prstGeom prst="roundRect">
             <a:avLst>
@@ -5239,8 +5457,8 @@
         </p:nvSpPr>
         <p:spPr>
           <a:xfrm>
-            <a:off x="594360" y="960120"/>
-            <a:ext cx="4526280" cy="329184"/>
+            <a:off x="594360" y="1234440"/>
+            <a:ext cx="2304288" cy="329184"/>
           </a:xfrm>
           <a:prstGeom prst="rect">
             <a:avLst/>
@@ -5264,7 +5482,7 @@
                 <a:ea typeface="Gilroy" pitchFamily="34" charset="-122"/>
                 <a:cs typeface="Gilroy" pitchFamily="34" charset="-120"/>
               </a:rPr>
-              <a:t>LO QUE FALTA CERRAR CON EL NEGOCIO</a:t>
+              <a:t>PANTALLA ANGOSTA</a:t>
             </a:r>
             <a:endParaRPr lang="en-US" sz="1050" dirty="0"/>
           </a:p>
@@ -5278,8 +5496,8 @@
         </p:nvSpPr>
         <p:spPr>
           <a:xfrm>
-            <a:off x="548640" y="1417320"/>
-            <a:ext cx="10515600" cy="548640"/>
+            <a:off x="548640" y="1691640"/>
+            <a:ext cx="4160520" cy="914400"/>
           </a:xfrm>
           <a:prstGeom prst="rect">
             <a:avLst/>
@@ -5292,10 +5510,13 @@
           <a:lstStyle/>
           <a:p>
             <a:pPr indent="0" marL="0">
-              <a:buNone/>
-            </a:pPr>
-            <a:r>
-              <a:rPr lang="en-US" sz="2400" b="1" dirty="0">
+              <a:lnSpc>
+                <a:spcPct val="110000"/>
+              </a:lnSpc>
+              <a:buNone/>
+            </a:pPr>
+            <a:r>
+              <a:rPr lang="en-US" sz="1900" b="1" dirty="0">
                 <a:solidFill>
                   <a:srgbClr val="191919"/>
                 </a:solidFill>
@@ -5303,9 +5524,9 @@
                 <a:ea typeface="Gilroy" pitchFamily="34" charset="-122"/>
                 <a:cs typeface="Gilroy" pitchFamily="34" charset="-120"/>
               </a:rPr>
-              <a:t>Definiciones abiertas, ninguna resuelta por inferencia</a:t>
-            </a:r>
-            <a:endParaRPr lang="en-US" sz="2400" dirty="0"/>
+              <a:t>El mismo modelo en ancho de smartphone</a:t>
+            </a:r>
+            <a:endParaRPr lang="en-US" sz="1900" dirty="0"/>
           </a:p>
         </p:txBody>
       </p:sp>
@@ -5317,8 +5538,8 @@
         </p:nvSpPr>
         <p:spPr>
           <a:xfrm>
-            <a:off x="548640" y="1984248"/>
-            <a:ext cx="10515600" cy="457200"/>
+            <a:off x="548640" y="2350008"/>
+            <a:ext cx="4160520" cy="822960"/>
           </a:xfrm>
           <a:prstGeom prst="rect">
             <a:avLst/>
@@ -5331,10 +5552,13 @@
           <a:lstStyle/>
           <a:p>
             <a:pPr indent="0" marL="0">
-              <a:buNone/>
-            </a:pPr>
-            <a:r>
-              <a:rPr lang="en-US" sz="1350" dirty="0">
+              <a:lnSpc>
+                <a:spcPct val="130000"/>
+              </a:lnSpc>
+              <a:buNone/>
+            </a:pPr>
+            <a:r>
+              <a:rPr lang="en-US" sz="1150" dirty="0">
                 <a:solidFill>
                   <a:srgbClr val="49454F"/>
                 </a:solidFill>
@@ -5342,668 +5566,227 @@
                 <a:ea typeface="Gilroy" pitchFamily="34" charset="-122"/>
                 <a:cs typeface="Gilroy" pitchFamily="34" charset="-120"/>
               </a:rPr>
-              <a:t>Ninguno de estos puntos fue asumido — quedan como preguntas explícitas.</a:t>
-            </a:r>
-            <a:endParaRPr lang="en-US" sz="1350" dirty="0"/>
-          </a:p>
-        </p:txBody>
-      </p:sp>
-      <p:sp>
-        <p:nvSpPr>
-          <p:cNvPr id="10" name="Shape 7"/>
-          <p:cNvSpPr/>
-          <p:nvPr/>
-        </p:nvSpPr>
-        <p:spPr>
-          <a:xfrm>
-            <a:off x="548640" y="2624328"/>
-            <a:ext cx="10881360" cy="896112"/>
+              <a:t>La misma pantalla, adaptada a un ancho típico de mobile.</a:t>
+            </a:r>
+            <a:endParaRPr lang="en-US" sz="1150" dirty="0"/>
+          </a:p>
+        </p:txBody>
+      </p:sp>
+      <p:sp>
+        <p:nvSpPr>
+          <p:cNvPr id="10" name="Text 7"/>
+          <p:cNvSpPr/>
+          <p:nvPr/>
+        </p:nvSpPr>
+        <p:spPr>
+          <a:xfrm>
+            <a:off x="548640" y="3127248"/>
+            <a:ext cx="4160520" cy="2377440"/>
+          </a:xfrm>
+          <a:prstGeom prst="rect">
+            <a:avLst/>
+          </a:prstGeom>
+          <a:noFill/>
+          <a:ln/>
+        </p:spPr>
+        <p:txBody>
+          <a:bodyPr wrap="square" rtlCol="0" anchor="t"/>
+          <a:lstStyle/>
+          <a:p>
+            <a:pPr indent="0" marL="0">
+              <a:lnSpc>
+                <a:spcPct val="125000"/>
+              </a:lnSpc>
+              <a:buNone/>
+            </a:pPr>
+            <a:r>
+              <a:rPr lang="en-US" sz="1250" b="1" dirty="0">
+                <a:solidFill>
+                  <a:srgbClr val="152663"/>
+                </a:solidFill>
+                <a:latin typeface="Gilroy" pitchFamily="34" charset="0"/>
+                <a:ea typeface="Gilroy" pitchFamily="34" charset="-122"/>
+                <a:cs typeface="Gilroy" pitchFamily="34" charset="-120"/>
+              </a:rPr>
+              <a:t>•  </a:t>
+            </a:r>
+            <a:pPr indent="0" marL="0">
+              <a:lnSpc>
+                <a:spcPct val="125000"/>
+              </a:lnSpc>
+              <a:buNone/>
+            </a:pPr>
+            <a:r>
+              <a:rPr lang="en-US" sz="1250" dirty="0">
+                <a:solidFill>
+                  <a:srgbClr val="49454F"/>
+                </a:solidFill>
+                <a:latin typeface="Gilroy" pitchFamily="34" charset="0"/>
+                <a:ea typeface="Gilroy" pitchFamily="34" charset="-122"/>
+                <a:cs typeface="Gilroy" pitchFamily="34" charset="-120"/>
+              </a:rPr>
+              <a:t>El menú lateral se colapsa a un ícono de hamburguesa; el encabezado queda vacío salvo ese menú.</a:t>
+            </a:r>
+            <a:pPr indent="0" marL="0">
+              <a:lnSpc>
+                <a:spcPct val="125000"/>
+              </a:lnSpc>
+              <a:buNone/>
+            </a:pPr>
+            <a:r>
+              <a:rPr lang="en-US" sz="1250" dirty="0">
+                <a:solidFill>
+                  <a:srgbClr val="49454F"/>
+                </a:solidFill>
+                <a:latin typeface="Gilroy" pitchFamily="34" charset="0"/>
+                <a:ea typeface="Gilroy" pitchFamily="34" charset="-122"/>
+                <a:cs typeface="Gilroy" pitchFamily="34" charset="-120"/>
+              </a:rPr>
+              <a:t>
+</a:t>
+            </a:r>
+            <a:pPr indent="0" marL="0">
+              <a:lnSpc>
+                <a:spcPct val="125000"/>
+              </a:lnSpc>
+              <a:buNone/>
+            </a:pPr>
+            <a:r>
+              <a:rPr lang="en-US" sz="1250" b="1" dirty="0">
+                <a:solidFill>
+                  <a:srgbClr val="152663"/>
+                </a:solidFill>
+                <a:latin typeface="Gilroy" pitchFamily="34" charset="0"/>
+                <a:ea typeface="Gilroy" pitchFamily="34" charset="-122"/>
+                <a:cs typeface="Gilroy" pitchFamily="34" charset="-120"/>
+              </a:rPr>
+              <a:t>•  </a:t>
+            </a:r>
+            <a:pPr indent="0" marL="0">
+              <a:lnSpc>
+                <a:spcPct val="125000"/>
+              </a:lnSpc>
+              <a:buNone/>
+            </a:pPr>
+            <a:r>
+              <a:rPr lang="en-US" sz="1250" dirty="0">
+                <a:solidFill>
+                  <a:srgbClr val="49454F"/>
+                </a:solidFill>
+                <a:latin typeface="Gilroy" pitchFamily="34" charset="0"/>
+                <a:ea typeface="Gilroy" pitchFamily="34" charset="-122"/>
+                <a:cs typeface="Gilroy" pitchFamily="34" charset="-120"/>
+              </a:rPr>
+              <a:t>El padding lateral del contenido se reduce.</a:t>
+            </a:r>
+            <a:pPr indent="0" marL="0">
+              <a:lnSpc>
+                <a:spcPct val="125000"/>
+              </a:lnSpc>
+              <a:buNone/>
+            </a:pPr>
+            <a:r>
+              <a:rPr lang="en-US" sz="1250" dirty="0">
+                <a:solidFill>
+                  <a:srgbClr val="49454F"/>
+                </a:solidFill>
+                <a:latin typeface="Gilroy" pitchFamily="34" charset="0"/>
+                <a:ea typeface="Gilroy" pitchFamily="34" charset="-122"/>
+                <a:cs typeface="Gilroy" pitchFamily="34" charset="-120"/>
+              </a:rPr>
+              <a:t>
+</a:t>
+            </a:r>
+            <a:pPr indent="0" marL="0">
+              <a:lnSpc>
+                <a:spcPct val="125000"/>
+              </a:lnSpc>
+              <a:buNone/>
+            </a:pPr>
+            <a:r>
+              <a:rPr lang="en-US" sz="1250" b="1" dirty="0">
+                <a:solidFill>
+                  <a:srgbClr val="152663"/>
+                </a:solidFill>
+                <a:latin typeface="Gilroy" pitchFamily="34" charset="0"/>
+                <a:ea typeface="Gilroy" pitchFamily="34" charset="-122"/>
+                <a:cs typeface="Gilroy" pitchFamily="34" charset="-120"/>
+              </a:rPr>
+              <a:t>•  </a:t>
+            </a:r>
+            <a:pPr indent="0" marL="0">
+              <a:lnSpc>
+                <a:spcPct val="125000"/>
+              </a:lnSpc>
+              <a:buNone/>
+            </a:pPr>
+            <a:r>
+              <a:rPr lang="en-US" sz="1250" dirty="0">
+                <a:solidFill>
+                  <a:srgbClr val="49454F"/>
+                </a:solidFill>
+                <a:latin typeface="Gilroy" pitchFamily="34" charset="0"/>
+                <a:ea typeface="Gilroy" pitchFamily="34" charset="-122"/>
+                <a:cs typeface="Gilroy" pitchFamily="34" charset="-120"/>
+              </a:rPr>
+              <a:t>Categorías, buscador y listado se recalculan igual que en desktop.</a:t>
+            </a:r>
+            <a:endParaRPr lang="en-US" sz="1250" dirty="0"/>
+          </a:p>
+        </p:txBody>
+      </p:sp>
+      <p:sp>
+        <p:nvSpPr>
+          <p:cNvPr id="11" name="Shape 8"/>
+          <p:cNvSpPr/>
+          <p:nvPr/>
+        </p:nvSpPr>
+        <p:spPr>
+          <a:xfrm>
+            <a:off x="5001768" y="1344168"/>
+            <a:ext cx="6668719" cy="4188524"/>
           </a:xfrm>
           <a:prstGeom prst="roundRect">
             <a:avLst>
-              <a:gd name="adj" fmla="val 8163"/>
+              <a:gd name="adj" fmla="val 1746"/>
             </a:avLst>
           </a:prstGeom>
           <a:solidFill>
-            <a:srgbClr val="F2F2F2"/>
+            <a:srgbClr val="191919"/>
           </a:solidFill>
           <a:ln/>
-        </p:spPr>
-      </p:sp>
-      <p:sp>
-        <p:nvSpPr>
-          <p:cNvPr id="11" name="Shape 8"/>
-          <p:cNvSpPr/>
-          <p:nvPr/>
-        </p:nvSpPr>
-        <p:spPr>
-          <a:xfrm>
-            <a:off x="850392" y="2871216"/>
-            <a:ext cx="402336" cy="402336"/>
-          </a:xfrm>
-          <a:prstGeom prst="ellipse">
-            <a:avLst/>
-          </a:prstGeom>
-          <a:ln w="25400">
-            <a:solidFill>
-              <a:srgbClr val="152663"/>
-            </a:solidFill>
-            <a:prstDash val="solid"/>
-          </a:ln>
-        </p:spPr>
-      </p:sp>
-      <p:sp>
-        <p:nvSpPr>
-          <p:cNvPr id="12" name="Text 9"/>
-          <p:cNvSpPr/>
-          <p:nvPr/>
-        </p:nvSpPr>
-        <p:spPr>
-          <a:xfrm>
-            <a:off x="850392" y="2852928"/>
-            <a:ext cx="402336" cy="402336"/>
-          </a:xfrm>
-          <a:prstGeom prst="rect">
-            <a:avLst/>
-          </a:prstGeom>
-          <a:noFill/>
-          <a:ln/>
-        </p:spPr>
-        <p:txBody>
-          <a:bodyPr wrap="square" rtlCol="0" anchor="ctr"/>
-          <a:lstStyle/>
-          <a:p>
-            <a:pPr algn="ctr" indent="0" marL="0">
-              <a:buNone/>
-            </a:pPr>
-            <a:r>
-              <a:rPr lang="en-US" sz="1500" b="1" dirty="0">
-                <a:solidFill>
-                  <a:srgbClr val="152663"/>
-                </a:solidFill>
-                <a:latin typeface="Gilroy" pitchFamily="34" charset="0"/>
-                <a:ea typeface="Gilroy" pitchFamily="34" charset="-122"/>
-                <a:cs typeface="Gilroy" pitchFamily="34" charset="-120"/>
-              </a:rPr>
-              <a:t>?</a:t>
-            </a:r>
-            <a:endParaRPr lang="en-US" sz="1500" dirty="0"/>
-          </a:p>
-        </p:txBody>
-      </p:sp>
-      <p:sp>
-        <p:nvSpPr>
-          <p:cNvPr id="13" name="Text 10"/>
-          <p:cNvSpPr/>
-          <p:nvPr/>
-        </p:nvSpPr>
-        <p:spPr>
-          <a:xfrm>
-            <a:off x="1417320" y="2734056"/>
-            <a:ext cx="9784080" cy="310896"/>
-          </a:xfrm>
-          <a:prstGeom prst="rect">
-            <a:avLst/>
-          </a:prstGeom>
-          <a:noFill/>
-          <a:ln/>
-        </p:spPr>
-        <p:txBody>
-          <a:bodyPr wrap="square" rtlCol="0" anchor="ctr"/>
-          <a:lstStyle/>
-          <a:p>
-            <a:pPr indent="0" marL="0">
-              <a:buNone/>
-            </a:pPr>
-            <a:r>
-              <a:rPr lang="en-US" sz="1350" b="1" dirty="0">
-                <a:solidFill>
-                  <a:srgbClr val="191919"/>
-                </a:solidFill>
-                <a:latin typeface="Gilroy" pitchFamily="34" charset="0"/>
-                <a:ea typeface="Gilroy" pitchFamily="34" charset="-122"/>
-                <a:cs typeface="Gilroy" pitchFamily="34" charset="-120"/>
-              </a:rPr>
-              <a:t>Agrupaciones por intuición</a:t>
-            </a:r>
-            <a:endParaRPr lang="en-US" sz="1350" dirty="0"/>
-          </a:p>
-        </p:txBody>
-      </p:sp>
-      <p:sp>
-        <p:nvSpPr>
-          <p:cNvPr id="14" name="Text 11"/>
-          <p:cNvSpPr/>
-          <p:nvPr/>
-        </p:nvSpPr>
-        <p:spPr>
-          <a:xfrm>
-            <a:off x="1417320" y="3044952"/>
-            <a:ext cx="9784080" cy="438912"/>
-          </a:xfrm>
-          <a:prstGeom prst="rect">
-            <a:avLst/>
-          </a:prstGeom>
-          <a:noFill/>
-          <a:ln/>
-        </p:spPr>
-        <p:txBody>
-          <a:bodyPr wrap="square" rtlCol="0" anchor="ctr"/>
-          <a:lstStyle/>
-          <a:p>
-            <a:pPr indent="0" marL="0">
-              <a:lnSpc>
-                <a:spcPct val="120000"/>
-              </a:lnSpc>
-              <a:buNone/>
-            </a:pPr>
-            <a:r>
-              <a:rPr lang="en-US" sz="1100" dirty="0">
-                <a:solidFill>
-                  <a:srgbClr val="49454F"/>
-                </a:solidFill>
-                <a:latin typeface="Gilroy" pitchFamily="34" charset="0"/>
-                <a:ea typeface="Gilroy" pitchFamily="34" charset="-122"/>
-                <a:cs typeface="Gilroy" pitchFamily="34" charset="-120"/>
-              </a:rPr>
-              <a:t>Mi Cuenta, Paquetería Nacional y Oficios Judiciales se armaron reagrupando motivos ya conocidos — el negocio todavía no las validó.</a:t>
-            </a:r>
-            <a:endParaRPr lang="en-US" sz="1100" dirty="0"/>
-          </a:p>
-        </p:txBody>
-      </p:sp>
-      <p:sp>
-        <p:nvSpPr>
-          <p:cNvPr id="15" name="Shape 12"/>
-          <p:cNvSpPr/>
-          <p:nvPr/>
-        </p:nvSpPr>
-        <p:spPr>
-          <a:xfrm>
-            <a:off x="548640" y="3611880"/>
-            <a:ext cx="10881360" cy="896112"/>
-          </a:xfrm>
-          <a:prstGeom prst="roundRect">
-            <a:avLst>
-              <a:gd name="adj" fmla="val 8163"/>
-            </a:avLst>
-          </a:prstGeom>
-          <a:solidFill>
-            <a:srgbClr val="F2F2F2"/>
-          </a:solidFill>
-          <a:ln/>
-        </p:spPr>
-      </p:sp>
-      <p:sp>
-        <p:nvSpPr>
-          <p:cNvPr id="16" name="Shape 13"/>
-          <p:cNvSpPr/>
-          <p:nvPr/>
-        </p:nvSpPr>
-        <p:spPr>
-          <a:xfrm>
-            <a:off x="850392" y="3858768"/>
-            <a:ext cx="402336" cy="402336"/>
-          </a:xfrm>
-          <a:prstGeom prst="ellipse">
-            <a:avLst/>
-          </a:prstGeom>
-          <a:ln w="25400">
-            <a:solidFill>
-              <a:srgbClr val="152663"/>
-            </a:solidFill>
-            <a:prstDash val="solid"/>
-          </a:ln>
-        </p:spPr>
-      </p:sp>
-      <p:sp>
-        <p:nvSpPr>
-          <p:cNvPr id="17" name="Text 14"/>
-          <p:cNvSpPr/>
-          <p:nvPr/>
-        </p:nvSpPr>
-        <p:spPr>
-          <a:xfrm>
-            <a:off x="850392" y="3840480"/>
-            <a:ext cx="402336" cy="402336"/>
-          </a:xfrm>
-          <a:prstGeom prst="rect">
-            <a:avLst/>
-          </a:prstGeom>
-          <a:noFill/>
-          <a:ln/>
-        </p:spPr>
-        <p:txBody>
-          <a:bodyPr wrap="square" rtlCol="0" anchor="ctr"/>
-          <a:lstStyle/>
-          <a:p>
-            <a:pPr algn="ctr" indent="0" marL="0">
-              <a:buNone/>
-            </a:pPr>
-            <a:r>
-              <a:rPr lang="en-US" sz="1500" b="1" dirty="0">
-                <a:solidFill>
-                  <a:srgbClr val="152663"/>
-                </a:solidFill>
-                <a:latin typeface="Gilroy" pitchFamily="34" charset="0"/>
-                <a:ea typeface="Gilroy" pitchFamily="34" charset="-122"/>
-                <a:cs typeface="Gilroy" pitchFamily="34" charset="-120"/>
-              </a:rPr>
-              <a:t>?</a:t>
-            </a:r>
-            <a:endParaRPr lang="en-US" sz="1500" dirty="0"/>
-          </a:p>
-        </p:txBody>
-      </p:sp>
-      <p:sp>
-        <p:nvSpPr>
-          <p:cNvPr id="18" name="Text 15"/>
-          <p:cNvSpPr/>
-          <p:nvPr/>
-        </p:nvSpPr>
-        <p:spPr>
-          <a:xfrm>
-            <a:off x="1417320" y="3721608"/>
-            <a:ext cx="9784080" cy="310896"/>
-          </a:xfrm>
-          <a:prstGeom prst="rect">
-            <a:avLst/>
-          </a:prstGeom>
-          <a:noFill/>
-          <a:ln/>
-        </p:spPr>
-        <p:txBody>
-          <a:bodyPr wrap="square" rtlCol="0" anchor="ctr"/>
-          <a:lstStyle/>
-          <a:p>
-            <a:pPr indent="0" marL="0">
-              <a:buNone/>
-            </a:pPr>
-            <a:r>
-              <a:rPr lang="en-US" sz="1350" b="1" dirty="0">
-                <a:solidFill>
-                  <a:srgbClr val="191919"/>
-                </a:solidFill>
-                <a:latin typeface="Gilroy" pitchFamily="34" charset="0"/>
-                <a:ea typeface="Gilroy" pitchFamily="34" charset="-122"/>
-                <a:cs typeface="Gilroy" pitchFamily="34" charset="-120"/>
-              </a:rPr>
-              <a:t>Contenido real pendiente</a:t>
-            </a:r>
-            <a:endParaRPr lang="en-US" sz="1350" dirty="0"/>
-          </a:p>
-        </p:txBody>
-      </p:sp>
-      <p:sp>
-        <p:nvSpPr>
-          <p:cNvPr id="19" name="Text 16"/>
-          <p:cNvSpPr/>
-          <p:nvPr/>
-        </p:nvSpPr>
-        <p:spPr>
-          <a:xfrm>
-            <a:off x="1417320" y="4032504"/>
-            <a:ext cx="9784080" cy="438912"/>
-          </a:xfrm>
-          <a:prstGeom prst="rect">
-            <a:avLst/>
-          </a:prstGeom>
-          <a:noFill/>
-          <a:ln/>
-        </p:spPr>
-        <p:txBody>
-          <a:bodyPr wrap="square" rtlCol="0" anchor="ctr"/>
-          <a:lstStyle/>
-          <a:p>
-            <a:pPr indent="0" marL="0">
-              <a:lnSpc>
-                <a:spcPct val="120000"/>
-              </a:lnSpc>
-              <a:buNone/>
-            </a:pPr>
-            <a:r>
-              <a:rPr lang="en-US" sz="1100" dirty="0">
-                <a:solidFill>
-                  <a:srgbClr val="49454F"/>
-                </a:solidFill>
-                <a:latin typeface="Gilroy" pitchFamily="34" charset="0"/>
-                <a:ea typeface="Gilroy" pitchFamily="34" charset="-122"/>
-                <a:cs typeface="Gilroy" pitchFamily="34" charset="-120"/>
-              </a:rPr>
-              <a:t>Paquetería Internacional y Mis Comunicaciones Digitales necesitan gestiones reales que reemplacen el contenido inventado — hasta entonces quedan ocultas por defecto.</a:t>
-            </a:r>
-            <a:endParaRPr lang="en-US" sz="1100" dirty="0"/>
-          </a:p>
-        </p:txBody>
-      </p:sp>
-      <p:sp>
-        <p:nvSpPr>
-          <p:cNvPr id="20" name="Shape 17"/>
-          <p:cNvSpPr/>
-          <p:nvPr/>
-        </p:nvSpPr>
-        <p:spPr>
-          <a:xfrm>
-            <a:off x="548640" y="4599432"/>
-            <a:ext cx="10881360" cy="896112"/>
-          </a:xfrm>
-          <a:prstGeom prst="roundRect">
-            <a:avLst>
-              <a:gd name="adj" fmla="val 8163"/>
-            </a:avLst>
-          </a:prstGeom>
-          <a:solidFill>
-            <a:srgbClr val="F2F2F2"/>
-          </a:solidFill>
-          <a:ln/>
-        </p:spPr>
-      </p:sp>
-      <p:sp>
-        <p:nvSpPr>
-          <p:cNvPr id="21" name="Shape 18"/>
-          <p:cNvSpPr/>
-          <p:nvPr/>
-        </p:nvSpPr>
-        <p:spPr>
-          <a:xfrm>
-            <a:off x="850392" y="4846320"/>
-            <a:ext cx="402336" cy="402336"/>
-          </a:xfrm>
-          <a:prstGeom prst="ellipse">
-            <a:avLst/>
-          </a:prstGeom>
-          <a:ln w="25400">
-            <a:solidFill>
-              <a:srgbClr val="152663"/>
-            </a:solidFill>
-            <a:prstDash val="solid"/>
-          </a:ln>
-        </p:spPr>
-      </p:sp>
-      <p:sp>
-        <p:nvSpPr>
-          <p:cNvPr id="22" name="Text 19"/>
-          <p:cNvSpPr/>
-          <p:nvPr/>
-        </p:nvSpPr>
-        <p:spPr>
-          <a:xfrm>
-            <a:off x="850392" y="4828032"/>
-            <a:ext cx="402336" cy="402336"/>
-          </a:xfrm>
-          <a:prstGeom prst="rect">
-            <a:avLst/>
-          </a:prstGeom>
-          <a:noFill/>
-          <a:ln/>
-        </p:spPr>
-        <p:txBody>
-          <a:bodyPr wrap="square" rtlCol="0" anchor="ctr"/>
-          <a:lstStyle/>
-          <a:p>
-            <a:pPr algn="ctr" indent="0" marL="0">
-              <a:buNone/>
-            </a:pPr>
-            <a:r>
-              <a:rPr lang="en-US" sz="1500" b="1" dirty="0">
-                <a:solidFill>
-                  <a:srgbClr val="152663"/>
-                </a:solidFill>
-                <a:latin typeface="Gilroy" pitchFamily="34" charset="0"/>
-                <a:ea typeface="Gilroy" pitchFamily="34" charset="-122"/>
-                <a:cs typeface="Gilroy" pitchFamily="34" charset="-120"/>
-              </a:rPr>
-              <a:t>?</a:t>
-            </a:r>
-            <a:endParaRPr lang="en-US" sz="1500" dirty="0"/>
-          </a:p>
-        </p:txBody>
-      </p:sp>
-      <p:sp>
-        <p:nvSpPr>
-          <p:cNvPr id="23" name="Text 20"/>
-          <p:cNvSpPr/>
-          <p:nvPr/>
-        </p:nvSpPr>
-        <p:spPr>
-          <a:xfrm>
-            <a:off x="1417320" y="4709160"/>
-            <a:ext cx="9784080" cy="310896"/>
-          </a:xfrm>
-          <a:prstGeom prst="rect">
-            <a:avLst/>
-          </a:prstGeom>
-          <a:noFill/>
-          <a:ln/>
-        </p:spPr>
-        <p:txBody>
-          <a:bodyPr wrap="square" rtlCol="0" anchor="ctr"/>
-          <a:lstStyle/>
-          <a:p>
-            <a:pPr indent="0" marL="0">
-              <a:buNone/>
-            </a:pPr>
-            <a:r>
-              <a:rPr lang="en-US" sz="1350" b="1" dirty="0">
-                <a:solidFill>
-                  <a:srgbClr val="191919"/>
-                </a:solidFill>
-                <a:latin typeface="Gilroy" pitchFamily="34" charset="0"/>
-                <a:ea typeface="Gilroy" pitchFamily="34" charset="-122"/>
-                <a:cs typeface="Gilroy" pitchFamily="34" charset="-120"/>
-              </a:rPr>
-              <a:t>Pantalla de detalle</a:t>
-            </a:r>
-            <a:endParaRPr lang="en-US" sz="1350" dirty="0"/>
-          </a:p>
-        </p:txBody>
-      </p:sp>
-      <p:sp>
-        <p:nvSpPr>
-          <p:cNvPr id="24" name="Text 21"/>
-          <p:cNvSpPr/>
-          <p:nvPr/>
-        </p:nvSpPr>
-        <p:spPr>
-          <a:xfrm>
-            <a:off x="1417320" y="5020056"/>
-            <a:ext cx="9784080" cy="438912"/>
-          </a:xfrm>
-          <a:prstGeom prst="rect">
-            <a:avLst/>
-          </a:prstGeom>
-          <a:noFill/>
-          <a:ln/>
-        </p:spPr>
-        <p:txBody>
-          <a:bodyPr wrap="square" rtlCol="0" anchor="ctr"/>
-          <a:lstStyle/>
-          <a:p>
-            <a:pPr indent="0" marL="0">
-              <a:lnSpc>
-                <a:spcPct val="120000"/>
-              </a:lnSpc>
-              <a:buNone/>
-            </a:pPr>
-            <a:r>
-              <a:rPr lang="en-US" sz="1100" dirty="0">
-                <a:solidFill>
-                  <a:srgbClr val="49454F"/>
-                </a:solidFill>
-                <a:latin typeface="Gilroy" pitchFamily="34" charset="0"/>
-                <a:ea typeface="Gilroy" pitchFamily="34" charset="-122"/>
-                <a:cs typeface="Gilroy" pitchFamily="34" charset="-120"/>
-              </a:rPr>
-              <a:t>La pantalla de detalle de una gestión todavía no está definida.</a:t>
-            </a:r>
-            <a:endParaRPr lang="en-US" sz="1100" dirty="0"/>
-          </a:p>
-        </p:txBody>
-      </p:sp>
-      <p:sp>
-        <p:nvSpPr>
-          <p:cNvPr id="25" name="Shape 22"/>
-          <p:cNvSpPr/>
-          <p:nvPr/>
-        </p:nvSpPr>
-        <p:spPr>
-          <a:xfrm>
-            <a:off x="548640" y="5586984"/>
-            <a:ext cx="10881360" cy="896112"/>
-          </a:xfrm>
-          <a:prstGeom prst="roundRect">
-            <a:avLst>
-              <a:gd name="adj" fmla="val 8163"/>
-            </a:avLst>
-          </a:prstGeom>
-          <a:solidFill>
-            <a:srgbClr val="F2F2F2"/>
-          </a:solidFill>
-          <a:ln/>
-        </p:spPr>
-      </p:sp>
-      <p:sp>
-        <p:nvSpPr>
-          <p:cNvPr id="26" name="Shape 23"/>
-          <p:cNvSpPr/>
-          <p:nvPr/>
-        </p:nvSpPr>
-        <p:spPr>
-          <a:xfrm>
-            <a:off x="850392" y="5833872"/>
-            <a:ext cx="402336" cy="402336"/>
-          </a:xfrm>
-          <a:prstGeom prst="ellipse">
-            <a:avLst/>
-          </a:prstGeom>
-          <a:ln w="25400">
-            <a:solidFill>
-              <a:srgbClr val="152663"/>
-            </a:solidFill>
-            <a:prstDash val="solid"/>
-          </a:ln>
-        </p:spPr>
-      </p:sp>
-      <p:sp>
-        <p:nvSpPr>
-          <p:cNvPr id="27" name="Text 24"/>
-          <p:cNvSpPr/>
-          <p:nvPr/>
-        </p:nvSpPr>
-        <p:spPr>
-          <a:xfrm>
-            <a:off x="850392" y="5815584"/>
-            <a:ext cx="402336" cy="402336"/>
-          </a:xfrm>
-          <a:prstGeom prst="rect">
-            <a:avLst/>
-          </a:prstGeom>
-          <a:noFill/>
-          <a:ln/>
-        </p:spPr>
-        <p:txBody>
-          <a:bodyPr wrap="square" rtlCol="0" anchor="ctr"/>
-          <a:lstStyle/>
-          <a:p>
-            <a:pPr algn="ctr" indent="0" marL="0">
-              <a:buNone/>
-            </a:pPr>
-            <a:r>
-              <a:rPr lang="en-US" sz="1500" b="1" dirty="0">
-                <a:solidFill>
-                  <a:srgbClr val="152663"/>
-                </a:solidFill>
-                <a:latin typeface="Gilroy" pitchFamily="34" charset="0"/>
-                <a:ea typeface="Gilroy" pitchFamily="34" charset="-122"/>
-                <a:cs typeface="Gilroy" pitchFamily="34" charset="-120"/>
-              </a:rPr>
-              <a:t>?</a:t>
-            </a:r>
-            <a:endParaRPr lang="en-US" sz="1500" dirty="0"/>
-          </a:p>
-        </p:txBody>
-      </p:sp>
-      <p:sp>
-        <p:nvSpPr>
-          <p:cNvPr id="28" name="Text 25"/>
-          <p:cNvSpPr/>
-          <p:nvPr/>
-        </p:nvSpPr>
-        <p:spPr>
-          <a:xfrm>
-            <a:off x="1417320" y="5696712"/>
-            <a:ext cx="9784080" cy="310896"/>
-          </a:xfrm>
-          <a:prstGeom prst="rect">
-            <a:avLst/>
-          </a:prstGeom>
-          <a:noFill/>
-          <a:ln/>
-        </p:spPr>
-        <p:txBody>
-          <a:bodyPr wrap="square" rtlCol="0" anchor="ctr"/>
-          <a:lstStyle/>
-          <a:p>
-            <a:pPr indent="0" marL="0">
-              <a:buNone/>
-            </a:pPr>
-            <a:r>
-              <a:rPr lang="en-US" sz="1350" b="1" dirty="0">
-                <a:solidFill>
-                  <a:srgbClr val="191919"/>
-                </a:solidFill>
-                <a:latin typeface="Gilroy" pitchFamily="34" charset="0"/>
-                <a:ea typeface="Gilroy" pitchFamily="34" charset="-122"/>
-                <a:cs typeface="Gilroy" pitchFamily="34" charset="-120"/>
-              </a:rPr>
-              <a:t>Nombre definitivo</a:t>
-            </a:r>
-            <a:endParaRPr lang="en-US" sz="1350" dirty="0"/>
-          </a:p>
-        </p:txBody>
-      </p:sp>
-      <p:sp>
-        <p:nvSpPr>
-          <p:cNvPr id="29" name="Text 26"/>
-          <p:cNvSpPr/>
-          <p:nvPr/>
-        </p:nvSpPr>
-        <p:spPr>
-          <a:xfrm>
-            <a:off x="1417320" y="6007608"/>
-            <a:ext cx="9784080" cy="438912"/>
-          </a:xfrm>
-          <a:prstGeom prst="rect">
-            <a:avLst/>
-          </a:prstGeom>
-          <a:noFill/>
-          <a:ln/>
-        </p:spPr>
-        <p:txBody>
-          <a:bodyPr wrap="square" rtlCol="0" anchor="ctr"/>
-          <a:lstStyle/>
-          <a:p>
-            <a:pPr indent="0" marL="0">
-              <a:lnSpc>
-                <a:spcPct val="120000"/>
-              </a:lnSpc>
-              <a:buNone/>
-            </a:pPr>
-            <a:r>
-              <a:rPr lang="en-US" sz="1100" dirty="0">
-                <a:solidFill>
-                  <a:srgbClr val="49454F"/>
-                </a:solidFill>
-                <a:latin typeface="Gilroy" pitchFamily="34" charset="0"/>
-                <a:ea typeface="Gilroy" pitchFamily="34" charset="-122"/>
-                <a:cs typeface="Gilroy" pitchFamily="34" charset="-120"/>
-              </a:rPr>
-              <a:t>"Mis gestiones" es el nombre vigente de la propuesta, sujeto a validación.</a:t>
-            </a:r>
-            <a:endParaRPr lang="en-US" sz="1100" dirty="0"/>
-          </a:p>
-        </p:txBody>
-      </p:sp>
+          <a:effectLst>
+            <a:outerShdw sx="100000" sy="100000" kx="0" ky="0" algn="bl" rotWithShape="0" blurRad="152400" dist="50800" dir="5400000">
+              <a:srgbClr val="152663">
+                <a:alpha val="35000"/>
+              </a:srgbClr>
+            </a:outerShdw>
+          </a:effectLst>
+        </p:spPr>
+      </p:sp>
+      <p:pic>
+        <p:nvPicPr>
+          <p:cNvPr id="12" name="Image 1" descr="C:\MLOF 01\VORTEX\CORREO ARGENTINO\Reclamos\Reclamos claude\hub\presentaciones\screenshots\08-responsive.png">    </p:cNvPr>
+          <p:cNvPicPr>
+            <a:picLocks noChangeAspect="1"/>
+          </p:cNvPicPr>
+          <p:nvPr/>
+        </p:nvPicPr>
+        <p:blipFill>
+          <a:blip r:embed="rId2"/>
+          <a:srcRect l="0" r="0" t="0" b="0"/>
+          <a:stretch/>
+        </p:blipFill>
+        <p:spPr>
+          <a:xfrm>
+            <a:off x="5029200" y="1371600"/>
+            <a:ext cx="6613855" cy="4133660"/>
+          </a:xfrm>
+          <a:prstGeom prst="rect">
+            <a:avLst/>
+          </a:prstGeom>
+        </p:spPr>
+      </p:pic>
     </p:spTree>
   </p:cSld>
   <p:clrMapOvr>
@@ -6015,6 +5798,936 @@
 <file path=ppt/slides/slide16.xml><?xml version="1.0" encoding="utf-8"?>
 <p:sld xmlns:a="http://schemas.openxmlformats.org/drawingml/2006/main" xmlns:r="http://schemas.openxmlformats.org/officeDocument/2006/relationships" xmlns:p="http://schemas.openxmlformats.org/presentationml/2006/main">
   <p:cSld name="Slide 16">
+    <p:bg>
+      <p:bgPr>
+        <a:solidFill>
+          <a:srgbClr val="FFFFFF"/>
+        </a:solidFill>
+      </p:bgPr>
+    </p:bg>
+    <p:spTree>
+      <p:nvGrpSpPr>
+        <p:cNvPr id="1" name=""/>
+        <p:cNvGrpSpPr/>
+        <p:nvPr/>
+      </p:nvGrpSpPr>
+      <p:grpSpPr>
+        <a:xfrm>
+          <a:off x="0" y="0"/>
+          <a:ext cx="0" cy="0"/>
+          <a:chOff x="0" y="0"/>
+          <a:chExt cx="0" cy="0"/>
+        </a:xfrm>
+      </p:grpSpPr>
+      <p:sp>
+        <p:nvSpPr>
+          <p:cNvPr id="2" name="Shape 0"/>
+          <p:cNvSpPr/>
+          <p:nvPr/>
+        </p:nvSpPr>
+        <p:spPr>
+          <a:xfrm>
+            <a:off x="0" y="0"/>
+            <a:ext cx="12191695" cy="54864"/>
+          </a:xfrm>
+          <a:prstGeom prst="rect">
+            <a:avLst/>
+          </a:prstGeom>
+          <a:solidFill>
+            <a:srgbClr val="152663"/>
+          </a:solidFill>
+          <a:ln/>
+        </p:spPr>
+      </p:sp>
+      <p:sp>
+        <p:nvSpPr>
+          <p:cNvPr id="3" name="Shape 1"/>
+          <p:cNvSpPr/>
+          <p:nvPr/>
+        </p:nvSpPr>
+        <p:spPr>
+          <a:xfrm>
+            <a:off x="0" y="54864"/>
+            <a:ext cx="12191695" cy="566928"/>
+          </a:xfrm>
+          <a:prstGeom prst="rect">
+            <a:avLst/>
+          </a:prstGeom>
+          <a:solidFill>
+            <a:srgbClr val="FFCE00"/>
+          </a:solidFill>
+          <a:ln/>
+        </p:spPr>
+      </p:sp>
+      <p:pic>
+        <p:nvPicPr>
+          <p:cNvPr id="4" name="Image 0" descr="C:\MLOF 01\VORTEX\CORREO ARGENTINO\Reclamos\Reclamos claude\hub\assets\CorreoArgentino-MiCorreo.png">    </p:cNvPr>
+          <p:cNvPicPr>
+            <a:picLocks noChangeAspect="1"/>
+          </p:cNvPicPr>
+          <p:nvPr/>
+        </p:nvPicPr>
+        <p:blipFill>
+          <a:blip r:embed="rId1"/>
+          <a:stretch>
+            <a:fillRect/>
+          </a:stretch>
+        </p:blipFill>
+        <p:spPr>
+          <a:xfrm>
+            <a:off x="457200" y="219456"/>
+            <a:ext cx="1672699" cy="237744"/>
+          </a:xfrm>
+          <a:prstGeom prst="rect">
+            <a:avLst/>
+          </a:prstGeom>
+        </p:spPr>
+      </p:pic>
+      <p:sp>
+        <p:nvSpPr>
+          <p:cNvPr id="5" name="Text 2"/>
+          <p:cNvSpPr/>
+          <p:nvPr/>
+        </p:nvSpPr>
+        <p:spPr>
+          <a:xfrm>
+            <a:off x="2312779" y="54864"/>
+            <a:ext cx="5486400" cy="566928"/>
+          </a:xfrm>
+          <a:prstGeom prst="rect">
+            <a:avLst/>
+          </a:prstGeom>
+          <a:noFill/>
+          <a:ln/>
+        </p:spPr>
+        <p:txBody>
+          <a:bodyPr wrap="square" rtlCol="0" anchor="ctr"/>
+          <a:lstStyle/>
+          <a:p>
+            <a:pPr indent="0" marL="0">
+              <a:buNone/>
+            </a:pPr>
+            <a:r>
+              <a:rPr lang="en-US" sz="1500" b="1" dirty="0">
+                <a:solidFill>
+                  <a:srgbClr val="152663"/>
+                </a:solidFill>
+                <a:latin typeface="Gilroy" pitchFamily="34" charset="0"/>
+                <a:ea typeface="Gilroy" pitchFamily="34" charset="-122"/>
+                <a:cs typeface="Gilroy" pitchFamily="34" charset="-120"/>
+              </a:rPr>
+              <a:t>Pendiente</a:t>
+            </a:r>
+            <a:endParaRPr lang="en-US" sz="1500" dirty="0"/>
+          </a:p>
+        </p:txBody>
+      </p:sp>
+      <p:sp>
+        <p:nvSpPr>
+          <p:cNvPr id="6" name="Shape 3"/>
+          <p:cNvSpPr/>
+          <p:nvPr/>
+        </p:nvSpPr>
+        <p:spPr>
+          <a:xfrm>
+            <a:off x="548640" y="960120"/>
+            <a:ext cx="4617720" cy="329184"/>
+          </a:xfrm>
+          <a:prstGeom prst="roundRect">
+            <a:avLst>
+              <a:gd name="adj" fmla="val 50000"/>
+            </a:avLst>
+          </a:prstGeom>
+          <a:solidFill>
+            <a:srgbClr val="F2F2F2"/>
+          </a:solidFill>
+          <a:ln/>
+        </p:spPr>
+      </p:sp>
+      <p:sp>
+        <p:nvSpPr>
+          <p:cNvPr id="7" name="Text 4"/>
+          <p:cNvSpPr/>
+          <p:nvPr/>
+        </p:nvSpPr>
+        <p:spPr>
+          <a:xfrm>
+            <a:off x="594360" y="960120"/>
+            <a:ext cx="4526280" cy="329184"/>
+          </a:xfrm>
+          <a:prstGeom prst="rect">
+            <a:avLst/>
+          </a:prstGeom>
+          <a:noFill/>
+          <a:ln/>
+        </p:spPr>
+        <p:txBody>
+          <a:bodyPr wrap="none" rtlCol="0" anchor="ctr"/>
+          <a:lstStyle/>
+          <a:p>
+            <a:pPr algn="ctr" indent="0" marL="0">
+              <a:buNone/>
+            </a:pPr>
+            <a:r>
+              <a:rPr lang="en-US" sz="1050" b="1" spc="100" kern="0" dirty="0">
+                <a:solidFill>
+                  <a:srgbClr val="152663"/>
+                </a:solidFill>
+                <a:latin typeface="Gilroy" pitchFamily="34" charset="0"/>
+                <a:ea typeface="Gilroy" pitchFamily="34" charset="-122"/>
+                <a:cs typeface="Gilroy" pitchFamily="34" charset="-120"/>
+              </a:rPr>
+              <a:t>LO QUE FALTA CERRAR CON EL NEGOCIO</a:t>
+            </a:r>
+            <a:endParaRPr lang="en-US" sz="1050" dirty="0"/>
+          </a:p>
+        </p:txBody>
+      </p:sp>
+      <p:sp>
+        <p:nvSpPr>
+          <p:cNvPr id="8" name="Text 5"/>
+          <p:cNvSpPr/>
+          <p:nvPr/>
+        </p:nvSpPr>
+        <p:spPr>
+          <a:xfrm>
+            <a:off x="548640" y="1417320"/>
+            <a:ext cx="10515600" cy="548640"/>
+          </a:xfrm>
+          <a:prstGeom prst="rect">
+            <a:avLst/>
+          </a:prstGeom>
+          <a:noFill/>
+          <a:ln/>
+        </p:spPr>
+        <p:txBody>
+          <a:bodyPr wrap="square" rtlCol="0" anchor="ctr"/>
+          <a:lstStyle/>
+          <a:p>
+            <a:pPr indent="0" marL="0">
+              <a:buNone/>
+            </a:pPr>
+            <a:r>
+              <a:rPr lang="en-US" sz="2400" b="1" dirty="0">
+                <a:solidFill>
+                  <a:srgbClr val="191919"/>
+                </a:solidFill>
+                <a:latin typeface="Gilroy" pitchFamily="34" charset="0"/>
+                <a:ea typeface="Gilroy" pitchFamily="34" charset="-122"/>
+                <a:cs typeface="Gilroy" pitchFamily="34" charset="-120"/>
+              </a:rPr>
+              <a:t>Definiciones abiertas, ninguna resuelta por inferencia</a:t>
+            </a:r>
+            <a:endParaRPr lang="en-US" sz="2400" dirty="0"/>
+          </a:p>
+        </p:txBody>
+      </p:sp>
+      <p:sp>
+        <p:nvSpPr>
+          <p:cNvPr id="9" name="Text 6"/>
+          <p:cNvSpPr/>
+          <p:nvPr/>
+        </p:nvSpPr>
+        <p:spPr>
+          <a:xfrm>
+            <a:off x="548640" y="1984248"/>
+            <a:ext cx="10515600" cy="457200"/>
+          </a:xfrm>
+          <a:prstGeom prst="rect">
+            <a:avLst/>
+          </a:prstGeom>
+          <a:noFill/>
+          <a:ln/>
+        </p:spPr>
+        <p:txBody>
+          <a:bodyPr wrap="square" rtlCol="0" anchor="ctr"/>
+          <a:lstStyle/>
+          <a:p>
+            <a:pPr indent="0" marL="0">
+              <a:buNone/>
+            </a:pPr>
+            <a:r>
+              <a:rPr lang="en-US" sz="1350" dirty="0">
+                <a:solidFill>
+                  <a:srgbClr val="49454F"/>
+                </a:solidFill>
+                <a:latin typeface="Gilroy" pitchFamily="34" charset="0"/>
+                <a:ea typeface="Gilroy" pitchFamily="34" charset="-122"/>
+                <a:cs typeface="Gilroy" pitchFamily="34" charset="-120"/>
+              </a:rPr>
+              <a:t>Ninguno de estos puntos fue asumido — quedan como preguntas explícitas.</a:t>
+            </a:r>
+            <a:endParaRPr lang="en-US" sz="1350" dirty="0"/>
+          </a:p>
+        </p:txBody>
+      </p:sp>
+      <p:sp>
+        <p:nvSpPr>
+          <p:cNvPr id="10" name="Shape 7"/>
+          <p:cNvSpPr/>
+          <p:nvPr/>
+        </p:nvSpPr>
+        <p:spPr>
+          <a:xfrm>
+            <a:off x="548640" y="2624328"/>
+            <a:ext cx="10881360" cy="896112"/>
+          </a:xfrm>
+          <a:prstGeom prst="roundRect">
+            <a:avLst>
+              <a:gd name="adj" fmla="val 8163"/>
+            </a:avLst>
+          </a:prstGeom>
+          <a:solidFill>
+            <a:srgbClr val="F2F2F2"/>
+          </a:solidFill>
+          <a:ln/>
+        </p:spPr>
+      </p:sp>
+      <p:sp>
+        <p:nvSpPr>
+          <p:cNvPr id="11" name="Shape 8"/>
+          <p:cNvSpPr/>
+          <p:nvPr/>
+        </p:nvSpPr>
+        <p:spPr>
+          <a:xfrm>
+            <a:off x="850392" y="2871216"/>
+            <a:ext cx="402336" cy="402336"/>
+          </a:xfrm>
+          <a:prstGeom prst="ellipse">
+            <a:avLst/>
+          </a:prstGeom>
+          <a:ln w="25400">
+            <a:solidFill>
+              <a:srgbClr val="152663"/>
+            </a:solidFill>
+            <a:prstDash val="solid"/>
+          </a:ln>
+        </p:spPr>
+      </p:sp>
+      <p:sp>
+        <p:nvSpPr>
+          <p:cNvPr id="12" name="Text 9"/>
+          <p:cNvSpPr/>
+          <p:nvPr/>
+        </p:nvSpPr>
+        <p:spPr>
+          <a:xfrm>
+            <a:off x="850392" y="2852928"/>
+            <a:ext cx="402336" cy="402336"/>
+          </a:xfrm>
+          <a:prstGeom prst="rect">
+            <a:avLst/>
+          </a:prstGeom>
+          <a:noFill/>
+          <a:ln/>
+        </p:spPr>
+        <p:txBody>
+          <a:bodyPr wrap="square" rtlCol="0" anchor="ctr"/>
+          <a:lstStyle/>
+          <a:p>
+            <a:pPr algn="ctr" indent="0" marL="0">
+              <a:buNone/>
+            </a:pPr>
+            <a:r>
+              <a:rPr lang="en-US" sz="1500" b="1" dirty="0">
+                <a:solidFill>
+                  <a:srgbClr val="152663"/>
+                </a:solidFill>
+                <a:latin typeface="Gilroy" pitchFamily="34" charset="0"/>
+                <a:ea typeface="Gilroy" pitchFamily="34" charset="-122"/>
+                <a:cs typeface="Gilroy" pitchFamily="34" charset="-120"/>
+              </a:rPr>
+              <a:t>?</a:t>
+            </a:r>
+            <a:endParaRPr lang="en-US" sz="1500" dirty="0"/>
+          </a:p>
+        </p:txBody>
+      </p:sp>
+      <p:sp>
+        <p:nvSpPr>
+          <p:cNvPr id="13" name="Text 10"/>
+          <p:cNvSpPr/>
+          <p:nvPr/>
+        </p:nvSpPr>
+        <p:spPr>
+          <a:xfrm>
+            <a:off x="1417320" y="2734056"/>
+            <a:ext cx="9784080" cy="310896"/>
+          </a:xfrm>
+          <a:prstGeom prst="rect">
+            <a:avLst/>
+          </a:prstGeom>
+          <a:noFill/>
+          <a:ln/>
+        </p:spPr>
+        <p:txBody>
+          <a:bodyPr wrap="square" rtlCol="0" anchor="ctr"/>
+          <a:lstStyle/>
+          <a:p>
+            <a:pPr indent="0" marL="0">
+              <a:buNone/>
+            </a:pPr>
+            <a:r>
+              <a:rPr lang="en-US" sz="1350" b="1" dirty="0">
+                <a:solidFill>
+                  <a:srgbClr val="191919"/>
+                </a:solidFill>
+                <a:latin typeface="Gilroy" pitchFamily="34" charset="0"/>
+                <a:ea typeface="Gilroy" pitchFamily="34" charset="-122"/>
+                <a:cs typeface="Gilroy" pitchFamily="34" charset="-120"/>
+              </a:rPr>
+              <a:t>Agrupaciones por intuición</a:t>
+            </a:r>
+            <a:endParaRPr lang="en-US" sz="1350" dirty="0"/>
+          </a:p>
+        </p:txBody>
+      </p:sp>
+      <p:sp>
+        <p:nvSpPr>
+          <p:cNvPr id="14" name="Text 11"/>
+          <p:cNvSpPr/>
+          <p:nvPr/>
+        </p:nvSpPr>
+        <p:spPr>
+          <a:xfrm>
+            <a:off x="1417320" y="3044952"/>
+            <a:ext cx="9784080" cy="438912"/>
+          </a:xfrm>
+          <a:prstGeom prst="rect">
+            <a:avLst/>
+          </a:prstGeom>
+          <a:noFill/>
+          <a:ln/>
+        </p:spPr>
+        <p:txBody>
+          <a:bodyPr wrap="square" rtlCol="0" anchor="ctr"/>
+          <a:lstStyle/>
+          <a:p>
+            <a:pPr indent="0" marL="0">
+              <a:lnSpc>
+                <a:spcPct val="120000"/>
+              </a:lnSpc>
+              <a:buNone/>
+            </a:pPr>
+            <a:r>
+              <a:rPr lang="en-US" sz="1100" dirty="0">
+                <a:solidFill>
+                  <a:srgbClr val="49454F"/>
+                </a:solidFill>
+                <a:latin typeface="Gilroy" pitchFamily="34" charset="0"/>
+                <a:ea typeface="Gilroy" pitchFamily="34" charset="-122"/>
+                <a:cs typeface="Gilroy" pitchFamily="34" charset="-120"/>
+              </a:rPr>
+              <a:t>Mi Cuenta, Paquetería Nacional y Oficios Judiciales se armaron reagrupando motivos ya conocidos — el negocio todavía no las validó.</a:t>
+            </a:r>
+            <a:endParaRPr lang="en-US" sz="1100" dirty="0"/>
+          </a:p>
+        </p:txBody>
+      </p:sp>
+      <p:sp>
+        <p:nvSpPr>
+          <p:cNvPr id="15" name="Shape 12"/>
+          <p:cNvSpPr/>
+          <p:nvPr/>
+        </p:nvSpPr>
+        <p:spPr>
+          <a:xfrm>
+            <a:off x="548640" y="3611880"/>
+            <a:ext cx="10881360" cy="896112"/>
+          </a:xfrm>
+          <a:prstGeom prst="roundRect">
+            <a:avLst>
+              <a:gd name="adj" fmla="val 8163"/>
+            </a:avLst>
+          </a:prstGeom>
+          <a:solidFill>
+            <a:srgbClr val="F2F2F2"/>
+          </a:solidFill>
+          <a:ln/>
+        </p:spPr>
+      </p:sp>
+      <p:sp>
+        <p:nvSpPr>
+          <p:cNvPr id="16" name="Shape 13"/>
+          <p:cNvSpPr/>
+          <p:nvPr/>
+        </p:nvSpPr>
+        <p:spPr>
+          <a:xfrm>
+            <a:off x="850392" y="3858768"/>
+            <a:ext cx="402336" cy="402336"/>
+          </a:xfrm>
+          <a:prstGeom prst="ellipse">
+            <a:avLst/>
+          </a:prstGeom>
+          <a:ln w="25400">
+            <a:solidFill>
+              <a:srgbClr val="152663"/>
+            </a:solidFill>
+            <a:prstDash val="solid"/>
+          </a:ln>
+        </p:spPr>
+      </p:sp>
+      <p:sp>
+        <p:nvSpPr>
+          <p:cNvPr id="17" name="Text 14"/>
+          <p:cNvSpPr/>
+          <p:nvPr/>
+        </p:nvSpPr>
+        <p:spPr>
+          <a:xfrm>
+            <a:off x="850392" y="3840480"/>
+            <a:ext cx="402336" cy="402336"/>
+          </a:xfrm>
+          <a:prstGeom prst="rect">
+            <a:avLst/>
+          </a:prstGeom>
+          <a:noFill/>
+          <a:ln/>
+        </p:spPr>
+        <p:txBody>
+          <a:bodyPr wrap="square" rtlCol="0" anchor="ctr"/>
+          <a:lstStyle/>
+          <a:p>
+            <a:pPr algn="ctr" indent="0" marL="0">
+              <a:buNone/>
+            </a:pPr>
+            <a:r>
+              <a:rPr lang="en-US" sz="1500" b="1" dirty="0">
+                <a:solidFill>
+                  <a:srgbClr val="152663"/>
+                </a:solidFill>
+                <a:latin typeface="Gilroy" pitchFamily="34" charset="0"/>
+                <a:ea typeface="Gilroy" pitchFamily="34" charset="-122"/>
+                <a:cs typeface="Gilroy" pitchFamily="34" charset="-120"/>
+              </a:rPr>
+              <a:t>?</a:t>
+            </a:r>
+            <a:endParaRPr lang="en-US" sz="1500" dirty="0"/>
+          </a:p>
+        </p:txBody>
+      </p:sp>
+      <p:sp>
+        <p:nvSpPr>
+          <p:cNvPr id="18" name="Text 15"/>
+          <p:cNvSpPr/>
+          <p:nvPr/>
+        </p:nvSpPr>
+        <p:spPr>
+          <a:xfrm>
+            <a:off x="1417320" y="3721608"/>
+            <a:ext cx="9784080" cy="310896"/>
+          </a:xfrm>
+          <a:prstGeom prst="rect">
+            <a:avLst/>
+          </a:prstGeom>
+          <a:noFill/>
+          <a:ln/>
+        </p:spPr>
+        <p:txBody>
+          <a:bodyPr wrap="square" rtlCol="0" anchor="ctr"/>
+          <a:lstStyle/>
+          <a:p>
+            <a:pPr indent="0" marL="0">
+              <a:buNone/>
+            </a:pPr>
+            <a:r>
+              <a:rPr lang="en-US" sz="1350" b="1" dirty="0">
+                <a:solidFill>
+                  <a:srgbClr val="191919"/>
+                </a:solidFill>
+                <a:latin typeface="Gilroy" pitchFamily="34" charset="0"/>
+                <a:ea typeface="Gilroy" pitchFamily="34" charset="-122"/>
+                <a:cs typeface="Gilroy" pitchFamily="34" charset="-120"/>
+              </a:rPr>
+              <a:t>Contenido real pendiente</a:t>
+            </a:r>
+            <a:endParaRPr lang="en-US" sz="1350" dirty="0"/>
+          </a:p>
+        </p:txBody>
+      </p:sp>
+      <p:sp>
+        <p:nvSpPr>
+          <p:cNvPr id="19" name="Text 16"/>
+          <p:cNvSpPr/>
+          <p:nvPr/>
+        </p:nvSpPr>
+        <p:spPr>
+          <a:xfrm>
+            <a:off x="1417320" y="4032504"/>
+            <a:ext cx="9784080" cy="438912"/>
+          </a:xfrm>
+          <a:prstGeom prst="rect">
+            <a:avLst/>
+          </a:prstGeom>
+          <a:noFill/>
+          <a:ln/>
+        </p:spPr>
+        <p:txBody>
+          <a:bodyPr wrap="square" rtlCol="0" anchor="ctr"/>
+          <a:lstStyle/>
+          <a:p>
+            <a:pPr indent="0" marL="0">
+              <a:lnSpc>
+                <a:spcPct val="120000"/>
+              </a:lnSpc>
+              <a:buNone/>
+            </a:pPr>
+            <a:r>
+              <a:rPr lang="en-US" sz="1100" dirty="0">
+                <a:solidFill>
+                  <a:srgbClr val="49454F"/>
+                </a:solidFill>
+                <a:latin typeface="Gilroy" pitchFamily="34" charset="0"/>
+                <a:ea typeface="Gilroy" pitchFamily="34" charset="-122"/>
+                <a:cs typeface="Gilroy" pitchFamily="34" charset="-120"/>
+              </a:rPr>
+              <a:t>Paquetería Internacional y Mis Comunicaciones Digitales necesitan gestiones reales que reemplacen el contenido inventado — hasta entonces quedan ocultas por defecto.</a:t>
+            </a:r>
+            <a:endParaRPr lang="en-US" sz="1100" dirty="0"/>
+          </a:p>
+        </p:txBody>
+      </p:sp>
+      <p:sp>
+        <p:nvSpPr>
+          <p:cNvPr id="20" name="Shape 17"/>
+          <p:cNvSpPr/>
+          <p:nvPr/>
+        </p:nvSpPr>
+        <p:spPr>
+          <a:xfrm>
+            <a:off x="548640" y="4599432"/>
+            <a:ext cx="10881360" cy="896112"/>
+          </a:xfrm>
+          <a:prstGeom prst="roundRect">
+            <a:avLst>
+              <a:gd name="adj" fmla="val 8163"/>
+            </a:avLst>
+          </a:prstGeom>
+          <a:solidFill>
+            <a:srgbClr val="F2F2F2"/>
+          </a:solidFill>
+          <a:ln/>
+        </p:spPr>
+      </p:sp>
+      <p:sp>
+        <p:nvSpPr>
+          <p:cNvPr id="21" name="Shape 18"/>
+          <p:cNvSpPr/>
+          <p:nvPr/>
+        </p:nvSpPr>
+        <p:spPr>
+          <a:xfrm>
+            <a:off x="850392" y="4846320"/>
+            <a:ext cx="402336" cy="402336"/>
+          </a:xfrm>
+          <a:prstGeom prst="ellipse">
+            <a:avLst/>
+          </a:prstGeom>
+          <a:ln w="25400">
+            <a:solidFill>
+              <a:srgbClr val="152663"/>
+            </a:solidFill>
+            <a:prstDash val="solid"/>
+          </a:ln>
+        </p:spPr>
+      </p:sp>
+      <p:sp>
+        <p:nvSpPr>
+          <p:cNvPr id="22" name="Text 19"/>
+          <p:cNvSpPr/>
+          <p:nvPr/>
+        </p:nvSpPr>
+        <p:spPr>
+          <a:xfrm>
+            <a:off x="850392" y="4828032"/>
+            <a:ext cx="402336" cy="402336"/>
+          </a:xfrm>
+          <a:prstGeom prst="rect">
+            <a:avLst/>
+          </a:prstGeom>
+          <a:noFill/>
+          <a:ln/>
+        </p:spPr>
+        <p:txBody>
+          <a:bodyPr wrap="square" rtlCol="0" anchor="ctr"/>
+          <a:lstStyle/>
+          <a:p>
+            <a:pPr algn="ctr" indent="0" marL="0">
+              <a:buNone/>
+            </a:pPr>
+            <a:r>
+              <a:rPr lang="en-US" sz="1500" b="1" dirty="0">
+                <a:solidFill>
+                  <a:srgbClr val="152663"/>
+                </a:solidFill>
+                <a:latin typeface="Gilroy" pitchFamily="34" charset="0"/>
+                <a:ea typeface="Gilroy" pitchFamily="34" charset="-122"/>
+                <a:cs typeface="Gilroy" pitchFamily="34" charset="-120"/>
+              </a:rPr>
+              <a:t>?</a:t>
+            </a:r>
+            <a:endParaRPr lang="en-US" sz="1500" dirty="0"/>
+          </a:p>
+        </p:txBody>
+      </p:sp>
+      <p:sp>
+        <p:nvSpPr>
+          <p:cNvPr id="23" name="Text 20"/>
+          <p:cNvSpPr/>
+          <p:nvPr/>
+        </p:nvSpPr>
+        <p:spPr>
+          <a:xfrm>
+            <a:off x="1417320" y="4709160"/>
+            <a:ext cx="9784080" cy="310896"/>
+          </a:xfrm>
+          <a:prstGeom prst="rect">
+            <a:avLst/>
+          </a:prstGeom>
+          <a:noFill/>
+          <a:ln/>
+        </p:spPr>
+        <p:txBody>
+          <a:bodyPr wrap="square" rtlCol="0" anchor="ctr"/>
+          <a:lstStyle/>
+          <a:p>
+            <a:pPr indent="0" marL="0">
+              <a:buNone/>
+            </a:pPr>
+            <a:r>
+              <a:rPr lang="en-US" sz="1350" b="1" dirty="0">
+                <a:solidFill>
+                  <a:srgbClr val="191919"/>
+                </a:solidFill>
+                <a:latin typeface="Gilroy" pitchFamily="34" charset="0"/>
+                <a:ea typeface="Gilroy" pitchFamily="34" charset="-122"/>
+                <a:cs typeface="Gilroy" pitchFamily="34" charset="-120"/>
+              </a:rPr>
+              <a:t>Pantalla de detalle</a:t>
+            </a:r>
+            <a:endParaRPr lang="en-US" sz="1350" dirty="0"/>
+          </a:p>
+        </p:txBody>
+      </p:sp>
+      <p:sp>
+        <p:nvSpPr>
+          <p:cNvPr id="24" name="Text 21"/>
+          <p:cNvSpPr/>
+          <p:nvPr/>
+        </p:nvSpPr>
+        <p:spPr>
+          <a:xfrm>
+            <a:off x="1417320" y="5020056"/>
+            <a:ext cx="9784080" cy="438912"/>
+          </a:xfrm>
+          <a:prstGeom prst="rect">
+            <a:avLst/>
+          </a:prstGeom>
+          <a:noFill/>
+          <a:ln/>
+        </p:spPr>
+        <p:txBody>
+          <a:bodyPr wrap="square" rtlCol="0" anchor="ctr"/>
+          <a:lstStyle/>
+          <a:p>
+            <a:pPr indent="0" marL="0">
+              <a:lnSpc>
+                <a:spcPct val="120000"/>
+              </a:lnSpc>
+              <a:buNone/>
+            </a:pPr>
+            <a:r>
+              <a:rPr lang="en-US" sz="1100" dirty="0">
+                <a:solidFill>
+                  <a:srgbClr val="49454F"/>
+                </a:solidFill>
+                <a:latin typeface="Gilroy" pitchFamily="34" charset="0"/>
+                <a:ea typeface="Gilroy" pitchFamily="34" charset="-122"/>
+                <a:cs typeface="Gilroy" pitchFamily="34" charset="-120"/>
+              </a:rPr>
+              <a:t>La pantalla de detalle de una gestión todavía no está definida.</a:t>
+            </a:r>
+            <a:endParaRPr lang="en-US" sz="1100" dirty="0"/>
+          </a:p>
+        </p:txBody>
+      </p:sp>
+      <p:sp>
+        <p:nvSpPr>
+          <p:cNvPr id="25" name="Shape 22"/>
+          <p:cNvSpPr/>
+          <p:nvPr/>
+        </p:nvSpPr>
+        <p:spPr>
+          <a:xfrm>
+            <a:off x="548640" y="5586984"/>
+            <a:ext cx="10881360" cy="896112"/>
+          </a:xfrm>
+          <a:prstGeom prst="roundRect">
+            <a:avLst>
+              <a:gd name="adj" fmla="val 8163"/>
+            </a:avLst>
+          </a:prstGeom>
+          <a:solidFill>
+            <a:srgbClr val="F2F2F2"/>
+          </a:solidFill>
+          <a:ln/>
+        </p:spPr>
+      </p:sp>
+      <p:sp>
+        <p:nvSpPr>
+          <p:cNvPr id="26" name="Shape 23"/>
+          <p:cNvSpPr/>
+          <p:nvPr/>
+        </p:nvSpPr>
+        <p:spPr>
+          <a:xfrm>
+            <a:off x="850392" y="5833872"/>
+            <a:ext cx="402336" cy="402336"/>
+          </a:xfrm>
+          <a:prstGeom prst="ellipse">
+            <a:avLst/>
+          </a:prstGeom>
+          <a:ln w="25400">
+            <a:solidFill>
+              <a:srgbClr val="152663"/>
+            </a:solidFill>
+            <a:prstDash val="solid"/>
+          </a:ln>
+        </p:spPr>
+      </p:sp>
+      <p:sp>
+        <p:nvSpPr>
+          <p:cNvPr id="27" name="Text 24"/>
+          <p:cNvSpPr/>
+          <p:nvPr/>
+        </p:nvSpPr>
+        <p:spPr>
+          <a:xfrm>
+            <a:off x="850392" y="5815584"/>
+            <a:ext cx="402336" cy="402336"/>
+          </a:xfrm>
+          <a:prstGeom prst="rect">
+            <a:avLst/>
+          </a:prstGeom>
+          <a:noFill/>
+          <a:ln/>
+        </p:spPr>
+        <p:txBody>
+          <a:bodyPr wrap="square" rtlCol="0" anchor="ctr"/>
+          <a:lstStyle/>
+          <a:p>
+            <a:pPr algn="ctr" indent="0" marL="0">
+              <a:buNone/>
+            </a:pPr>
+            <a:r>
+              <a:rPr lang="en-US" sz="1500" b="1" dirty="0">
+                <a:solidFill>
+                  <a:srgbClr val="152663"/>
+                </a:solidFill>
+                <a:latin typeface="Gilroy" pitchFamily="34" charset="0"/>
+                <a:ea typeface="Gilroy" pitchFamily="34" charset="-122"/>
+                <a:cs typeface="Gilroy" pitchFamily="34" charset="-120"/>
+              </a:rPr>
+              <a:t>?</a:t>
+            </a:r>
+            <a:endParaRPr lang="en-US" sz="1500" dirty="0"/>
+          </a:p>
+        </p:txBody>
+      </p:sp>
+      <p:sp>
+        <p:nvSpPr>
+          <p:cNvPr id="28" name="Text 25"/>
+          <p:cNvSpPr/>
+          <p:nvPr/>
+        </p:nvSpPr>
+        <p:spPr>
+          <a:xfrm>
+            <a:off x="1417320" y="5696712"/>
+            <a:ext cx="9784080" cy="310896"/>
+          </a:xfrm>
+          <a:prstGeom prst="rect">
+            <a:avLst/>
+          </a:prstGeom>
+          <a:noFill/>
+          <a:ln/>
+        </p:spPr>
+        <p:txBody>
+          <a:bodyPr wrap="square" rtlCol="0" anchor="ctr"/>
+          <a:lstStyle/>
+          <a:p>
+            <a:pPr indent="0" marL="0">
+              <a:buNone/>
+            </a:pPr>
+            <a:r>
+              <a:rPr lang="en-US" sz="1350" b="1" dirty="0">
+                <a:solidFill>
+                  <a:srgbClr val="191919"/>
+                </a:solidFill>
+                <a:latin typeface="Gilroy" pitchFamily="34" charset="0"/>
+                <a:ea typeface="Gilroy" pitchFamily="34" charset="-122"/>
+                <a:cs typeface="Gilroy" pitchFamily="34" charset="-120"/>
+              </a:rPr>
+              <a:t>Nombre definitivo</a:t>
+            </a:r>
+            <a:endParaRPr lang="en-US" sz="1350" dirty="0"/>
+          </a:p>
+        </p:txBody>
+      </p:sp>
+      <p:sp>
+        <p:nvSpPr>
+          <p:cNvPr id="29" name="Text 26"/>
+          <p:cNvSpPr/>
+          <p:nvPr/>
+        </p:nvSpPr>
+        <p:spPr>
+          <a:xfrm>
+            <a:off x="1417320" y="6007608"/>
+            <a:ext cx="9784080" cy="438912"/>
+          </a:xfrm>
+          <a:prstGeom prst="rect">
+            <a:avLst/>
+          </a:prstGeom>
+          <a:noFill/>
+          <a:ln/>
+        </p:spPr>
+        <p:txBody>
+          <a:bodyPr wrap="square" rtlCol="0" anchor="ctr"/>
+          <a:lstStyle/>
+          <a:p>
+            <a:pPr indent="0" marL="0">
+              <a:lnSpc>
+                <a:spcPct val="120000"/>
+              </a:lnSpc>
+              <a:buNone/>
+            </a:pPr>
+            <a:r>
+              <a:rPr lang="en-US" sz="1100" dirty="0">
+                <a:solidFill>
+                  <a:srgbClr val="49454F"/>
+                </a:solidFill>
+                <a:latin typeface="Gilroy" pitchFamily="34" charset="0"/>
+                <a:ea typeface="Gilroy" pitchFamily="34" charset="-122"/>
+                <a:cs typeface="Gilroy" pitchFamily="34" charset="-120"/>
+              </a:rPr>
+              <a:t>"Mis gestiones" es el nombre vigente de la propuesta, sujeto a validación.</a:t>
+            </a:r>
+            <a:endParaRPr lang="en-US" sz="1100" dirty="0"/>
+          </a:p>
+        </p:txBody>
+      </p:sp>
+    </p:spTree>
+  </p:cSld>
+  <p:clrMapOvr>
+    <a:masterClrMapping/>
+  </p:clrMapOvr>
+</p:sld>
+</file>
+
+<file path=ppt/slides/slide17.xml><?xml version="1.0" encoding="utf-8"?>
+<p:sld xmlns:a="http://schemas.openxmlformats.org/drawingml/2006/main" xmlns:r="http://schemas.openxmlformats.org/officeDocument/2006/relationships" xmlns:p="http://schemas.openxmlformats.org/presentationml/2006/main">
+  <p:cSld name="Slide 17">
     <p:bg>
       <p:bgPr>
         <a:solidFill>
@@ -6146,7 +6859,7 @@
         <p:spPr>
           <a:xfrm>
             <a:off x="685800" y="3474720"/>
-            <a:ext cx="1188720" cy="365760"/>
+            <a:ext cx="1920240" cy="365760"/>
           </a:xfrm>
           <a:prstGeom prst="roundRect">
             <a:avLst>
@@ -6169,8 +6882,8 @@
         </p:nvSpPr>
         <p:spPr>
           <a:xfrm>
-            <a:off x="704088" y="3474720"/>
-            <a:ext cx="1152144" cy="365760"/>
+            <a:off x="731520" y="3474720"/>
+            <a:ext cx="1828800" cy="365760"/>
           </a:xfrm>
           <a:prstGeom prst="rect">
             <a:avLst/>
@@ -6208,7 +6921,7 @@
         </p:nvSpPr>
         <p:spPr>
           <a:xfrm>
-            <a:off x="1856232" y="3474720"/>
+            <a:off x="2587752" y="3474720"/>
             <a:ext cx="201168" cy="365760"/>
           </a:xfrm>
           <a:prstGeom prst="rect">
@@ -6247,8 +6960,8 @@
         </p:nvSpPr>
         <p:spPr>
           <a:xfrm>
-            <a:off x="2075688" y="3474720"/>
-            <a:ext cx="1737360" cy="365760"/>
+            <a:off x="2807208" y="3474720"/>
+            <a:ext cx="2798064" cy="365760"/>
           </a:xfrm>
           <a:prstGeom prst="roundRect">
             <a:avLst>
@@ -6271,8 +6984,8 @@
         </p:nvSpPr>
         <p:spPr>
           <a:xfrm>
-            <a:off x="2093976" y="3474720"/>
-            <a:ext cx="1700784" cy="365760"/>
+            <a:off x="2852928" y="3474720"/>
+            <a:ext cx="2706624" cy="365760"/>
           </a:xfrm>
           <a:prstGeom prst="rect">
             <a:avLst/>
@@ -6310,7 +7023,7 @@
         </p:nvSpPr>
         <p:spPr>
           <a:xfrm>
-            <a:off x="3794760" y="3474720"/>
+            <a:off x="5586984" y="3474720"/>
             <a:ext cx="201168" cy="365760"/>
           </a:xfrm>
           <a:prstGeom prst="rect">
@@ -6349,8 +7062,8 @@
         </p:nvSpPr>
         <p:spPr>
           <a:xfrm>
-            <a:off x="4014216" y="3474720"/>
-            <a:ext cx="1005840" cy="365760"/>
+            <a:off x="5806440" y="3474720"/>
+            <a:ext cx="1627632" cy="365760"/>
           </a:xfrm>
           <a:prstGeom prst="roundRect">
             <a:avLst>
@@ -6373,8 +7086,8 @@
         </p:nvSpPr>
         <p:spPr>
           <a:xfrm>
-            <a:off x="4032504" y="3474720"/>
-            <a:ext cx="969264" cy="365760"/>
+            <a:off x="5852160" y="3474720"/>
+            <a:ext cx="1536192" cy="365760"/>
           </a:xfrm>
           <a:prstGeom prst="rect">
             <a:avLst/>
@@ -6412,7 +7125,7 @@
         </p:nvSpPr>
         <p:spPr>
           <a:xfrm>
-            <a:off x="5001768" y="3474720"/>
+            <a:off x="7415784" y="3474720"/>
             <a:ext cx="201168" cy="365760"/>
           </a:xfrm>
           <a:prstGeom prst="rect">
@@ -6451,8 +7164,8 @@
         </p:nvSpPr>
         <p:spPr>
           <a:xfrm>
-            <a:off x="5221224" y="3474720"/>
-            <a:ext cx="1463040" cy="365760"/>
+            <a:off x="7635240" y="3474720"/>
+            <a:ext cx="2359152" cy="365760"/>
           </a:xfrm>
           <a:prstGeom prst="roundRect">
             <a:avLst>
@@ -6475,8 +7188,8 @@
         </p:nvSpPr>
         <p:spPr>
           <a:xfrm>
-            <a:off x="5239512" y="3474720"/>
-            <a:ext cx="1426464" cy="365760"/>
+            <a:off x="7680960" y="3474720"/>
+            <a:ext cx="2267712" cy="365760"/>
           </a:xfrm>
           <a:prstGeom prst="rect">
             <a:avLst/>
@@ -8298,6 +9011,535 @@
     <p:bg>
       <p:bgPr>
         <a:solidFill>
+          <a:srgbClr val="FFFFFF"/>
+        </a:solidFill>
+      </p:bgPr>
+    </p:bg>
+    <p:spTree>
+      <p:nvGrpSpPr>
+        <p:cNvPr id="1" name=""/>
+        <p:cNvGrpSpPr/>
+        <p:nvPr/>
+      </p:nvGrpSpPr>
+      <p:grpSpPr>
+        <a:xfrm>
+          <a:off x="0" y="0"/>
+          <a:ext cx="0" cy="0"/>
+          <a:chOff x="0" y="0"/>
+          <a:chExt cx="0" cy="0"/>
+        </a:xfrm>
+      </p:grpSpPr>
+      <p:sp>
+        <p:nvSpPr>
+          <p:cNvPr id="2" name="Shape 0"/>
+          <p:cNvSpPr/>
+          <p:nvPr/>
+        </p:nvSpPr>
+        <p:spPr>
+          <a:xfrm>
+            <a:off x="0" y="0"/>
+            <a:ext cx="12191695" cy="54864"/>
+          </a:xfrm>
+          <a:prstGeom prst="rect">
+            <a:avLst/>
+          </a:prstGeom>
+          <a:solidFill>
+            <a:srgbClr val="152663"/>
+          </a:solidFill>
+          <a:ln/>
+        </p:spPr>
+      </p:sp>
+      <p:sp>
+        <p:nvSpPr>
+          <p:cNvPr id="3" name="Shape 1"/>
+          <p:cNvSpPr/>
+          <p:nvPr/>
+        </p:nvSpPr>
+        <p:spPr>
+          <a:xfrm>
+            <a:off x="0" y="54864"/>
+            <a:ext cx="12191695" cy="566928"/>
+          </a:xfrm>
+          <a:prstGeom prst="rect">
+            <a:avLst/>
+          </a:prstGeom>
+          <a:solidFill>
+            <a:srgbClr val="FFCE00"/>
+          </a:solidFill>
+          <a:ln/>
+        </p:spPr>
+      </p:sp>
+      <p:pic>
+        <p:nvPicPr>
+          <p:cNvPr id="4" name="Image 0" descr="C:\MLOF 01\VORTEX\CORREO ARGENTINO\Reclamos\Reclamos claude\hub\assets\CorreoArgentino-MiCorreo.png">    </p:cNvPr>
+          <p:cNvPicPr>
+            <a:picLocks noChangeAspect="1"/>
+          </p:cNvPicPr>
+          <p:nvPr/>
+        </p:nvPicPr>
+        <p:blipFill>
+          <a:blip r:embed="rId1"/>
+          <a:stretch>
+            <a:fillRect/>
+          </a:stretch>
+        </p:blipFill>
+        <p:spPr>
+          <a:xfrm>
+            <a:off x="457200" y="219456"/>
+            <a:ext cx="1672699" cy="237744"/>
+          </a:xfrm>
+          <a:prstGeom prst="rect">
+            <a:avLst/>
+          </a:prstGeom>
+        </p:spPr>
+      </p:pic>
+      <p:sp>
+        <p:nvSpPr>
+          <p:cNvPr id="5" name="Text 2"/>
+          <p:cNvSpPr/>
+          <p:nvPr/>
+        </p:nvSpPr>
+        <p:spPr>
+          <a:xfrm>
+            <a:off x="2312779" y="54864"/>
+            <a:ext cx="5486400" cy="566928"/>
+          </a:xfrm>
+          <a:prstGeom prst="rect">
+            <a:avLst/>
+          </a:prstGeom>
+          <a:noFill/>
+          <a:ln/>
+        </p:spPr>
+        <p:txBody>
+          <a:bodyPr wrap="square" rtlCol="0" anchor="ctr"/>
+          <a:lstStyle/>
+          <a:p>
+            <a:pPr indent="0" marL="0">
+              <a:buNone/>
+            </a:pPr>
+            <a:r>
+              <a:rPr lang="en-US" sz="1500" b="1" dirty="0">
+                <a:solidFill>
+                  <a:srgbClr val="152663"/>
+                </a:solidFill>
+                <a:latin typeface="Gilroy" pitchFamily="34" charset="0"/>
+                <a:ea typeface="Gilroy" pitchFamily="34" charset="-122"/>
+                <a:cs typeface="Gilroy" pitchFamily="34" charset="-120"/>
+              </a:rPr>
+              <a:t>Mi cuenta</a:t>
+            </a:r>
+            <a:endParaRPr lang="en-US" sz="1500" dirty="0"/>
+          </a:p>
+        </p:txBody>
+      </p:sp>
+      <p:sp>
+        <p:nvSpPr>
+          <p:cNvPr id="6" name="Shape 3"/>
+          <p:cNvSpPr/>
+          <p:nvPr/>
+        </p:nvSpPr>
+        <p:spPr>
+          <a:xfrm>
+            <a:off x="7482535" y="1234440"/>
+            <a:ext cx="4247388" cy="329184"/>
+          </a:xfrm>
+          <a:prstGeom prst="roundRect">
+            <a:avLst>
+              <a:gd name="adj" fmla="val 50000"/>
+            </a:avLst>
+          </a:prstGeom>
+          <a:solidFill>
+            <a:srgbClr val="F2F2F2"/>
+          </a:solidFill>
+          <a:ln/>
+        </p:spPr>
+      </p:sp>
+      <p:sp>
+        <p:nvSpPr>
+          <p:cNvPr id="7" name="Text 4"/>
+          <p:cNvSpPr/>
+          <p:nvPr/>
+        </p:nvSpPr>
+        <p:spPr>
+          <a:xfrm>
+            <a:off x="7528255" y="1234440"/>
+            <a:ext cx="4155948" cy="329184"/>
+          </a:xfrm>
+          <a:prstGeom prst="rect">
+            <a:avLst/>
+          </a:prstGeom>
+          <a:noFill/>
+          <a:ln/>
+        </p:spPr>
+        <p:txBody>
+          <a:bodyPr wrap="none" rtlCol="0" anchor="ctr"/>
+          <a:lstStyle/>
+          <a:p>
+            <a:pPr algn="ctr" indent="0" marL="0">
+              <a:buNone/>
+            </a:pPr>
+            <a:r>
+              <a:rPr lang="en-US" sz="1050" b="1" spc="100" kern="0" dirty="0">
+                <a:solidFill>
+                  <a:srgbClr val="152663"/>
+                </a:solidFill>
+                <a:latin typeface="Gilroy" pitchFamily="34" charset="0"/>
+                <a:ea typeface="Gilroy" pitchFamily="34" charset="-122"/>
+                <a:cs typeface="Gilroy" pitchFamily="34" charset="-120"/>
+              </a:rPr>
+              <a:t>TAMBIÉN CAMBIA EL MENÚ SUPERIOR</a:t>
+            </a:r>
+            <a:endParaRPr lang="en-US" sz="1050" dirty="0"/>
+          </a:p>
+        </p:txBody>
+      </p:sp>
+      <p:sp>
+        <p:nvSpPr>
+          <p:cNvPr id="8" name="Text 5"/>
+          <p:cNvSpPr/>
+          <p:nvPr/>
+        </p:nvSpPr>
+        <p:spPr>
+          <a:xfrm>
+            <a:off x="7482535" y="1691640"/>
+            <a:ext cx="4160520" cy="914400"/>
+          </a:xfrm>
+          <a:prstGeom prst="rect">
+            <a:avLst/>
+          </a:prstGeom>
+          <a:noFill/>
+          <a:ln/>
+        </p:spPr>
+        <p:txBody>
+          <a:bodyPr wrap="square" rtlCol="0" anchor="ctr"/>
+          <a:lstStyle/>
+          <a:p>
+            <a:pPr indent="0" marL="0">
+              <a:lnSpc>
+                <a:spcPct val="110000"/>
+              </a:lnSpc>
+              <a:buNone/>
+            </a:pPr>
+            <a:r>
+              <a:rPr lang="en-US" sz="1900" b="1" dirty="0">
+                <a:solidFill>
+                  <a:srgbClr val="191919"/>
+                </a:solidFill>
+                <a:latin typeface="Gilroy" pitchFamily="34" charset="0"/>
+                <a:ea typeface="Gilroy" pitchFamily="34" charset="-122"/>
+                <a:cs typeface="Gilroy" pitchFamily="34" charset="-120"/>
+              </a:rPr>
+              <a:t>El acceso desde "Mi cuenta" ya dice "Mis gestiones"</a:t>
+            </a:r>
+            <a:endParaRPr lang="en-US" sz="1900" dirty="0"/>
+          </a:p>
+        </p:txBody>
+      </p:sp>
+      <p:sp>
+        <p:nvSpPr>
+          <p:cNvPr id="9" name="Text 6"/>
+          <p:cNvSpPr/>
+          <p:nvPr/>
+        </p:nvSpPr>
+        <p:spPr>
+          <a:xfrm>
+            <a:off x="7482535" y="2606040"/>
+            <a:ext cx="4160520" cy="822960"/>
+          </a:xfrm>
+          <a:prstGeom prst="rect">
+            <a:avLst/>
+          </a:prstGeom>
+          <a:noFill/>
+          <a:ln/>
+        </p:spPr>
+        <p:txBody>
+          <a:bodyPr wrap="square" rtlCol="0" anchor="ctr"/>
+          <a:lstStyle/>
+          <a:p>
+            <a:pPr indent="0" marL="0">
+              <a:lnSpc>
+                <a:spcPct val="130000"/>
+              </a:lnSpc>
+              <a:buNone/>
+            </a:pPr>
+            <a:r>
+              <a:rPr lang="en-US" sz="1150" dirty="0">
+                <a:solidFill>
+                  <a:srgbClr val="49454F"/>
+                </a:solidFill>
+                <a:latin typeface="Gilroy" pitchFamily="34" charset="0"/>
+                <a:ea typeface="Gilroy" pitchFamily="34" charset="-122"/>
+                <a:cs typeface="Gilroy" pitchFamily="34" charset="-120"/>
+              </a:rPr>
+              <a:t>No es una pantalla nueva — es un componente global (el menú del header) que aparece en toda la app, no en una ruta puntual.</a:t>
+            </a:r>
+            <a:endParaRPr lang="en-US" sz="1150" dirty="0"/>
+          </a:p>
+        </p:txBody>
+      </p:sp>
+      <p:sp>
+        <p:nvSpPr>
+          <p:cNvPr id="10" name="Text 7"/>
+          <p:cNvSpPr/>
+          <p:nvPr/>
+        </p:nvSpPr>
+        <p:spPr>
+          <a:xfrm>
+            <a:off x="7482535" y="3383280"/>
+            <a:ext cx="4160520" cy="2377440"/>
+          </a:xfrm>
+          <a:prstGeom prst="rect">
+            <a:avLst/>
+          </a:prstGeom>
+          <a:noFill/>
+          <a:ln/>
+        </p:spPr>
+        <p:txBody>
+          <a:bodyPr wrap="square" rtlCol="0" anchor="t"/>
+          <a:lstStyle/>
+          <a:p>
+            <a:pPr indent="0" marL="0">
+              <a:lnSpc>
+                <a:spcPct val="125000"/>
+              </a:lnSpc>
+              <a:buNone/>
+            </a:pPr>
+            <a:r>
+              <a:rPr lang="en-US" sz="1250" b="1" dirty="0">
+                <a:solidFill>
+                  <a:srgbClr val="152663"/>
+                </a:solidFill>
+                <a:latin typeface="Gilroy" pitchFamily="34" charset="0"/>
+                <a:ea typeface="Gilroy" pitchFamily="34" charset="-122"/>
+                <a:cs typeface="Gilroy" pitchFamily="34" charset="-120"/>
+              </a:rPr>
+              <a:t>•  </a:t>
+            </a:r>
+            <a:pPr indent="0" marL="0">
+              <a:lnSpc>
+                <a:spcPct val="125000"/>
+              </a:lnSpc>
+              <a:buNone/>
+            </a:pPr>
+            <a:r>
+              <a:rPr lang="en-US" sz="1250" dirty="0">
+                <a:solidFill>
+                  <a:srgbClr val="49454F"/>
+                </a:solidFill>
+                <a:latin typeface="Gilroy" pitchFamily="34" charset="0"/>
+                <a:ea typeface="Gilroy" pitchFamily="34" charset="-122"/>
+                <a:cs typeface="Gilroy" pitchFamily="34" charset="-120"/>
+              </a:rPr>
+              <a:t>El ítem del dropdown "Mi cuenta" pasa de "Ingresar Reclamos" a </a:t>
+            </a:r>
+            <a:pPr indent="0" marL="0">
+              <a:lnSpc>
+                <a:spcPct val="125000"/>
+              </a:lnSpc>
+              <a:buNone/>
+            </a:pPr>
+            <a:r>
+              <a:rPr lang="en-US" sz="1250" b="1" dirty="0">
+                <a:solidFill>
+                  <a:srgbClr val="49454F"/>
+                </a:solidFill>
+                <a:latin typeface="Gilroy" pitchFamily="34" charset="0"/>
+                <a:ea typeface="Gilroy" pitchFamily="34" charset="-122"/>
+                <a:cs typeface="Gilroy" pitchFamily="34" charset="-120"/>
+              </a:rPr>
+              <a:t>"Mis gestiones"</a:t>
+            </a:r>
+            <a:pPr indent="0" marL="0">
+              <a:lnSpc>
+                <a:spcPct val="125000"/>
+              </a:lnSpc>
+              <a:buNone/>
+            </a:pPr>
+            <a:r>
+              <a:rPr lang="en-US" sz="1250" dirty="0">
+                <a:solidFill>
+                  <a:srgbClr val="49454F"/>
+                </a:solidFill>
+                <a:latin typeface="Gilroy" pitchFamily="34" charset="0"/>
+                <a:ea typeface="Gilroy" pitchFamily="34" charset="-122"/>
+                <a:cs typeface="Gilroy" pitchFamily="34" charset="-120"/>
+              </a:rPr>
+              <a:t>.</a:t>
+            </a:r>
+            <a:pPr indent="0" marL="0">
+              <a:lnSpc>
+                <a:spcPct val="125000"/>
+              </a:lnSpc>
+              <a:buNone/>
+            </a:pPr>
+            <a:r>
+              <a:rPr lang="en-US" sz="1250" dirty="0">
+                <a:solidFill>
+                  <a:srgbClr val="49454F"/>
+                </a:solidFill>
+                <a:latin typeface="Gilroy" pitchFamily="34" charset="0"/>
+                <a:ea typeface="Gilroy" pitchFamily="34" charset="-122"/>
+                <a:cs typeface="Gilroy" pitchFamily="34" charset="-120"/>
+              </a:rPr>
+              <a:t>
+</a:t>
+            </a:r>
+            <a:pPr indent="0" marL="0">
+              <a:lnSpc>
+                <a:spcPct val="125000"/>
+              </a:lnSpc>
+              <a:buNone/>
+            </a:pPr>
+            <a:r>
+              <a:rPr lang="en-US" sz="1250" b="1" dirty="0">
+                <a:solidFill>
+                  <a:srgbClr val="152663"/>
+                </a:solidFill>
+                <a:latin typeface="Gilroy" pitchFamily="34" charset="0"/>
+                <a:ea typeface="Gilroy" pitchFamily="34" charset="-122"/>
+                <a:cs typeface="Gilroy" pitchFamily="34" charset="-120"/>
+              </a:rPr>
+              <a:t>•  </a:t>
+            </a:r>
+            <a:pPr indent="0" marL="0">
+              <a:lnSpc>
+                <a:spcPct val="125000"/>
+              </a:lnSpc>
+              <a:buNone/>
+            </a:pPr>
+            <a:r>
+              <a:rPr lang="en-US" sz="1250" dirty="0">
+                <a:solidFill>
+                  <a:srgbClr val="49454F"/>
+                </a:solidFill>
+                <a:latin typeface="Gilroy" pitchFamily="34" charset="0"/>
+                <a:ea typeface="Gilroy" pitchFamily="34" charset="-122"/>
+                <a:cs typeface="Gilroy" pitchFamily="34" charset="-120"/>
+              </a:rPr>
+              <a:t>Es sólo texto: el ítem sigue sin llevar a ningún lado por sí mismo, igual que antes.</a:t>
+            </a:r>
+            <a:pPr indent="0" marL="0">
+              <a:lnSpc>
+                <a:spcPct val="125000"/>
+              </a:lnSpc>
+              <a:buNone/>
+            </a:pPr>
+            <a:r>
+              <a:rPr lang="en-US" sz="1250" dirty="0">
+                <a:solidFill>
+                  <a:srgbClr val="49454F"/>
+                </a:solidFill>
+                <a:latin typeface="Gilroy" pitchFamily="34" charset="0"/>
+                <a:ea typeface="Gilroy" pitchFamily="34" charset="-122"/>
+                <a:cs typeface="Gilroy" pitchFamily="34" charset="-120"/>
+              </a:rPr>
+              <a:t>
+</a:t>
+            </a:r>
+            <a:pPr indent="0" marL="0">
+              <a:lnSpc>
+                <a:spcPct val="125000"/>
+              </a:lnSpc>
+              <a:buNone/>
+            </a:pPr>
+            <a:r>
+              <a:rPr lang="en-US" sz="1250" b="1" dirty="0">
+                <a:solidFill>
+                  <a:srgbClr val="152663"/>
+                </a:solidFill>
+                <a:latin typeface="Gilroy" pitchFamily="34" charset="0"/>
+                <a:ea typeface="Gilroy" pitchFamily="34" charset="-122"/>
+                <a:cs typeface="Gilroy" pitchFamily="34" charset="-120"/>
+              </a:rPr>
+              <a:t>•  </a:t>
+            </a:r>
+            <a:pPr indent="0" marL="0">
+              <a:lnSpc>
+                <a:spcPct val="125000"/>
+              </a:lnSpc>
+              <a:buNone/>
+            </a:pPr>
+            <a:r>
+              <a:rPr lang="en-US" sz="1250" dirty="0">
+                <a:solidFill>
+                  <a:srgbClr val="49454F"/>
+                </a:solidFill>
+                <a:latin typeface="Gilroy" pitchFamily="34" charset="0"/>
+                <a:ea typeface="Gilroy" pitchFamily="34" charset="-122"/>
+                <a:cs typeface="Gilroy" pitchFamily="34" charset="-120"/>
+              </a:rPr>
+              <a:t>El nombre de este ítem ahora sigue automáticamente al nombre vigente de la sección — si vuelve a cambiar, se actualiza solo acá también.</a:t>
+            </a:r>
+            <a:endParaRPr lang="en-US" sz="1250" dirty="0"/>
+          </a:p>
+        </p:txBody>
+      </p:sp>
+      <p:sp>
+        <p:nvSpPr>
+          <p:cNvPr id="11" name="Shape 8"/>
+          <p:cNvSpPr/>
+          <p:nvPr/>
+        </p:nvSpPr>
+        <p:spPr>
+          <a:xfrm>
+            <a:off x="521208" y="1344168"/>
+            <a:ext cx="6668719" cy="4188524"/>
+          </a:xfrm>
+          <a:prstGeom prst="roundRect">
+            <a:avLst>
+              <a:gd name="adj" fmla="val 1746"/>
+            </a:avLst>
+          </a:prstGeom>
+          <a:solidFill>
+            <a:srgbClr val="191919"/>
+          </a:solidFill>
+          <a:ln/>
+          <a:effectLst>
+            <a:outerShdw sx="100000" sy="100000" kx="0" ky="0" algn="bl" rotWithShape="0" blurRad="152400" dist="50800" dir="5400000">
+              <a:srgbClr val="152663">
+                <a:alpha val="35000"/>
+              </a:srgbClr>
+            </a:outerShdw>
+          </a:effectLst>
+        </p:spPr>
+      </p:sp>
+      <p:pic>
+        <p:nvPicPr>
+          <p:cNvPr id="12" name="Image 1" descr="C:\MLOF 01\VORTEX\CORREO ARGENTINO\Reclamos\Reclamos claude\hub\presentaciones\screenshots\00-mi-cuenta-menu.png">    </p:cNvPr>
+          <p:cNvPicPr>
+            <a:picLocks noChangeAspect="1"/>
+          </p:cNvPicPr>
+          <p:nvPr/>
+        </p:nvPicPr>
+        <p:blipFill>
+          <a:blip r:embed="rId2"/>
+          <a:srcRect l="0" r="0" t="0" b="0"/>
+          <a:stretch/>
+        </p:blipFill>
+        <p:spPr>
+          <a:xfrm>
+            <a:off x="548640" y="1371600"/>
+            <a:ext cx="6613855" cy="4133660"/>
+          </a:xfrm>
+          <a:prstGeom prst="rect">
+            <a:avLst/>
+          </a:prstGeom>
+        </p:spPr>
+      </p:pic>
+    </p:spTree>
+  </p:cSld>
+  <p:clrMapOvr>
+    <a:masterClrMapping/>
+  </p:clrMapOvr>
+</p:sld>
+</file>
+
+<file path=ppt/slides/slide5.xml><?xml version="1.0" encoding="utf-8"?>
+<p:sld xmlns:a="http://schemas.openxmlformats.org/drawingml/2006/main" xmlns:r="http://schemas.openxmlformats.org/officeDocument/2006/relationships" xmlns:p="http://schemas.openxmlformats.org/presentationml/2006/main">
+  <p:cSld name="Slide 5">
+    <p:bg>
+      <p:bgPr>
+        <a:solidFill>
           <a:srgbClr val="152663"/>
         </a:solidFill>
       </p:bgPr>
@@ -8459,647 +9701,6 @@
           </a:p>
         </p:txBody>
       </p:sp>
-    </p:spTree>
-  </p:cSld>
-  <p:clrMapOvr>
-    <a:masterClrMapping/>
-  </p:clrMapOvr>
-</p:sld>
-</file>
-
-<file path=ppt/slides/slide5.xml><?xml version="1.0" encoding="utf-8"?>
-<p:sld xmlns:a="http://schemas.openxmlformats.org/drawingml/2006/main" xmlns:r="http://schemas.openxmlformats.org/officeDocument/2006/relationships" xmlns:p="http://schemas.openxmlformats.org/presentationml/2006/main">
-  <p:cSld name="Slide 5">
-    <p:bg>
-      <p:bgPr>
-        <a:solidFill>
-          <a:srgbClr val="FFFFFF"/>
-        </a:solidFill>
-      </p:bgPr>
-    </p:bg>
-    <p:spTree>
-      <p:nvGrpSpPr>
-        <p:cNvPr id="1" name=""/>
-        <p:cNvGrpSpPr/>
-        <p:nvPr/>
-      </p:nvGrpSpPr>
-      <p:grpSpPr>
-        <a:xfrm>
-          <a:off x="0" y="0"/>
-          <a:ext cx="0" cy="0"/>
-          <a:chOff x="0" y="0"/>
-          <a:chExt cx="0" cy="0"/>
-        </a:xfrm>
-      </p:grpSpPr>
-      <p:sp>
-        <p:nvSpPr>
-          <p:cNvPr id="2" name="Shape 0"/>
-          <p:cNvSpPr/>
-          <p:nvPr/>
-        </p:nvSpPr>
-        <p:spPr>
-          <a:xfrm>
-            <a:off x="0" y="0"/>
-            <a:ext cx="12191695" cy="54864"/>
-          </a:xfrm>
-          <a:prstGeom prst="rect">
-            <a:avLst/>
-          </a:prstGeom>
-          <a:solidFill>
-            <a:srgbClr val="152663"/>
-          </a:solidFill>
-          <a:ln/>
-        </p:spPr>
-      </p:sp>
-      <p:sp>
-        <p:nvSpPr>
-          <p:cNvPr id="3" name="Shape 1"/>
-          <p:cNvSpPr/>
-          <p:nvPr/>
-        </p:nvSpPr>
-        <p:spPr>
-          <a:xfrm>
-            <a:off x="0" y="54864"/>
-            <a:ext cx="12191695" cy="566928"/>
-          </a:xfrm>
-          <a:prstGeom prst="rect">
-            <a:avLst/>
-          </a:prstGeom>
-          <a:solidFill>
-            <a:srgbClr val="FFCE00"/>
-          </a:solidFill>
-          <a:ln/>
-        </p:spPr>
-      </p:sp>
-      <p:pic>
-        <p:nvPicPr>
-          <p:cNvPr id="4" name="Image 0" descr="C:\MLOF 01\VORTEX\CORREO ARGENTINO\Reclamos\Reclamos claude\hub\assets\CorreoArgentino-MiCorreo.png">    </p:cNvPr>
-          <p:cNvPicPr>
-            <a:picLocks noChangeAspect="1"/>
-          </p:cNvPicPr>
-          <p:nvPr/>
-        </p:nvPicPr>
-        <p:blipFill>
-          <a:blip r:embed="rId1"/>
-          <a:stretch>
-            <a:fillRect/>
-          </a:stretch>
-        </p:blipFill>
-        <p:spPr>
-          <a:xfrm>
-            <a:off x="457200" y="219456"/>
-            <a:ext cx="1672699" cy="237744"/>
-          </a:xfrm>
-          <a:prstGeom prst="rect">
-            <a:avLst/>
-          </a:prstGeom>
-        </p:spPr>
-      </p:pic>
-      <p:sp>
-        <p:nvSpPr>
-          <p:cNvPr id="5" name="Text 2"/>
-          <p:cNvSpPr/>
-          <p:nvPr/>
-        </p:nvSpPr>
-        <p:spPr>
-          <a:xfrm>
-            <a:off x="2312779" y="54864"/>
-            <a:ext cx="5486400" cy="566928"/>
-          </a:xfrm>
-          <a:prstGeom prst="rect">
-            <a:avLst/>
-          </a:prstGeom>
-          <a:noFill/>
-          <a:ln/>
-        </p:spPr>
-        <p:txBody>
-          <a:bodyPr wrap="square" rtlCol="0" anchor="ctr"/>
-          <a:lstStyle/>
-          <a:p>
-            <a:pPr indent="0" marL="0">
-              <a:buNone/>
-            </a:pPr>
-            <a:r>
-              <a:rPr lang="en-US" sz="1500" b="1" dirty="0">
-                <a:solidFill>
-                  <a:srgbClr val="152663"/>
-                </a:solidFill>
-                <a:latin typeface="Gilroy" pitchFamily="34" charset="0"/>
-                <a:ea typeface="Gilroy" pitchFamily="34" charset="-122"/>
-                <a:cs typeface="Gilroy" pitchFamily="34" charset="-120"/>
-              </a:rPr>
-              <a:t>Mis gestiones</a:t>
-            </a:r>
-            <a:endParaRPr lang="en-US" sz="1500" dirty="0"/>
-          </a:p>
-        </p:txBody>
-      </p:sp>
-      <p:sp>
-        <p:nvSpPr>
-          <p:cNvPr id="6" name="Shape 3"/>
-          <p:cNvSpPr/>
-          <p:nvPr/>
-        </p:nvSpPr>
-        <p:spPr>
-          <a:xfrm>
-            <a:off x="548640" y="1234440"/>
-            <a:ext cx="2395728" cy="329184"/>
-          </a:xfrm>
-          <a:prstGeom prst="roundRect">
-            <a:avLst>
-              <a:gd name="adj" fmla="val 50000"/>
-            </a:avLst>
-          </a:prstGeom>
-          <a:solidFill>
-            <a:srgbClr val="F2F2F2"/>
-          </a:solidFill>
-          <a:ln/>
-        </p:spPr>
-      </p:sp>
-      <p:sp>
-        <p:nvSpPr>
-          <p:cNvPr id="7" name="Text 4"/>
-          <p:cNvSpPr/>
-          <p:nvPr/>
-        </p:nvSpPr>
-        <p:spPr>
-          <a:xfrm>
-            <a:off x="594360" y="1234440"/>
-            <a:ext cx="2304288" cy="329184"/>
-          </a:xfrm>
-          <a:prstGeom prst="rect">
-            <a:avLst/>
-          </a:prstGeom>
-          <a:noFill/>
-          <a:ln/>
-        </p:spPr>
-        <p:txBody>
-          <a:bodyPr wrap="none" rtlCol="0" anchor="ctr"/>
-          <a:lstStyle/>
-          <a:p>
-            <a:pPr algn="ctr" indent="0" marL="0">
-              <a:buNone/>
-            </a:pPr>
-            <a:r>
-              <a:rPr lang="en-US" sz="1050" b="1" spc="100" kern="0" dirty="0">
-                <a:solidFill>
-                  <a:srgbClr val="152663"/>
-                </a:solidFill>
-                <a:latin typeface="Gilroy" pitchFamily="34" charset="0"/>
-                <a:ea typeface="Gilroy" pitchFamily="34" charset="-122"/>
-                <a:cs typeface="Gilroy" pitchFamily="34" charset="-120"/>
-              </a:rPr>
-              <a:t>PUNTO DE PARTIDA</a:t>
-            </a:r>
-            <a:endParaRPr lang="en-US" sz="1050" dirty="0"/>
-          </a:p>
-        </p:txBody>
-      </p:sp>
-      <p:sp>
-        <p:nvSpPr>
-          <p:cNvPr id="8" name="Text 5"/>
-          <p:cNvSpPr/>
-          <p:nvPr/>
-        </p:nvSpPr>
-        <p:spPr>
-          <a:xfrm>
-            <a:off x="548640" y="1691640"/>
-            <a:ext cx="4160520" cy="914400"/>
-          </a:xfrm>
-          <a:prstGeom prst="rect">
-            <a:avLst/>
-          </a:prstGeom>
-          <a:noFill/>
-          <a:ln/>
-        </p:spPr>
-        <p:txBody>
-          <a:bodyPr wrap="square" rtlCol="0" anchor="ctr"/>
-          <a:lstStyle/>
-          <a:p>
-            <a:pPr indent="0" marL="0">
-              <a:lnSpc>
-                <a:spcPct val="110000"/>
-              </a:lnSpc>
-              <a:buNone/>
-            </a:pPr>
-            <a:r>
-              <a:rPr lang="en-US" sz="1900" b="1" dirty="0">
-                <a:solidFill>
-                  <a:srgbClr val="191919"/>
-                </a:solidFill>
-                <a:latin typeface="Gilroy" pitchFamily="34" charset="0"/>
-                <a:ea typeface="Gilroy" pitchFamily="34" charset="-122"/>
-                <a:cs typeface="Gilroy" pitchFamily="34" charset="-120"/>
-              </a:rPr>
-              <a:t>Vista general, categoría "Todos"</a:t>
-            </a:r>
-            <a:endParaRPr lang="en-US" sz="1900" dirty="0"/>
-          </a:p>
-        </p:txBody>
-      </p:sp>
-      <p:sp>
-        <p:nvSpPr>
-          <p:cNvPr id="9" name="Text 6"/>
-          <p:cNvSpPr/>
-          <p:nvPr/>
-        </p:nvSpPr>
-        <p:spPr>
-          <a:xfrm>
-            <a:off x="548640" y="2350008"/>
-            <a:ext cx="4160520" cy="822960"/>
-          </a:xfrm>
-          <a:prstGeom prst="rect">
-            <a:avLst/>
-          </a:prstGeom>
-          <a:noFill/>
-          <a:ln/>
-        </p:spPr>
-        <p:txBody>
-          <a:bodyPr wrap="square" rtlCol="0" anchor="ctr"/>
-          <a:lstStyle/>
-          <a:p>
-            <a:pPr indent="0" marL="0">
-              <a:lnSpc>
-                <a:spcPct val="130000"/>
-              </a:lnSpc>
-              <a:buNone/>
-            </a:pPr>
-            <a:r>
-              <a:rPr lang="en-US" sz="1150" dirty="0">
-                <a:solidFill>
-                  <a:srgbClr val="49454F"/>
-                </a:solidFill>
-                <a:latin typeface="Gilroy" pitchFamily="34" charset="0"/>
-                <a:ea typeface="Gilroy" pitchFamily="34" charset="-122"/>
-                <a:cs typeface="Gilroy" pitchFamily="34" charset="-120"/>
-              </a:rPr>
-              <a:t>El nombre de la sección es "Mis gestiones".</a:t>
-            </a:r>
-            <a:endParaRPr lang="en-US" sz="1150" dirty="0"/>
-          </a:p>
-        </p:txBody>
-      </p:sp>
-      <p:sp>
-        <p:nvSpPr>
-          <p:cNvPr id="10" name="Text 7"/>
-          <p:cNvSpPr/>
-          <p:nvPr/>
-        </p:nvSpPr>
-        <p:spPr>
-          <a:xfrm>
-            <a:off x="548640" y="3127248"/>
-            <a:ext cx="4160520" cy="2377440"/>
-          </a:xfrm>
-          <a:prstGeom prst="rect">
-            <a:avLst/>
-          </a:prstGeom>
-          <a:noFill/>
-          <a:ln/>
-        </p:spPr>
-        <p:txBody>
-          <a:bodyPr wrap="square" rtlCol="0" anchor="t"/>
-          <a:lstStyle/>
-          <a:p>
-            <a:pPr indent="0" marL="0">
-              <a:lnSpc>
-                <a:spcPct val="125000"/>
-              </a:lnSpc>
-              <a:buNone/>
-            </a:pPr>
-            <a:r>
-              <a:rPr lang="en-US" sz="1250" b="1" dirty="0">
-                <a:solidFill>
-                  <a:srgbClr val="152663"/>
-                </a:solidFill>
-                <a:latin typeface="Gilroy" pitchFamily="34" charset="0"/>
-                <a:ea typeface="Gilroy" pitchFamily="34" charset="-122"/>
-                <a:cs typeface="Gilroy" pitchFamily="34" charset="-120"/>
-              </a:rPr>
-              <a:t>•  </a:t>
-            </a:r>
-            <a:pPr indent="0" marL="0">
-              <a:lnSpc>
-                <a:spcPct val="125000"/>
-              </a:lnSpc>
-              <a:buNone/>
-            </a:pPr>
-            <a:r>
-              <a:rPr lang="en-US" sz="1250" b="1" dirty="0">
-                <a:solidFill>
-                  <a:srgbClr val="49454F"/>
-                </a:solidFill>
-                <a:latin typeface="Gilroy" pitchFamily="34" charset="0"/>
-                <a:ea typeface="Gilroy" pitchFamily="34" charset="-122"/>
-                <a:cs typeface="Gilroy" pitchFamily="34" charset="-120"/>
-              </a:rPr>
-              <a:t>9 gestiones</a:t>
-            </a:r>
-            <a:pPr indent="0" marL="0">
-              <a:lnSpc>
-                <a:spcPct val="125000"/>
-              </a:lnSpc>
-              <a:buNone/>
-            </a:pPr>
-            <a:r>
-              <a:rPr lang="en-US" sz="1250" dirty="0">
-                <a:solidFill>
-                  <a:srgbClr val="49454F"/>
-                </a:solidFill>
-                <a:latin typeface="Gilroy" pitchFamily="34" charset="0"/>
-                <a:ea typeface="Gilroy" pitchFamily="34" charset="-122"/>
-                <a:cs typeface="Gilroy" pitchFamily="34" charset="-120"/>
-              </a:rPr>
-              <a:t>: </a:t>
-            </a:r>
-            <a:pPr indent="0" marL="0">
-              <a:lnSpc>
-                <a:spcPct val="125000"/>
-              </a:lnSpc>
-              <a:buNone/>
-            </a:pPr>
-            <a:r>
-              <a:rPr lang="en-US" sz="1250" i="1" dirty="0">
-                <a:solidFill>
-                  <a:srgbClr val="49454F"/>
-                </a:solidFill>
-                <a:latin typeface="Gilroy" pitchFamily="34" charset="0"/>
-                <a:ea typeface="Gilroy" pitchFamily="34" charset="-122"/>
-                <a:cs typeface="Gilroy" pitchFamily="34" charset="-120"/>
-              </a:rPr>
-              <a:t>Todos</a:t>
-            </a:r>
-            <a:pPr indent="0" marL="0">
-              <a:lnSpc>
-                <a:spcPct val="125000"/>
-              </a:lnSpc>
-              <a:buNone/>
-            </a:pPr>
-            <a:r>
-              <a:rPr lang="en-US" sz="1250" dirty="0">
-                <a:solidFill>
-                  <a:srgbClr val="49454F"/>
-                </a:solidFill>
-                <a:latin typeface="Gilroy" pitchFamily="34" charset="0"/>
-                <a:ea typeface="Gilroy" pitchFamily="34" charset="-122"/>
-                <a:cs typeface="Gilroy" pitchFamily="34" charset="-120"/>
-              </a:rPr>
-              <a:t> es la unión de las categorías visibles para </a:t>
-            </a:r>
-            <a:pPr indent="0" marL="0">
-              <a:lnSpc>
-                <a:spcPct val="125000"/>
-              </a:lnSpc>
-              <a:buNone/>
-            </a:pPr>
-            <a:r>
-              <a:rPr lang="en-US" sz="1250" i="1" dirty="0">
-                <a:solidFill>
-                  <a:srgbClr val="49454F"/>
-                </a:solidFill>
-                <a:latin typeface="Gilroy" pitchFamily="34" charset="0"/>
-                <a:ea typeface="Gilroy" pitchFamily="34" charset="-122"/>
-                <a:cs typeface="Gilroy" pitchFamily="34" charset="-120"/>
-              </a:rPr>
-              <a:t>este</a:t>
-            </a:r>
-            <a:pPr indent="0" marL="0">
-              <a:lnSpc>
-                <a:spcPct val="125000"/>
-              </a:lnSpc>
-              <a:buNone/>
-            </a:pPr>
-            <a:r>
-              <a:rPr lang="en-US" sz="1250" dirty="0">
-                <a:solidFill>
-                  <a:srgbClr val="49454F"/>
-                </a:solidFill>
-                <a:latin typeface="Gilroy" pitchFamily="34" charset="0"/>
-                <a:ea typeface="Gilroy" pitchFamily="34" charset="-122"/>
-                <a:cs typeface="Gilroy" pitchFamily="34" charset="-120"/>
-              </a:rPr>
-              <a:t> tipo de usuario, nunca el universo completo.</a:t>
-            </a:r>
-            <a:pPr indent="0" marL="0">
-              <a:lnSpc>
-                <a:spcPct val="125000"/>
-              </a:lnSpc>
-              <a:buNone/>
-            </a:pPr>
-            <a:r>
-              <a:rPr lang="en-US" sz="1250" dirty="0">
-                <a:solidFill>
-                  <a:srgbClr val="49454F"/>
-                </a:solidFill>
-                <a:latin typeface="Gilroy" pitchFamily="34" charset="0"/>
-                <a:ea typeface="Gilroy" pitchFamily="34" charset="-122"/>
-                <a:cs typeface="Gilroy" pitchFamily="34" charset="-120"/>
-              </a:rPr>
-              <a:t>
-</a:t>
-            </a:r>
-            <a:pPr indent="0" marL="0">
-              <a:lnSpc>
-                <a:spcPct val="125000"/>
-              </a:lnSpc>
-              <a:buNone/>
-            </a:pPr>
-            <a:r>
-              <a:rPr lang="en-US" sz="1250" b="1" dirty="0">
-                <a:solidFill>
-                  <a:srgbClr val="152663"/>
-                </a:solidFill>
-                <a:latin typeface="Gilroy" pitchFamily="34" charset="0"/>
-                <a:ea typeface="Gilroy" pitchFamily="34" charset="-122"/>
-                <a:cs typeface="Gilroy" pitchFamily="34" charset="-120"/>
-              </a:rPr>
-              <a:t>•  </a:t>
-            </a:r>
-            <a:pPr indent="0" marL="0">
-              <a:lnSpc>
-                <a:spcPct val="125000"/>
-              </a:lnSpc>
-              <a:buNone/>
-            </a:pPr>
-            <a:r>
-              <a:rPr lang="en-US" sz="1250" dirty="0">
-                <a:solidFill>
-                  <a:srgbClr val="49454F"/>
-                </a:solidFill>
-                <a:latin typeface="Gilroy" pitchFamily="34" charset="0"/>
-                <a:ea typeface="Gilroy" pitchFamily="34" charset="-122"/>
-                <a:cs typeface="Gilroy" pitchFamily="34" charset="-120"/>
-              </a:rPr>
-              <a:t>Buscador, chips y listado comparten el mismo ancho máximo, alineados.</a:t>
-            </a:r>
-            <a:pPr indent="0" marL="0">
-              <a:lnSpc>
-                <a:spcPct val="125000"/>
-              </a:lnSpc>
-              <a:buNone/>
-            </a:pPr>
-            <a:r>
-              <a:rPr lang="en-US" sz="1250" dirty="0">
-                <a:solidFill>
-                  <a:srgbClr val="49454F"/>
-                </a:solidFill>
-                <a:latin typeface="Gilroy" pitchFamily="34" charset="0"/>
-                <a:ea typeface="Gilroy" pitchFamily="34" charset="-122"/>
-                <a:cs typeface="Gilroy" pitchFamily="34" charset="-120"/>
-              </a:rPr>
-              <a:t>
-</a:t>
-            </a:r>
-            <a:pPr indent="0" marL="0">
-              <a:lnSpc>
-                <a:spcPct val="125000"/>
-              </a:lnSpc>
-              <a:buNone/>
-            </a:pPr>
-            <a:r>
-              <a:rPr lang="en-US" sz="1250" b="1" dirty="0">
-                <a:solidFill>
-                  <a:srgbClr val="152663"/>
-                </a:solidFill>
-                <a:latin typeface="Gilroy" pitchFamily="34" charset="0"/>
-                <a:ea typeface="Gilroy" pitchFamily="34" charset="-122"/>
-                <a:cs typeface="Gilroy" pitchFamily="34" charset="-120"/>
-              </a:rPr>
-              <a:t>•  </a:t>
-            </a:r>
-            <a:pPr indent="0" marL="0">
-              <a:lnSpc>
-                <a:spcPct val="125000"/>
-              </a:lnSpc>
-              <a:buNone/>
-            </a:pPr>
-            <a:r>
-              <a:rPr lang="en-US" sz="1250" dirty="0">
-                <a:solidFill>
-                  <a:srgbClr val="49454F"/>
-                </a:solidFill>
-                <a:latin typeface="Gilroy" pitchFamily="34" charset="0"/>
-                <a:ea typeface="Gilroy" pitchFamily="34" charset="-122"/>
-                <a:cs typeface="Gilroy" pitchFamily="34" charset="-120"/>
-              </a:rPr>
-              <a:t>La categoría por defecto es siempre "Todos".</a:t>
-            </a:r>
-            <a:endParaRPr lang="en-US" sz="1250" dirty="0"/>
-          </a:p>
-        </p:txBody>
-      </p:sp>
-      <p:sp>
-        <p:nvSpPr>
-          <p:cNvPr id="11" name="Shape 8"/>
-          <p:cNvSpPr/>
-          <p:nvPr/>
-        </p:nvSpPr>
-        <p:spPr>
-          <a:xfrm>
-            <a:off x="548640" y="5989320"/>
-            <a:ext cx="1271016" cy="310896"/>
-          </a:xfrm>
-          <a:prstGeom prst="roundRect">
-            <a:avLst>
-              <a:gd name="adj" fmla="val 50000"/>
-            </a:avLst>
-          </a:prstGeom>
-          <a:solidFill>
-            <a:srgbClr val="E7EDFB"/>
-          </a:solidFill>
-          <a:ln/>
-        </p:spPr>
-      </p:sp>
-      <p:sp>
-        <p:nvSpPr>
-          <p:cNvPr id="12" name="Text 9"/>
-          <p:cNvSpPr/>
-          <p:nvPr/>
-        </p:nvSpPr>
-        <p:spPr>
-          <a:xfrm>
-            <a:off x="548640" y="5989320"/>
-            <a:ext cx="1271016" cy="310896"/>
-          </a:xfrm>
-          <a:prstGeom prst="rect">
-            <a:avLst/>
-          </a:prstGeom>
-          <a:noFill/>
-          <a:ln/>
-        </p:spPr>
-        <p:txBody>
-          <a:bodyPr wrap="square" rtlCol="0" anchor="ctr"/>
-          <a:lstStyle/>
-          <a:p>
-            <a:pPr algn="ctr" indent="0" marL="0">
-              <a:buNone/>
-            </a:pPr>
-            <a:r>
-              <a:rPr lang="en-US" sz="1150" b="1" dirty="0">
-                <a:solidFill>
-                  <a:srgbClr val="2563D9"/>
-                </a:solidFill>
-                <a:latin typeface="Gilroy" pitchFamily="34" charset="0"/>
-                <a:ea typeface="Gilroy" pitchFamily="34" charset="-122"/>
-                <a:cs typeface="Gilroy" pitchFamily="34" charset="-120"/>
-              </a:rPr>
-              <a:t>Individuo</a:t>
-            </a:r>
-            <a:endParaRPr lang="en-US" sz="1150" dirty="0"/>
-          </a:p>
-        </p:txBody>
-      </p:sp>
-      <p:sp>
-        <p:nvSpPr>
-          <p:cNvPr id="13" name="Shape 10"/>
-          <p:cNvSpPr/>
-          <p:nvPr/>
-        </p:nvSpPr>
-        <p:spPr>
-          <a:xfrm>
-            <a:off x="5001768" y="1344168"/>
-            <a:ext cx="6668719" cy="4188524"/>
-          </a:xfrm>
-          <a:prstGeom prst="roundRect">
-            <a:avLst>
-              <a:gd name="adj" fmla="val 1746"/>
-            </a:avLst>
-          </a:prstGeom>
-          <a:solidFill>
-            <a:srgbClr val="191919"/>
-          </a:solidFill>
-          <a:ln/>
-          <a:effectLst>
-            <a:outerShdw sx="100000" sy="100000" kx="0" ky="0" algn="bl" rotWithShape="0" blurRad="152400" dist="50800" dir="5400000">
-              <a:srgbClr val="152663">
-                <a:alpha val="35000"/>
-              </a:srgbClr>
-            </a:outerShdw>
-          </a:effectLst>
-        </p:spPr>
-      </p:sp>
-      <p:pic>
-        <p:nvPicPr>
-          <p:cNvPr id="14" name="Image 1" descr="C:\MLOF 01\VORTEX\CORREO ARGENTINO\Reclamos\Reclamos claude\hub\presentaciones\screenshots\01-individuo-todos.png">    </p:cNvPr>
-          <p:cNvPicPr>
-            <a:picLocks noChangeAspect="1"/>
-          </p:cNvPicPr>
-          <p:nvPr/>
-        </p:nvPicPr>
-        <p:blipFill>
-          <a:blip r:embed="rId2"/>
-          <a:srcRect l="0" r="0" t="0" b="0"/>
-          <a:stretch/>
-        </p:blipFill>
-        <p:spPr>
-          <a:xfrm>
-            <a:off x="5029200" y="1371600"/>
-            <a:ext cx="6613855" cy="4133660"/>
-          </a:xfrm>
-          <a:prstGeom prst="rect">
-            <a:avLst/>
-          </a:prstGeom>
-        </p:spPr>
-      </p:pic>
     </p:spTree>
   </p:cSld>
   <p:clrMapOvr>
@@ -9229,7 +9830,7 @@
                 <a:ea typeface="Gilroy" pitchFamily="34" charset="-122"/>
                 <a:cs typeface="Gilroy" pitchFamily="34" charset="-120"/>
               </a:rPr>
-              <a:t>Categorías</a:t>
+              <a:t>Mis gestiones</a:t>
             </a:r>
             <a:endParaRPr lang="en-US" sz="1500" dirty="0"/>
           </a:p>
@@ -9243,8 +9844,8 @@
         </p:nvSpPr>
         <p:spPr>
           <a:xfrm>
-            <a:off x="7482535" y="1234440"/>
-            <a:ext cx="2889504" cy="329184"/>
+            <a:off x="548640" y="1234440"/>
+            <a:ext cx="2395728" cy="329184"/>
           </a:xfrm>
           <a:prstGeom prst="roundRect">
             <a:avLst>
@@ -9265,8 +9866,8 @@
         </p:nvSpPr>
         <p:spPr>
           <a:xfrm>
-            <a:off x="7528255" y="1234440"/>
-            <a:ext cx="2798064" cy="329184"/>
+            <a:off x="594360" y="1234440"/>
+            <a:ext cx="2304288" cy="329184"/>
           </a:xfrm>
           <a:prstGeom prst="rect">
             <a:avLst/>
@@ -9290,7 +9891,7 @@
                 <a:ea typeface="Gilroy" pitchFamily="34" charset="-122"/>
                 <a:cs typeface="Gilroy" pitchFamily="34" charset="-120"/>
               </a:rPr>
-              <a:t>ELEGIR UNA CATEGORÍA</a:t>
+              <a:t>PUNTO DE PARTIDA</a:t>
             </a:r>
             <a:endParaRPr lang="en-US" sz="1050" dirty="0"/>
           </a:p>
@@ -9304,7 +9905,7 @@
         </p:nvSpPr>
         <p:spPr>
           <a:xfrm>
-            <a:off x="7482535" y="1691640"/>
+            <a:off x="548640" y="1691640"/>
             <a:ext cx="4160520" cy="914400"/>
           </a:xfrm>
           <a:prstGeom prst="rect">
@@ -9332,7 +9933,7 @@
                 <a:ea typeface="Gilroy" pitchFamily="34" charset="-122"/>
                 <a:cs typeface="Gilroy" pitchFamily="34" charset="-120"/>
               </a:rPr>
-              <a:t>La categoría acota listado y contador juntos</a:t>
+              <a:t>Vista general, categoría "Todos"</a:t>
             </a:r>
             <a:endParaRPr lang="en-US" sz="1900" dirty="0"/>
           </a:p>
@@ -9346,7 +9947,7 @@
         </p:nvSpPr>
         <p:spPr>
           <a:xfrm>
-            <a:off x="7482535" y="2606040"/>
+            <a:off x="548640" y="2350008"/>
             <a:ext cx="4160520" cy="822960"/>
           </a:xfrm>
           <a:prstGeom prst="rect">
@@ -9374,7 +9975,7 @@
                 <a:ea typeface="Gilroy" pitchFamily="34" charset="-122"/>
                 <a:cs typeface="Gilroy" pitchFamily="34" charset="-120"/>
               </a:rPr>
-              <a:t>Con "Mi Cuenta" seleccionada, el listado baja a sus 2 gestiones y aparece el link "Limpiar filtro".</a:t>
+              <a:t>El nombre de la sección es "Mis gestiones".</a:t>
             </a:r>
             <a:endParaRPr lang="en-US" sz="1150" dirty="0"/>
           </a:p>
@@ -9388,7 +9989,7 @@
         </p:nvSpPr>
         <p:spPr>
           <a:xfrm>
-            <a:off x="7482535" y="3383280"/>
+            <a:off x="548640" y="3127248"/>
             <a:ext cx="4160520" cy="2377440"/>
           </a:xfrm>
           <a:prstGeom prst="rect">
@@ -9425,6 +10026,23 @@
               <a:buNone/>
             </a:pPr>
             <a:r>
+              <a:rPr lang="en-US" sz="1250" b="1" dirty="0">
+                <a:solidFill>
+                  <a:srgbClr val="49454F"/>
+                </a:solidFill>
+                <a:latin typeface="Gilroy" pitchFamily="34" charset="0"/>
+                <a:ea typeface="Gilroy" pitchFamily="34" charset="-122"/>
+                <a:cs typeface="Gilroy" pitchFamily="34" charset="-120"/>
+              </a:rPr>
+              <a:t>9 gestiones</a:t>
+            </a:r>
+            <a:pPr indent="0" marL="0">
+              <a:lnSpc>
+                <a:spcPct val="125000"/>
+              </a:lnSpc>
+              <a:buNone/>
+            </a:pPr>
+            <a:r>
               <a:rPr lang="en-US" sz="1250" dirty="0">
                 <a:solidFill>
                   <a:srgbClr val="49454F"/>
@@ -9433,7 +10051,75 @@
                 <a:ea typeface="Gilroy" pitchFamily="34" charset="-122"/>
                 <a:cs typeface="Gilroy" pitchFamily="34" charset="-120"/>
               </a:rPr>
-              <a:t>"Limpiar filtro" vive en la misma línea que el contador, alineado a la derecha.</a:t>
+              <a:t>: </a:t>
+            </a:r>
+            <a:pPr indent="0" marL="0">
+              <a:lnSpc>
+                <a:spcPct val="125000"/>
+              </a:lnSpc>
+              <a:buNone/>
+            </a:pPr>
+            <a:r>
+              <a:rPr lang="en-US" sz="1250" i="1" dirty="0">
+                <a:solidFill>
+                  <a:srgbClr val="49454F"/>
+                </a:solidFill>
+                <a:latin typeface="Gilroy" pitchFamily="34" charset="0"/>
+                <a:ea typeface="Gilroy" pitchFamily="34" charset="-122"/>
+                <a:cs typeface="Gilroy" pitchFamily="34" charset="-120"/>
+              </a:rPr>
+              <a:t>Todos</a:t>
+            </a:r>
+            <a:pPr indent="0" marL="0">
+              <a:lnSpc>
+                <a:spcPct val="125000"/>
+              </a:lnSpc>
+              <a:buNone/>
+            </a:pPr>
+            <a:r>
+              <a:rPr lang="en-US" sz="1250" dirty="0">
+                <a:solidFill>
+                  <a:srgbClr val="49454F"/>
+                </a:solidFill>
+                <a:latin typeface="Gilroy" pitchFamily="34" charset="0"/>
+                <a:ea typeface="Gilroy" pitchFamily="34" charset="-122"/>
+                <a:cs typeface="Gilroy" pitchFamily="34" charset="-120"/>
+              </a:rPr>
+              <a:t> es la unión de las categorías visibles para </a:t>
+            </a:r>
+            <a:pPr indent="0" marL="0">
+              <a:lnSpc>
+                <a:spcPct val="125000"/>
+              </a:lnSpc>
+              <a:buNone/>
+            </a:pPr>
+            <a:r>
+              <a:rPr lang="en-US" sz="1250" i="1" dirty="0">
+                <a:solidFill>
+                  <a:srgbClr val="49454F"/>
+                </a:solidFill>
+                <a:latin typeface="Gilroy" pitchFamily="34" charset="0"/>
+                <a:ea typeface="Gilroy" pitchFamily="34" charset="-122"/>
+                <a:cs typeface="Gilroy" pitchFamily="34" charset="-120"/>
+              </a:rPr>
+              <a:t>este</a:t>
+            </a:r>
+            <a:pPr indent="0" marL="0">
+              <a:lnSpc>
+                <a:spcPct val="125000"/>
+              </a:lnSpc>
+              <a:buNone/>
+            </a:pPr>
+            <a:r>
+              <a:rPr lang="en-US" sz="1250" dirty="0">
+                <a:solidFill>
+                  <a:srgbClr val="49454F"/>
+                </a:solidFill>
+                <a:latin typeface="Gilroy" pitchFamily="34" charset="0"/>
+                <a:ea typeface="Gilroy" pitchFamily="34" charset="-122"/>
+                <a:cs typeface="Gilroy" pitchFamily="34" charset="-120"/>
+              </a:rPr>
+              <a:t> tipo de usuario, nunca el universo completo.</a:t>
             </a:r>
             <a:pPr indent="0" marL="0">
               <a:lnSpc>
@@ -9485,7 +10171,7 @@
                 <a:ea typeface="Gilroy" pitchFamily="34" charset="-122"/>
                 <a:cs typeface="Gilroy" pitchFamily="34" charset="-120"/>
               </a:rPr>
-              <a:t>Buscador y categoría se combinan entre sí.</a:t>
+              <a:t>Buscador, chips y listado comparten el mismo ancho máximo, alineados.</a:t>
             </a:r>
             <a:pPr indent="0" marL="0">
               <a:lnSpc>
@@ -9537,7 +10223,7 @@
                 <a:ea typeface="Gilroy" pitchFamily="34" charset="-122"/>
                 <a:cs typeface="Gilroy" pitchFamily="34" charset="-120"/>
               </a:rPr>
-              <a:t>Si la categoría elegida deja de estar disponible para el tipo de usuario, el filtro vuelve solo a "Todos".</a:t>
+              <a:t>La categoría por defecto es siempre "Todos".</a:t>
             </a:r>
             <a:endParaRPr lang="en-US" sz="1250" dirty="0"/>
           </a:p>
@@ -9551,8 +10237,8 @@
         </p:nvSpPr>
         <p:spPr>
           <a:xfrm>
-            <a:off x="7482535" y="5989320"/>
-            <a:ext cx="1271016" cy="310896"/>
+            <a:off x="548640" y="5989320"/>
+            <a:ext cx="1568196" cy="310896"/>
           </a:xfrm>
           <a:prstGeom prst="roundRect">
             <a:avLst>
@@ -9573,17 +10259,17 @@
         </p:nvSpPr>
         <p:spPr>
           <a:xfrm>
-            <a:off x="7482535" y="5989320"/>
-            <a:ext cx="1271016" cy="310896"/>
-          </a:xfrm>
-          <a:prstGeom prst="rect">
-            <a:avLst/>
-          </a:prstGeom>
-          <a:noFill/>
-          <a:ln/>
-        </p:spPr>
-        <p:txBody>
-          <a:bodyPr wrap="square" rtlCol="0" anchor="ctr"/>
+            <a:off x="594360" y="5989320"/>
+            <a:ext cx="1476756" cy="310896"/>
+          </a:xfrm>
+          <a:prstGeom prst="rect">
+            <a:avLst/>
+          </a:prstGeom>
+          <a:noFill/>
+          <a:ln/>
+        </p:spPr>
+        <p:txBody>
+          <a:bodyPr wrap="none" rtlCol="0" anchor="ctr"/>
           <a:lstStyle/>
           <a:p>
             <a:pPr algn="ctr" indent="0" marL="0">
@@ -9612,7 +10298,7 @@
         </p:nvSpPr>
         <p:spPr>
           <a:xfrm>
-            <a:off x="521208" y="1344168"/>
+            <a:off x="5001768" y="1344168"/>
             <a:ext cx="6668719" cy="4188524"/>
           </a:xfrm>
           <a:prstGeom prst="roundRect">
@@ -9635,7 +10321,7 @@
       </p:sp>
       <p:pic>
         <p:nvPicPr>
-          <p:cNvPr id="14" name="Image 1" descr="C:\MLOF 01\VORTEX\CORREO ARGENTINO\Reclamos\Reclamos claude\hub\presentaciones\screenshots\02-individuo-mi_cuenta.png">    </p:cNvPr>
+          <p:cNvPr id="14" name="Image 1" descr="C:\MLOF 01\VORTEX\CORREO ARGENTINO\Reclamos\Reclamos claude\hub\presentaciones\screenshots\01-individuo-todos.png">    </p:cNvPr>
           <p:cNvPicPr>
             <a:picLocks noChangeAspect="1"/>
           </p:cNvPicPr>
@@ -9648,7 +10334,7 @@
         </p:blipFill>
         <p:spPr>
           <a:xfrm>
-            <a:off x="548640" y="1371600"/>
+            <a:off x="5029200" y="1371600"/>
             <a:ext cx="6613855" cy="4133660"/>
           </a:xfrm>
           <a:prstGeom prst="rect">
@@ -9785,7 +10471,7 @@
                 <a:ea typeface="Gilroy" pitchFamily="34" charset="-122"/>
                 <a:cs typeface="Gilroy" pitchFamily="34" charset="-120"/>
               </a:rPr>
-              <a:t>Transparencia</a:t>
+              <a:t>Categorías</a:t>
             </a:r>
             <a:endParaRPr lang="en-US" sz="1500" dirty="0"/>
           </a:p>
@@ -9799,7 +10485,7 @@
         </p:nvSpPr>
         <p:spPr>
           <a:xfrm>
-            <a:off x="548640" y="1234440"/>
+            <a:off x="7482535" y="1234440"/>
             <a:ext cx="2889504" cy="329184"/>
           </a:xfrm>
           <a:prstGeom prst="roundRect">
@@ -9821,7 +10507,7 @@
         </p:nvSpPr>
         <p:spPr>
           <a:xfrm>
-            <a:off x="594360" y="1234440"/>
+            <a:off x="7528255" y="1234440"/>
             <a:ext cx="2798064" cy="329184"/>
           </a:xfrm>
           <a:prstGeom prst="rect">
@@ -9846,7 +10532,7 @@
                 <a:ea typeface="Gilroy" pitchFamily="34" charset="-122"/>
                 <a:cs typeface="Gilroy" pitchFamily="34" charset="-120"/>
               </a:rPr>
-              <a:t>QUÉ ES REAL Y QUÉ NO</a:t>
+              <a:t>ELEGIR UNA CATEGORÍA</a:t>
             </a:r>
             <a:endParaRPr lang="en-US" sz="1050" dirty="0"/>
           </a:p>
@@ -9860,7 +10546,7 @@
         </p:nvSpPr>
         <p:spPr>
           <a:xfrm>
-            <a:off x="548640" y="1691640"/>
+            <a:off x="7482535" y="1691640"/>
             <a:ext cx="4160520" cy="914400"/>
           </a:xfrm>
           <a:prstGeom prst="rect">
@@ -9888,7 +10574,7 @@
                 <a:ea typeface="Gilroy" pitchFamily="34" charset="-122"/>
                 <a:cs typeface="Gilroy" pitchFamily="34" charset="-120"/>
               </a:rPr>
-              <a:t>El contenido inventado se marca en el propio texto</a:t>
+              <a:t>La categoría acota listado y contador juntos</a:t>
             </a:r>
             <a:endParaRPr lang="en-US" sz="1900" dirty="0"/>
           </a:p>
@@ -9902,7 +10588,7 @@
         </p:nvSpPr>
         <p:spPr>
           <a:xfrm>
-            <a:off x="548640" y="2606040"/>
+            <a:off x="7482535" y="2606040"/>
             <a:ext cx="4160520" cy="822960"/>
           </a:xfrm>
           <a:prstGeom prst="rect">
@@ -9930,7 +10616,7 @@
                 <a:ea typeface="Gilroy" pitchFamily="34" charset="-122"/>
                 <a:cs typeface="Gilroy" pitchFamily="34" charset="-120"/>
               </a:rPr>
-              <a:t>2 de las 7 categorías todavía no tienen datos reales del negocio.</a:t>
+              <a:t>Con "Mi Cuenta" seleccionada, el listado baja a sus 2 gestiones y aparece el link "Limpiar filtro".</a:t>
             </a:r>
             <a:endParaRPr lang="en-US" sz="1150" dirty="0"/>
           </a:p>
@@ -9944,7 +10630,7 @@
         </p:nvSpPr>
         <p:spPr>
           <a:xfrm>
-            <a:off x="548640" y="3383280"/>
+            <a:off x="7482535" y="3383280"/>
             <a:ext cx="4160520" cy="2377440"/>
           </a:xfrm>
           <a:prstGeom prst="rect">
@@ -9989,41 +10675,7 @@
                 <a:ea typeface="Gilroy" pitchFamily="34" charset="-122"/>
                 <a:cs typeface="Gilroy" pitchFamily="34" charset="-120"/>
               </a:rPr>
-              <a:t>Cada gestión de relleno termina literalmente en </a:t>
-            </a:r>
-            <a:pPr indent="0" marL="0">
-              <a:lnSpc>
-                <a:spcPct val="125000"/>
-              </a:lnSpc>
-              <a:buNone/>
-            </a:pPr>
-            <a:r>
-              <a:rPr lang="en-US" sz="1250" b="1" dirty="0">
-                <a:solidFill>
-                  <a:srgbClr val="49454F"/>
-                </a:solidFill>
-                <a:latin typeface="Gilroy" pitchFamily="34" charset="0"/>
-                <a:ea typeface="Gilroy" pitchFamily="34" charset="-122"/>
-                <a:cs typeface="Gilroy" pitchFamily="34" charset="-120"/>
-              </a:rPr>
-              <a:t>"(Gestión inventada)"</a:t>
-            </a:r>
-            <a:pPr indent="0" marL="0">
-              <a:lnSpc>
-                <a:spcPct val="125000"/>
-              </a:lnSpc>
-              <a:buNone/>
-            </a:pPr>
-            <a:r>
-              <a:rPr lang="en-US" sz="1250" dirty="0">
-                <a:solidFill>
-                  <a:srgbClr val="49454F"/>
-                </a:solidFill>
-                <a:latin typeface="Gilroy" pitchFamily="34" charset="0"/>
-                <a:ea typeface="Gilroy" pitchFamily="34" charset="-122"/>
-                <a:cs typeface="Gilroy" pitchFamily="34" charset="-120"/>
-              </a:rPr>
-              <a:t>.</a:t>
+              <a:t>"Limpiar filtro" vive en la misma línea que el contador, alineado a la derecha.</a:t>
             </a:r>
             <a:pPr indent="0" marL="0">
               <a:lnSpc>
@@ -10075,7 +10727,7 @@
                 <a:ea typeface="Gilroy" pitchFamily="34" charset="-122"/>
                 <a:cs typeface="Gilroy" pitchFamily="34" charset="-120"/>
               </a:rPr>
-              <a:t>No se inventan reglas de negocio — sólo contenido de layout, para que la pantalla no se vea vacía.</a:t>
+              <a:t>Buscador y categoría se combinan entre sí.</a:t>
             </a:r>
             <a:pPr indent="0" marL="0">
               <a:lnSpc>
@@ -10127,59 +10779,7 @@
                 <a:ea typeface="Gilroy" pitchFamily="34" charset="-122"/>
                 <a:cs typeface="Gilroy" pitchFamily="34" charset="-120"/>
               </a:rPr>
-              <a:t>Por eso estas 2 categorías están ocultas por defecto hasta que exista contenido real — sólo se muestran activando un switch puntual.</a:t>
-            </a:r>
-            <a:pPr indent="0" marL="0">
-              <a:lnSpc>
-                <a:spcPct val="125000"/>
-              </a:lnSpc>
-              <a:buNone/>
-            </a:pPr>
-            <a:r>
-              <a:rPr lang="en-US" sz="1250" dirty="0">
-                <a:solidFill>
-                  <a:srgbClr val="49454F"/>
-                </a:solidFill>
-                <a:latin typeface="Gilroy" pitchFamily="34" charset="0"/>
-                <a:ea typeface="Gilroy" pitchFamily="34" charset="-122"/>
-                <a:cs typeface="Gilroy" pitchFamily="34" charset="-120"/>
-              </a:rPr>
-              <a:t>
-</a:t>
-            </a:r>
-            <a:pPr indent="0" marL="0">
-              <a:lnSpc>
-                <a:spcPct val="125000"/>
-              </a:lnSpc>
-              <a:buNone/>
-            </a:pPr>
-            <a:r>
-              <a:rPr lang="en-US" sz="1250" b="1" dirty="0">
-                <a:solidFill>
-                  <a:srgbClr val="152663"/>
-                </a:solidFill>
-                <a:latin typeface="Gilroy" pitchFamily="34" charset="0"/>
-                <a:ea typeface="Gilroy" pitchFamily="34" charset="-122"/>
-                <a:cs typeface="Gilroy" pitchFamily="34" charset="-120"/>
-              </a:rPr>
-              <a:t>•  </a:t>
-            </a:r>
-            <a:pPr indent="0" marL="0">
-              <a:lnSpc>
-                <a:spcPct val="125000"/>
-              </a:lnSpc>
-              <a:buNone/>
-            </a:pPr>
-            <a:r>
-              <a:rPr lang="en-US" sz="1250" dirty="0">
-                <a:solidFill>
-                  <a:srgbClr val="49454F"/>
-                </a:solidFill>
-                <a:latin typeface="Gilroy" pitchFamily="34" charset="0"/>
-                <a:ea typeface="Gilroy" pitchFamily="34" charset="-122"/>
-                <a:cs typeface="Gilroy" pitchFamily="34" charset="-120"/>
-              </a:rPr>
-              <a:t>Franquicias y Fulfillment, en cambio, sí tienen contenido confirmado por el negocio.</a:t>
+              <a:t>Si la categoría elegida deja de estar disponible para el tipo de usuario, el filtro vuelve solo a "Todos".</a:t>
             </a:r>
             <a:endParaRPr lang="en-US" sz="1250" dirty="0"/>
           </a:p>
@@ -10193,8 +10793,8 @@
         </p:nvSpPr>
         <p:spPr>
           <a:xfrm>
-            <a:off x="548640" y="5989320"/>
-            <a:ext cx="1271016" cy="310896"/>
+            <a:off x="7482535" y="5989320"/>
+            <a:ext cx="1568196" cy="310896"/>
           </a:xfrm>
           <a:prstGeom prst="roundRect">
             <a:avLst>
@@ -10215,17 +10815,17 @@
         </p:nvSpPr>
         <p:spPr>
           <a:xfrm>
-            <a:off x="548640" y="5989320"/>
-            <a:ext cx="1271016" cy="310896"/>
-          </a:xfrm>
-          <a:prstGeom prst="rect">
-            <a:avLst/>
-          </a:prstGeom>
-          <a:noFill/>
-          <a:ln/>
-        </p:spPr>
-        <p:txBody>
-          <a:bodyPr wrap="square" rtlCol="0" anchor="ctr"/>
+            <a:off x="7528255" y="5989320"/>
+            <a:ext cx="1476756" cy="310896"/>
+          </a:xfrm>
+          <a:prstGeom prst="rect">
+            <a:avLst/>
+          </a:prstGeom>
+          <a:noFill/>
+          <a:ln/>
+        </p:spPr>
+        <p:txBody>
+          <a:bodyPr wrap="none" rtlCol="0" anchor="ctr"/>
           <a:lstStyle/>
           <a:p>
             <a:pPr algn="ctr" indent="0" marL="0">
@@ -10254,7 +10854,7 @@
         </p:nvSpPr>
         <p:spPr>
           <a:xfrm>
-            <a:off x="5001768" y="1344168"/>
+            <a:off x="521208" y="1344168"/>
             <a:ext cx="6668719" cy="4188524"/>
           </a:xfrm>
           <a:prstGeom prst="roundRect">
@@ -10277,7 +10877,7 @@
       </p:sp>
       <p:pic>
         <p:nvPicPr>
-          <p:cNvPr id="14" name="Image 1" descr="C:\MLOF 01\VORTEX\CORREO ARGENTINO\Reclamos\Reclamos claude\hub\presentaciones\screenshots\03-individuo-paqueteria_internacional.png">    </p:cNvPr>
+          <p:cNvPr id="14" name="Image 1" descr="C:\MLOF 01\VORTEX\CORREO ARGENTINO\Reclamos\Reclamos claude\hub\presentaciones\screenshots\02-individuo-mi_cuenta.png">    </p:cNvPr>
           <p:cNvPicPr>
             <a:picLocks noChangeAspect="1"/>
           </p:cNvPicPr>
@@ -10290,7 +10890,7 @@
         </p:blipFill>
         <p:spPr>
           <a:xfrm>
-            <a:off x="5029200" y="1371600"/>
+            <a:off x="548640" y="1371600"/>
             <a:ext cx="6613855" cy="4133660"/>
           </a:xfrm>
           <a:prstGeom prst="rect">
@@ -10309,6 +10909,648 @@
 <file path=ppt/slides/slide8.xml><?xml version="1.0" encoding="utf-8"?>
 <p:sld xmlns:a="http://schemas.openxmlformats.org/drawingml/2006/main" xmlns:r="http://schemas.openxmlformats.org/officeDocument/2006/relationships" xmlns:p="http://schemas.openxmlformats.org/presentationml/2006/main">
   <p:cSld name="Slide 8">
+    <p:bg>
+      <p:bgPr>
+        <a:solidFill>
+          <a:srgbClr val="FFFFFF"/>
+        </a:solidFill>
+      </p:bgPr>
+    </p:bg>
+    <p:spTree>
+      <p:nvGrpSpPr>
+        <p:cNvPr id="1" name=""/>
+        <p:cNvGrpSpPr/>
+        <p:nvPr/>
+      </p:nvGrpSpPr>
+      <p:grpSpPr>
+        <a:xfrm>
+          <a:off x="0" y="0"/>
+          <a:ext cx="0" cy="0"/>
+          <a:chOff x="0" y="0"/>
+          <a:chExt cx="0" cy="0"/>
+        </a:xfrm>
+      </p:grpSpPr>
+      <p:sp>
+        <p:nvSpPr>
+          <p:cNvPr id="2" name="Shape 0"/>
+          <p:cNvSpPr/>
+          <p:nvPr/>
+        </p:nvSpPr>
+        <p:spPr>
+          <a:xfrm>
+            <a:off x="0" y="0"/>
+            <a:ext cx="12191695" cy="54864"/>
+          </a:xfrm>
+          <a:prstGeom prst="rect">
+            <a:avLst/>
+          </a:prstGeom>
+          <a:solidFill>
+            <a:srgbClr val="152663"/>
+          </a:solidFill>
+          <a:ln/>
+        </p:spPr>
+      </p:sp>
+      <p:sp>
+        <p:nvSpPr>
+          <p:cNvPr id="3" name="Shape 1"/>
+          <p:cNvSpPr/>
+          <p:nvPr/>
+        </p:nvSpPr>
+        <p:spPr>
+          <a:xfrm>
+            <a:off x="0" y="54864"/>
+            <a:ext cx="12191695" cy="566928"/>
+          </a:xfrm>
+          <a:prstGeom prst="rect">
+            <a:avLst/>
+          </a:prstGeom>
+          <a:solidFill>
+            <a:srgbClr val="FFCE00"/>
+          </a:solidFill>
+          <a:ln/>
+        </p:spPr>
+      </p:sp>
+      <p:pic>
+        <p:nvPicPr>
+          <p:cNvPr id="4" name="Image 0" descr="C:\MLOF 01\VORTEX\CORREO ARGENTINO\Reclamos\Reclamos claude\hub\assets\CorreoArgentino-MiCorreo.png">    </p:cNvPr>
+          <p:cNvPicPr>
+            <a:picLocks noChangeAspect="1"/>
+          </p:cNvPicPr>
+          <p:nvPr/>
+        </p:nvPicPr>
+        <p:blipFill>
+          <a:blip r:embed="rId1"/>
+          <a:stretch>
+            <a:fillRect/>
+          </a:stretch>
+        </p:blipFill>
+        <p:spPr>
+          <a:xfrm>
+            <a:off x="457200" y="219456"/>
+            <a:ext cx="1672699" cy="237744"/>
+          </a:xfrm>
+          <a:prstGeom prst="rect">
+            <a:avLst/>
+          </a:prstGeom>
+        </p:spPr>
+      </p:pic>
+      <p:sp>
+        <p:nvSpPr>
+          <p:cNvPr id="5" name="Text 2"/>
+          <p:cNvSpPr/>
+          <p:nvPr/>
+        </p:nvSpPr>
+        <p:spPr>
+          <a:xfrm>
+            <a:off x="2312779" y="54864"/>
+            <a:ext cx="5486400" cy="566928"/>
+          </a:xfrm>
+          <a:prstGeom prst="rect">
+            <a:avLst/>
+          </a:prstGeom>
+          <a:noFill/>
+          <a:ln/>
+        </p:spPr>
+        <p:txBody>
+          <a:bodyPr wrap="square" rtlCol="0" anchor="ctr"/>
+          <a:lstStyle/>
+          <a:p>
+            <a:pPr indent="0" marL="0">
+              <a:buNone/>
+            </a:pPr>
+            <a:r>
+              <a:rPr lang="en-US" sz="1500" b="1" dirty="0">
+                <a:solidFill>
+                  <a:srgbClr val="152663"/>
+                </a:solidFill>
+                <a:latin typeface="Gilroy" pitchFamily="34" charset="0"/>
+                <a:ea typeface="Gilroy" pitchFamily="34" charset="-122"/>
+                <a:cs typeface="Gilroy" pitchFamily="34" charset="-120"/>
+              </a:rPr>
+              <a:t>Transparencia</a:t>
+            </a:r>
+            <a:endParaRPr lang="en-US" sz="1500" dirty="0"/>
+          </a:p>
+        </p:txBody>
+      </p:sp>
+      <p:sp>
+        <p:nvSpPr>
+          <p:cNvPr id="6" name="Shape 3"/>
+          <p:cNvSpPr/>
+          <p:nvPr/>
+        </p:nvSpPr>
+        <p:spPr>
+          <a:xfrm>
+            <a:off x="548640" y="1234440"/>
+            <a:ext cx="2889504" cy="329184"/>
+          </a:xfrm>
+          <a:prstGeom prst="roundRect">
+            <a:avLst>
+              <a:gd name="adj" fmla="val 50000"/>
+            </a:avLst>
+          </a:prstGeom>
+          <a:solidFill>
+            <a:srgbClr val="F2F2F2"/>
+          </a:solidFill>
+          <a:ln/>
+        </p:spPr>
+      </p:sp>
+      <p:sp>
+        <p:nvSpPr>
+          <p:cNvPr id="7" name="Text 4"/>
+          <p:cNvSpPr/>
+          <p:nvPr/>
+        </p:nvSpPr>
+        <p:spPr>
+          <a:xfrm>
+            <a:off x="594360" y="1234440"/>
+            <a:ext cx="2798064" cy="329184"/>
+          </a:xfrm>
+          <a:prstGeom prst="rect">
+            <a:avLst/>
+          </a:prstGeom>
+          <a:noFill/>
+          <a:ln/>
+        </p:spPr>
+        <p:txBody>
+          <a:bodyPr wrap="none" rtlCol="0" anchor="ctr"/>
+          <a:lstStyle/>
+          <a:p>
+            <a:pPr algn="ctr" indent="0" marL="0">
+              <a:buNone/>
+            </a:pPr>
+            <a:r>
+              <a:rPr lang="en-US" sz="1050" b="1" spc="100" kern="0" dirty="0">
+                <a:solidFill>
+                  <a:srgbClr val="152663"/>
+                </a:solidFill>
+                <a:latin typeface="Gilroy" pitchFamily="34" charset="0"/>
+                <a:ea typeface="Gilroy" pitchFamily="34" charset="-122"/>
+                <a:cs typeface="Gilroy" pitchFamily="34" charset="-120"/>
+              </a:rPr>
+              <a:t>QUÉ ES REAL Y QUÉ NO</a:t>
+            </a:r>
+            <a:endParaRPr lang="en-US" sz="1050" dirty="0"/>
+          </a:p>
+        </p:txBody>
+      </p:sp>
+      <p:sp>
+        <p:nvSpPr>
+          <p:cNvPr id="8" name="Text 5"/>
+          <p:cNvSpPr/>
+          <p:nvPr/>
+        </p:nvSpPr>
+        <p:spPr>
+          <a:xfrm>
+            <a:off x="548640" y="1691640"/>
+            <a:ext cx="4160520" cy="914400"/>
+          </a:xfrm>
+          <a:prstGeom prst="rect">
+            <a:avLst/>
+          </a:prstGeom>
+          <a:noFill/>
+          <a:ln/>
+        </p:spPr>
+        <p:txBody>
+          <a:bodyPr wrap="square" rtlCol="0" anchor="ctr"/>
+          <a:lstStyle/>
+          <a:p>
+            <a:pPr indent="0" marL="0">
+              <a:lnSpc>
+                <a:spcPct val="110000"/>
+              </a:lnSpc>
+              <a:buNone/>
+            </a:pPr>
+            <a:r>
+              <a:rPr lang="en-US" sz="1900" b="1" dirty="0">
+                <a:solidFill>
+                  <a:srgbClr val="191919"/>
+                </a:solidFill>
+                <a:latin typeface="Gilroy" pitchFamily="34" charset="0"/>
+                <a:ea typeface="Gilroy" pitchFamily="34" charset="-122"/>
+                <a:cs typeface="Gilroy" pitchFamily="34" charset="-120"/>
+              </a:rPr>
+              <a:t>El contenido inventado se marca en el propio texto</a:t>
+            </a:r>
+            <a:endParaRPr lang="en-US" sz="1900" dirty="0"/>
+          </a:p>
+        </p:txBody>
+      </p:sp>
+      <p:sp>
+        <p:nvSpPr>
+          <p:cNvPr id="9" name="Text 6"/>
+          <p:cNvSpPr/>
+          <p:nvPr/>
+        </p:nvSpPr>
+        <p:spPr>
+          <a:xfrm>
+            <a:off x="548640" y="2606040"/>
+            <a:ext cx="4160520" cy="822960"/>
+          </a:xfrm>
+          <a:prstGeom prst="rect">
+            <a:avLst/>
+          </a:prstGeom>
+          <a:noFill/>
+          <a:ln/>
+        </p:spPr>
+        <p:txBody>
+          <a:bodyPr wrap="square" rtlCol="0" anchor="ctr"/>
+          <a:lstStyle/>
+          <a:p>
+            <a:pPr indent="0" marL="0">
+              <a:lnSpc>
+                <a:spcPct val="130000"/>
+              </a:lnSpc>
+              <a:buNone/>
+            </a:pPr>
+            <a:r>
+              <a:rPr lang="en-US" sz="1150" dirty="0">
+                <a:solidFill>
+                  <a:srgbClr val="49454F"/>
+                </a:solidFill>
+                <a:latin typeface="Gilroy" pitchFamily="34" charset="0"/>
+                <a:ea typeface="Gilroy" pitchFamily="34" charset="-122"/>
+                <a:cs typeface="Gilroy" pitchFamily="34" charset="-120"/>
+              </a:rPr>
+              <a:t>2 de las 7 categorías todavía no tienen datos reales del negocio.</a:t>
+            </a:r>
+            <a:endParaRPr lang="en-US" sz="1150" dirty="0"/>
+          </a:p>
+        </p:txBody>
+      </p:sp>
+      <p:sp>
+        <p:nvSpPr>
+          <p:cNvPr id="10" name="Text 7"/>
+          <p:cNvSpPr/>
+          <p:nvPr/>
+        </p:nvSpPr>
+        <p:spPr>
+          <a:xfrm>
+            <a:off x="548640" y="3383280"/>
+            <a:ext cx="4160520" cy="2377440"/>
+          </a:xfrm>
+          <a:prstGeom prst="rect">
+            <a:avLst/>
+          </a:prstGeom>
+          <a:noFill/>
+          <a:ln/>
+        </p:spPr>
+        <p:txBody>
+          <a:bodyPr wrap="square" rtlCol="0" anchor="t"/>
+          <a:lstStyle/>
+          <a:p>
+            <a:pPr indent="0" marL="0">
+              <a:lnSpc>
+                <a:spcPct val="125000"/>
+              </a:lnSpc>
+              <a:buNone/>
+            </a:pPr>
+            <a:r>
+              <a:rPr lang="en-US" sz="1250" b="1" dirty="0">
+                <a:solidFill>
+                  <a:srgbClr val="152663"/>
+                </a:solidFill>
+                <a:latin typeface="Gilroy" pitchFamily="34" charset="0"/>
+                <a:ea typeface="Gilroy" pitchFamily="34" charset="-122"/>
+                <a:cs typeface="Gilroy" pitchFamily="34" charset="-120"/>
+              </a:rPr>
+              <a:t>•  </a:t>
+            </a:r>
+            <a:pPr indent="0" marL="0">
+              <a:lnSpc>
+                <a:spcPct val="125000"/>
+              </a:lnSpc>
+              <a:buNone/>
+            </a:pPr>
+            <a:r>
+              <a:rPr lang="en-US" sz="1250" dirty="0">
+                <a:solidFill>
+                  <a:srgbClr val="49454F"/>
+                </a:solidFill>
+                <a:latin typeface="Gilroy" pitchFamily="34" charset="0"/>
+                <a:ea typeface="Gilroy" pitchFamily="34" charset="-122"/>
+                <a:cs typeface="Gilroy" pitchFamily="34" charset="-120"/>
+              </a:rPr>
+              <a:t>Cada gestión de relleno termina literalmente en </a:t>
+            </a:r>
+            <a:pPr indent="0" marL="0">
+              <a:lnSpc>
+                <a:spcPct val="125000"/>
+              </a:lnSpc>
+              <a:buNone/>
+            </a:pPr>
+            <a:r>
+              <a:rPr lang="en-US" sz="1250" b="1" dirty="0">
+                <a:solidFill>
+                  <a:srgbClr val="49454F"/>
+                </a:solidFill>
+                <a:latin typeface="Gilroy" pitchFamily="34" charset="0"/>
+                <a:ea typeface="Gilroy" pitchFamily="34" charset="-122"/>
+                <a:cs typeface="Gilroy" pitchFamily="34" charset="-120"/>
+              </a:rPr>
+              <a:t>"(Gestión inventada)"</a:t>
+            </a:r>
+            <a:pPr indent="0" marL="0">
+              <a:lnSpc>
+                <a:spcPct val="125000"/>
+              </a:lnSpc>
+              <a:buNone/>
+            </a:pPr>
+            <a:r>
+              <a:rPr lang="en-US" sz="1250" dirty="0">
+                <a:solidFill>
+                  <a:srgbClr val="49454F"/>
+                </a:solidFill>
+                <a:latin typeface="Gilroy" pitchFamily="34" charset="0"/>
+                <a:ea typeface="Gilroy" pitchFamily="34" charset="-122"/>
+                <a:cs typeface="Gilroy" pitchFamily="34" charset="-120"/>
+              </a:rPr>
+              <a:t>.</a:t>
+            </a:r>
+            <a:pPr indent="0" marL="0">
+              <a:lnSpc>
+                <a:spcPct val="125000"/>
+              </a:lnSpc>
+              <a:buNone/>
+            </a:pPr>
+            <a:r>
+              <a:rPr lang="en-US" sz="1250" dirty="0">
+                <a:solidFill>
+                  <a:srgbClr val="49454F"/>
+                </a:solidFill>
+                <a:latin typeface="Gilroy" pitchFamily="34" charset="0"/>
+                <a:ea typeface="Gilroy" pitchFamily="34" charset="-122"/>
+                <a:cs typeface="Gilroy" pitchFamily="34" charset="-120"/>
+              </a:rPr>
+              <a:t>
+</a:t>
+            </a:r>
+            <a:pPr indent="0" marL="0">
+              <a:lnSpc>
+                <a:spcPct val="125000"/>
+              </a:lnSpc>
+              <a:buNone/>
+            </a:pPr>
+            <a:r>
+              <a:rPr lang="en-US" sz="1250" b="1" dirty="0">
+                <a:solidFill>
+                  <a:srgbClr val="152663"/>
+                </a:solidFill>
+                <a:latin typeface="Gilroy" pitchFamily="34" charset="0"/>
+                <a:ea typeface="Gilroy" pitchFamily="34" charset="-122"/>
+                <a:cs typeface="Gilroy" pitchFamily="34" charset="-120"/>
+              </a:rPr>
+              <a:t>•  </a:t>
+            </a:r>
+            <a:pPr indent="0" marL="0">
+              <a:lnSpc>
+                <a:spcPct val="125000"/>
+              </a:lnSpc>
+              <a:buNone/>
+            </a:pPr>
+            <a:r>
+              <a:rPr lang="en-US" sz="1250" dirty="0">
+                <a:solidFill>
+                  <a:srgbClr val="49454F"/>
+                </a:solidFill>
+                <a:latin typeface="Gilroy" pitchFamily="34" charset="0"/>
+                <a:ea typeface="Gilroy" pitchFamily="34" charset="-122"/>
+                <a:cs typeface="Gilroy" pitchFamily="34" charset="-120"/>
+              </a:rPr>
+              <a:t>No se inventan reglas de negocio — sólo contenido de layout, para que la pantalla no se vea vacía.</a:t>
+            </a:r>
+            <a:pPr indent="0" marL="0">
+              <a:lnSpc>
+                <a:spcPct val="125000"/>
+              </a:lnSpc>
+              <a:buNone/>
+            </a:pPr>
+            <a:r>
+              <a:rPr lang="en-US" sz="1250" dirty="0">
+                <a:solidFill>
+                  <a:srgbClr val="49454F"/>
+                </a:solidFill>
+                <a:latin typeface="Gilroy" pitchFamily="34" charset="0"/>
+                <a:ea typeface="Gilroy" pitchFamily="34" charset="-122"/>
+                <a:cs typeface="Gilroy" pitchFamily="34" charset="-120"/>
+              </a:rPr>
+              <a:t>
+</a:t>
+            </a:r>
+            <a:pPr indent="0" marL="0">
+              <a:lnSpc>
+                <a:spcPct val="125000"/>
+              </a:lnSpc>
+              <a:buNone/>
+            </a:pPr>
+            <a:r>
+              <a:rPr lang="en-US" sz="1250" b="1" dirty="0">
+                <a:solidFill>
+                  <a:srgbClr val="152663"/>
+                </a:solidFill>
+                <a:latin typeface="Gilroy" pitchFamily="34" charset="0"/>
+                <a:ea typeface="Gilroy" pitchFamily="34" charset="-122"/>
+                <a:cs typeface="Gilroy" pitchFamily="34" charset="-120"/>
+              </a:rPr>
+              <a:t>•  </a:t>
+            </a:r>
+            <a:pPr indent="0" marL="0">
+              <a:lnSpc>
+                <a:spcPct val="125000"/>
+              </a:lnSpc>
+              <a:buNone/>
+            </a:pPr>
+            <a:r>
+              <a:rPr lang="en-US" sz="1250" dirty="0">
+                <a:solidFill>
+                  <a:srgbClr val="49454F"/>
+                </a:solidFill>
+                <a:latin typeface="Gilroy" pitchFamily="34" charset="0"/>
+                <a:ea typeface="Gilroy" pitchFamily="34" charset="-122"/>
+                <a:cs typeface="Gilroy" pitchFamily="34" charset="-120"/>
+              </a:rPr>
+              <a:t>Por eso estas 2 categorías están ocultas por defecto hasta que exista contenido real — sólo se muestran activando un switch puntual.</a:t>
+            </a:r>
+            <a:pPr indent="0" marL="0">
+              <a:lnSpc>
+                <a:spcPct val="125000"/>
+              </a:lnSpc>
+              <a:buNone/>
+            </a:pPr>
+            <a:r>
+              <a:rPr lang="en-US" sz="1250" dirty="0">
+                <a:solidFill>
+                  <a:srgbClr val="49454F"/>
+                </a:solidFill>
+                <a:latin typeface="Gilroy" pitchFamily="34" charset="0"/>
+                <a:ea typeface="Gilroy" pitchFamily="34" charset="-122"/>
+                <a:cs typeface="Gilroy" pitchFamily="34" charset="-120"/>
+              </a:rPr>
+              <a:t>
+</a:t>
+            </a:r>
+            <a:pPr indent="0" marL="0">
+              <a:lnSpc>
+                <a:spcPct val="125000"/>
+              </a:lnSpc>
+              <a:buNone/>
+            </a:pPr>
+            <a:r>
+              <a:rPr lang="en-US" sz="1250" b="1" dirty="0">
+                <a:solidFill>
+                  <a:srgbClr val="152663"/>
+                </a:solidFill>
+                <a:latin typeface="Gilroy" pitchFamily="34" charset="0"/>
+                <a:ea typeface="Gilroy" pitchFamily="34" charset="-122"/>
+                <a:cs typeface="Gilroy" pitchFamily="34" charset="-120"/>
+              </a:rPr>
+              <a:t>•  </a:t>
+            </a:r>
+            <a:pPr indent="0" marL="0">
+              <a:lnSpc>
+                <a:spcPct val="125000"/>
+              </a:lnSpc>
+              <a:buNone/>
+            </a:pPr>
+            <a:r>
+              <a:rPr lang="en-US" sz="1250" dirty="0">
+                <a:solidFill>
+                  <a:srgbClr val="49454F"/>
+                </a:solidFill>
+                <a:latin typeface="Gilroy" pitchFamily="34" charset="0"/>
+                <a:ea typeface="Gilroy" pitchFamily="34" charset="-122"/>
+                <a:cs typeface="Gilroy" pitchFamily="34" charset="-120"/>
+              </a:rPr>
+              <a:t>Franquicias y Fulfillment, en cambio, sí tienen contenido confirmado por el negocio.</a:t>
+            </a:r>
+            <a:endParaRPr lang="en-US" sz="1250" dirty="0"/>
+          </a:p>
+        </p:txBody>
+      </p:sp>
+      <p:sp>
+        <p:nvSpPr>
+          <p:cNvPr id="11" name="Shape 8"/>
+          <p:cNvSpPr/>
+          <p:nvPr/>
+        </p:nvSpPr>
+        <p:spPr>
+          <a:xfrm>
+            <a:off x="548640" y="5989320"/>
+            <a:ext cx="1568196" cy="310896"/>
+          </a:xfrm>
+          <a:prstGeom prst="roundRect">
+            <a:avLst>
+              <a:gd name="adj" fmla="val 50000"/>
+            </a:avLst>
+          </a:prstGeom>
+          <a:solidFill>
+            <a:srgbClr val="E7EDFB"/>
+          </a:solidFill>
+          <a:ln/>
+        </p:spPr>
+      </p:sp>
+      <p:sp>
+        <p:nvSpPr>
+          <p:cNvPr id="12" name="Text 9"/>
+          <p:cNvSpPr/>
+          <p:nvPr/>
+        </p:nvSpPr>
+        <p:spPr>
+          <a:xfrm>
+            <a:off x="594360" y="5989320"/>
+            <a:ext cx="1476756" cy="310896"/>
+          </a:xfrm>
+          <a:prstGeom prst="rect">
+            <a:avLst/>
+          </a:prstGeom>
+          <a:noFill/>
+          <a:ln/>
+        </p:spPr>
+        <p:txBody>
+          <a:bodyPr wrap="none" rtlCol="0" anchor="ctr"/>
+          <a:lstStyle/>
+          <a:p>
+            <a:pPr algn="ctr" indent="0" marL="0">
+              <a:buNone/>
+            </a:pPr>
+            <a:r>
+              <a:rPr lang="en-US" sz="1150" b="1" dirty="0">
+                <a:solidFill>
+                  <a:srgbClr val="2563D9"/>
+                </a:solidFill>
+                <a:latin typeface="Gilroy" pitchFamily="34" charset="0"/>
+                <a:ea typeface="Gilroy" pitchFamily="34" charset="-122"/>
+                <a:cs typeface="Gilroy" pitchFamily="34" charset="-120"/>
+              </a:rPr>
+              <a:t>Individuo</a:t>
+            </a:r>
+            <a:endParaRPr lang="en-US" sz="1150" dirty="0"/>
+          </a:p>
+        </p:txBody>
+      </p:sp>
+      <p:sp>
+        <p:nvSpPr>
+          <p:cNvPr id="13" name="Shape 10"/>
+          <p:cNvSpPr/>
+          <p:nvPr/>
+        </p:nvSpPr>
+        <p:spPr>
+          <a:xfrm>
+            <a:off x="5001768" y="1344168"/>
+            <a:ext cx="6668719" cy="4188524"/>
+          </a:xfrm>
+          <a:prstGeom prst="roundRect">
+            <a:avLst>
+              <a:gd name="adj" fmla="val 1746"/>
+            </a:avLst>
+          </a:prstGeom>
+          <a:solidFill>
+            <a:srgbClr val="191919"/>
+          </a:solidFill>
+          <a:ln/>
+          <a:effectLst>
+            <a:outerShdw sx="100000" sy="100000" kx="0" ky="0" algn="bl" rotWithShape="0" blurRad="152400" dist="50800" dir="5400000">
+              <a:srgbClr val="152663">
+                <a:alpha val="35000"/>
+              </a:srgbClr>
+            </a:outerShdw>
+          </a:effectLst>
+        </p:spPr>
+      </p:sp>
+      <p:pic>
+        <p:nvPicPr>
+          <p:cNvPr id="14" name="Image 1" descr="C:\MLOF 01\VORTEX\CORREO ARGENTINO\Reclamos\Reclamos claude\hub\presentaciones\screenshots\03-individuo-paqueteria_internacional.png">    </p:cNvPr>
+          <p:cNvPicPr>
+            <a:picLocks noChangeAspect="1"/>
+          </p:cNvPicPr>
+          <p:nvPr/>
+        </p:nvPicPr>
+        <p:blipFill>
+          <a:blip r:embed="rId2"/>
+          <a:srcRect l="0" r="0" t="0" b="0"/>
+          <a:stretch/>
+        </p:blipFill>
+        <p:spPr>
+          <a:xfrm>
+            <a:off x="5029200" y="1371600"/>
+            <a:ext cx="6613855" cy="4133660"/>
+          </a:xfrm>
+          <a:prstGeom prst="rect">
+            <a:avLst/>
+          </a:prstGeom>
+        </p:spPr>
+      </p:pic>
+    </p:spTree>
+  </p:cSld>
+  <p:clrMapOvr>
+    <a:masterClrMapping/>
+  </p:clrMapOvr>
+</p:sld>
+</file>
+
+<file path=ppt/slides/slide9.xml><?xml version="1.0" encoding="utf-8"?>
+<p:sld xmlns:a="http://schemas.openxmlformats.org/drawingml/2006/main" xmlns:r="http://schemas.openxmlformats.org/officeDocument/2006/relationships" xmlns:p="http://schemas.openxmlformats.org/presentationml/2006/main">
+  <p:cSld name="Slide 9">
     <p:bg>
       <p:bgPr>
         <a:solidFill>
@@ -10473,630 +11715,6 @@
           </a:p>
         </p:txBody>
       </p:sp>
-    </p:spTree>
-  </p:cSld>
-  <p:clrMapOvr>
-    <a:masterClrMapping/>
-  </p:clrMapOvr>
-</p:sld>
-</file>
-
-<file path=ppt/slides/slide9.xml><?xml version="1.0" encoding="utf-8"?>
-<p:sld xmlns:a="http://schemas.openxmlformats.org/drawingml/2006/main" xmlns:r="http://schemas.openxmlformats.org/officeDocument/2006/relationships" xmlns:p="http://schemas.openxmlformats.org/presentationml/2006/main">
-  <p:cSld name="Slide 9">
-    <p:bg>
-      <p:bgPr>
-        <a:solidFill>
-          <a:srgbClr val="FFFFFF"/>
-        </a:solidFill>
-      </p:bgPr>
-    </p:bg>
-    <p:spTree>
-      <p:nvGrpSpPr>
-        <p:cNvPr id="1" name=""/>
-        <p:cNvGrpSpPr/>
-        <p:nvPr/>
-      </p:nvGrpSpPr>
-      <p:grpSpPr>
-        <a:xfrm>
-          <a:off x="0" y="0"/>
-          <a:ext cx="0" cy="0"/>
-          <a:chOff x="0" y="0"/>
-          <a:chExt cx="0" cy="0"/>
-        </a:xfrm>
-      </p:grpSpPr>
-      <p:sp>
-        <p:nvSpPr>
-          <p:cNvPr id="2" name="Shape 0"/>
-          <p:cNvSpPr/>
-          <p:nvPr/>
-        </p:nvSpPr>
-        <p:spPr>
-          <a:xfrm>
-            <a:off x="0" y="0"/>
-            <a:ext cx="12191695" cy="54864"/>
-          </a:xfrm>
-          <a:prstGeom prst="rect">
-            <a:avLst/>
-          </a:prstGeom>
-          <a:solidFill>
-            <a:srgbClr val="152663"/>
-          </a:solidFill>
-          <a:ln/>
-        </p:spPr>
-      </p:sp>
-      <p:sp>
-        <p:nvSpPr>
-          <p:cNvPr id="3" name="Shape 1"/>
-          <p:cNvSpPr/>
-          <p:nvPr/>
-        </p:nvSpPr>
-        <p:spPr>
-          <a:xfrm>
-            <a:off x="0" y="54864"/>
-            <a:ext cx="12191695" cy="566928"/>
-          </a:xfrm>
-          <a:prstGeom prst="rect">
-            <a:avLst/>
-          </a:prstGeom>
-          <a:solidFill>
-            <a:srgbClr val="FFCE00"/>
-          </a:solidFill>
-          <a:ln/>
-        </p:spPr>
-      </p:sp>
-      <p:pic>
-        <p:nvPicPr>
-          <p:cNvPr id="4" name="Image 0" descr="C:\MLOF 01\VORTEX\CORREO ARGENTINO\Reclamos\Reclamos claude\hub\assets\CorreoArgentino-MiCorreo.png">    </p:cNvPr>
-          <p:cNvPicPr>
-            <a:picLocks noChangeAspect="1"/>
-          </p:cNvPicPr>
-          <p:nvPr/>
-        </p:nvPicPr>
-        <p:blipFill>
-          <a:blip r:embed="rId1"/>
-          <a:stretch>
-            <a:fillRect/>
-          </a:stretch>
-        </p:blipFill>
-        <p:spPr>
-          <a:xfrm>
-            <a:off x="457200" y="219456"/>
-            <a:ext cx="1672699" cy="237744"/>
-          </a:xfrm>
-          <a:prstGeom prst="rect">
-            <a:avLst/>
-          </a:prstGeom>
-        </p:spPr>
-      </p:pic>
-      <p:sp>
-        <p:nvSpPr>
-          <p:cNvPr id="5" name="Text 2"/>
-          <p:cNvSpPr/>
-          <p:nvPr/>
-        </p:nvSpPr>
-        <p:spPr>
-          <a:xfrm>
-            <a:off x="2312779" y="54864"/>
-            <a:ext cx="5486400" cy="566928"/>
-          </a:xfrm>
-          <a:prstGeom prst="rect">
-            <a:avLst/>
-          </a:prstGeom>
-          <a:noFill/>
-          <a:ln/>
-        </p:spPr>
-        <p:txBody>
-          <a:bodyPr wrap="square" rtlCol="0" anchor="ctr"/>
-          <a:lstStyle/>
-          <a:p>
-            <a:pPr indent="0" marL="0">
-              <a:buNone/>
-            </a:pPr>
-            <a:r>
-              <a:rPr lang="en-US" sz="1500" b="1" dirty="0">
-                <a:solidFill>
-                  <a:srgbClr val="152663"/>
-                </a:solidFill>
-                <a:latin typeface="Gilroy" pitchFamily="34" charset="0"/>
-                <a:ea typeface="Gilroy" pitchFamily="34" charset="-122"/>
-                <a:cs typeface="Gilroy" pitchFamily="34" charset="-120"/>
-              </a:rPr>
-              <a:t>Franquicias</a:t>
-            </a:r>
-            <a:endParaRPr lang="en-US" sz="1500" dirty="0"/>
-          </a:p>
-        </p:txBody>
-      </p:sp>
-      <p:sp>
-        <p:nvSpPr>
-          <p:cNvPr id="6" name="Shape 3"/>
-          <p:cNvSpPr/>
-          <p:nvPr/>
-        </p:nvSpPr>
-        <p:spPr>
-          <a:xfrm>
-            <a:off x="548640" y="1234440"/>
-            <a:ext cx="2889504" cy="329184"/>
-          </a:xfrm>
-          <a:prstGeom prst="roundRect">
-            <a:avLst>
-              <a:gd name="adj" fmla="val 50000"/>
-            </a:avLst>
-          </a:prstGeom>
-          <a:solidFill>
-            <a:srgbClr val="F2F2F2"/>
-          </a:solidFill>
-          <a:ln/>
-        </p:spPr>
-      </p:sp>
-      <p:sp>
-        <p:nvSpPr>
-          <p:cNvPr id="7" name="Text 4"/>
-          <p:cNvSpPr/>
-          <p:nvPr/>
-        </p:nvSpPr>
-        <p:spPr>
-          <a:xfrm>
-            <a:off x="594360" y="1234440"/>
-            <a:ext cx="2798064" cy="329184"/>
-          </a:xfrm>
-          <a:prstGeom prst="rect">
-            <a:avLst/>
-          </a:prstGeom>
-          <a:noFill/>
-          <a:ln/>
-        </p:spPr>
-        <p:txBody>
-          <a:bodyPr wrap="none" rtlCol="0" anchor="ctr"/>
-          <a:lstStyle/>
-          <a:p>
-            <a:pPr algn="ctr" indent="0" marL="0">
-              <a:buNone/>
-            </a:pPr>
-            <a:r>
-              <a:rPr lang="en-US" sz="1050" b="1" spc="100" kern="0" dirty="0">
-                <a:solidFill>
-                  <a:srgbClr val="152663"/>
-                </a:solidFill>
-                <a:latin typeface="Gilroy" pitchFamily="34" charset="0"/>
-                <a:ea typeface="Gilroy" pitchFamily="34" charset="-122"/>
-                <a:cs typeface="Gilroy" pitchFamily="34" charset="-120"/>
-              </a:rPr>
-              <a:t>REGLA DE VISIBILIDAD</a:t>
-            </a:r>
-            <a:endParaRPr lang="en-US" sz="1050" dirty="0"/>
-          </a:p>
-        </p:txBody>
-      </p:sp>
-      <p:sp>
-        <p:nvSpPr>
-          <p:cNvPr id="8" name="Text 5"/>
-          <p:cNvSpPr/>
-          <p:nvPr/>
-        </p:nvSpPr>
-        <p:spPr>
-          <a:xfrm>
-            <a:off x="548640" y="1691640"/>
-            <a:ext cx="4160520" cy="914400"/>
-          </a:xfrm>
-          <a:prstGeom prst="rect">
-            <a:avLst/>
-          </a:prstGeom>
-          <a:noFill/>
-          <a:ln/>
-        </p:spPr>
-        <p:txBody>
-          <a:bodyPr wrap="square" rtlCol="0" anchor="ctr"/>
-          <a:lstStyle/>
-          <a:p>
-            <a:pPr indent="0" marL="0">
-              <a:lnSpc>
-                <a:spcPct val="110000"/>
-              </a:lnSpc>
-              <a:buNone/>
-            </a:pPr>
-            <a:r>
-              <a:rPr lang="en-US" sz="1900" b="1" dirty="0">
-                <a:solidFill>
-                  <a:srgbClr val="191919"/>
-                </a:solidFill>
-                <a:latin typeface="Gilroy" pitchFamily="34" charset="0"/>
-                <a:ea typeface="Gilroy" pitchFamily="34" charset="-122"/>
-                <a:cs typeface="Gilroy" pitchFamily="34" charset="-120"/>
-              </a:rPr>
-              <a:t>Franquicias no ve la categoría Fulfillment</a:t>
-            </a:r>
-            <a:endParaRPr lang="en-US" sz="1900" dirty="0"/>
-          </a:p>
-        </p:txBody>
-      </p:sp>
-      <p:sp>
-        <p:nvSpPr>
-          <p:cNvPr id="9" name="Text 6"/>
-          <p:cNvSpPr/>
-          <p:nvPr/>
-        </p:nvSpPr>
-        <p:spPr>
-          <a:xfrm>
-            <a:off x="548640" y="2350008"/>
-            <a:ext cx="4160520" cy="822960"/>
-          </a:xfrm>
-          <a:prstGeom prst="rect">
-            <a:avLst/>
-          </a:prstGeom>
-          <a:noFill/>
-          <a:ln/>
-        </p:spPr>
-        <p:txBody>
-          <a:bodyPr wrap="square" rtlCol="0" anchor="ctr"/>
-          <a:lstStyle/>
-          <a:p>
-            <a:pPr indent="0" marL="0">
-              <a:lnSpc>
-                <a:spcPct val="130000"/>
-              </a:lnSpc>
-              <a:buNone/>
-            </a:pPr>
-            <a:r>
-              <a:rPr lang="en-US" sz="1150" dirty="0">
-                <a:solidFill>
-                  <a:srgbClr val="49454F"/>
-                </a:solidFill>
-                <a:latin typeface="Gilroy" pitchFamily="34" charset="0"/>
-                <a:ea typeface="Gilroy" pitchFamily="34" charset="-122"/>
-                <a:cs typeface="Gilroy" pitchFamily="34" charset="-120"/>
-              </a:rPr>
-              <a:t>Ve todo lo demás que ve Individuo, más su propia categoría.</a:t>
-            </a:r>
-            <a:endParaRPr lang="en-US" sz="1150" dirty="0"/>
-          </a:p>
-        </p:txBody>
-      </p:sp>
-      <p:sp>
-        <p:nvSpPr>
-          <p:cNvPr id="10" name="Text 7"/>
-          <p:cNvSpPr/>
-          <p:nvPr/>
-        </p:nvSpPr>
-        <p:spPr>
-          <a:xfrm>
-            <a:off x="548640" y="3127248"/>
-            <a:ext cx="4160520" cy="2377440"/>
-          </a:xfrm>
-          <a:prstGeom prst="rect">
-            <a:avLst/>
-          </a:prstGeom>
-          <a:noFill/>
-          <a:ln/>
-        </p:spPr>
-        <p:txBody>
-          <a:bodyPr wrap="square" rtlCol="0" anchor="t"/>
-          <a:lstStyle/>
-          <a:p>
-            <a:pPr indent="0" marL="0">
-              <a:lnSpc>
-                <a:spcPct val="125000"/>
-              </a:lnSpc>
-              <a:buNone/>
-            </a:pPr>
-            <a:r>
-              <a:rPr lang="en-US" sz="1250" b="1" dirty="0">
-                <a:solidFill>
-                  <a:srgbClr val="152663"/>
-                </a:solidFill>
-                <a:latin typeface="Gilroy" pitchFamily="34" charset="0"/>
-                <a:ea typeface="Gilroy" pitchFamily="34" charset="-122"/>
-                <a:cs typeface="Gilroy" pitchFamily="34" charset="-120"/>
-              </a:rPr>
-              <a:t>•  </a:t>
-            </a:r>
-            <a:pPr indent="0" marL="0">
-              <a:lnSpc>
-                <a:spcPct val="125000"/>
-              </a:lnSpc>
-              <a:buNone/>
-            </a:pPr>
-            <a:r>
-              <a:rPr lang="en-US" sz="1250" dirty="0">
-                <a:solidFill>
-                  <a:srgbClr val="49454F"/>
-                </a:solidFill>
-                <a:latin typeface="Gilroy" pitchFamily="34" charset="0"/>
-                <a:ea typeface="Gilroy" pitchFamily="34" charset="-122"/>
-                <a:cs typeface="Gilroy" pitchFamily="34" charset="-120"/>
-              </a:rPr>
-              <a:t>4 categorías visibles hoy: Mi Cuenta, Paquetería Nacional, </a:t>
-            </a:r>
-            <a:pPr indent="0" marL="0">
-              <a:lnSpc>
-                <a:spcPct val="125000"/>
-              </a:lnSpc>
-              <a:buNone/>
-            </a:pPr>
-            <a:r>
-              <a:rPr lang="en-US" sz="1250" b="1" dirty="0">
-                <a:solidFill>
-                  <a:srgbClr val="49454F"/>
-                </a:solidFill>
-                <a:latin typeface="Gilroy" pitchFamily="34" charset="0"/>
-                <a:ea typeface="Gilroy" pitchFamily="34" charset="-122"/>
-                <a:cs typeface="Gilroy" pitchFamily="34" charset="-120"/>
-              </a:rPr>
-              <a:t>Franquicias</a:t>
-            </a:r>
-            <a:pPr indent="0" marL="0">
-              <a:lnSpc>
-                <a:spcPct val="125000"/>
-              </a:lnSpc>
-              <a:buNone/>
-            </a:pPr>
-            <a:r>
-              <a:rPr lang="en-US" sz="1250" dirty="0">
-                <a:solidFill>
-                  <a:srgbClr val="49454F"/>
-                </a:solidFill>
-                <a:latin typeface="Gilroy" pitchFamily="34" charset="0"/>
-                <a:ea typeface="Gilroy" pitchFamily="34" charset="-122"/>
-                <a:cs typeface="Gilroy" pitchFamily="34" charset="-120"/>
-              </a:rPr>
-              <a:t>, Oficios Judiciales (Paquetería Internacional y Comunicaciones Digitales siguen ocultas por defecto).</a:t>
-            </a:r>
-            <a:pPr indent="0" marL="0">
-              <a:lnSpc>
-                <a:spcPct val="125000"/>
-              </a:lnSpc>
-              <a:buNone/>
-            </a:pPr>
-            <a:r>
-              <a:rPr lang="en-US" sz="1250" dirty="0">
-                <a:solidFill>
-                  <a:srgbClr val="49454F"/>
-                </a:solidFill>
-                <a:latin typeface="Gilroy" pitchFamily="34" charset="0"/>
-                <a:ea typeface="Gilroy" pitchFamily="34" charset="-122"/>
-                <a:cs typeface="Gilroy" pitchFamily="34" charset="-120"/>
-              </a:rPr>
-              <a:t>
-</a:t>
-            </a:r>
-            <a:pPr indent="0" marL="0">
-              <a:lnSpc>
-                <a:spcPct val="125000"/>
-              </a:lnSpc>
-              <a:buNone/>
-            </a:pPr>
-            <a:r>
-              <a:rPr lang="en-US" sz="1250" b="1" dirty="0">
-                <a:solidFill>
-                  <a:srgbClr val="152663"/>
-                </a:solidFill>
-                <a:latin typeface="Gilroy" pitchFamily="34" charset="0"/>
-                <a:ea typeface="Gilroy" pitchFamily="34" charset="-122"/>
-                <a:cs typeface="Gilroy" pitchFamily="34" charset="-120"/>
-              </a:rPr>
-              <a:t>•  </a:t>
-            </a:r>
-            <a:pPr indent="0" marL="0">
-              <a:lnSpc>
-                <a:spcPct val="125000"/>
-              </a:lnSpc>
-              <a:buNone/>
-            </a:pPr>
-            <a:r>
-              <a:rPr lang="en-US" sz="1250" dirty="0">
-                <a:solidFill>
-                  <a:srgbClr val="49454F"/>
-                </a:solidFill>
-                <a:latin typeface="Gilroy" pitchFamily="34" charset="0"/>
-                <a:ea typeface="Gilroy" pitchFamily="34" charset="-122"/>
-                <a:cs typeface="Gilroy" pitchFamily="34" charset="-120"/>
-              </a:rPr>
-              <a:t>"Todos" para este usuario trae </a:t>
-            </a:r>
-            <a:pPr indent="0" marL="0">
-              <a:lnSpc>
-                <a:spcPct val="125000"/>
-              </a:lnSpc>
-              <a:buNone/>
-            </a:pPr>
-            <a:r>
-              <a:rPr lang="en-US" sz="1250" b="1" dirty="0">
-                <a:solidFill>
-                  <a:srgbClr val="49454F"/>
-                </a:solidFill>
-                <a:latin typeface="Gilroy" pitchFamily="34" charset="0"/>
-                <a:ea typeface="Gilroy" pitchFamily="34" charset="-122"/>
-                <a:cs typeface="Gilroy" pitchFamily="34" charset="-120"/>
-              </a:rPr>
-              <a:t>13 gestiones</a:t>
-            </a:r>
-            <a:pPr indent="0" marL="0">
-              <a:lnSpc>
-                <a:spcPct val="125000"/>
-              </a:lnSpc>
-              <a:buNone/>
-            </a:pPr>
-            <a:r>
-              <a:rPr lang="en-US" sz="1250" dirty="0">
-                <a:solidFill>
-                  <a:srgbClr val="49454F"/>
-                </a:solidFill>
-                <a:latin typeface="Gilroy" pitchFamily="34" charset="0"/>
-                <a:ea typeface="Gilroy" pitchFamily="34" charset="-122"/>
-                <a:cs typeface="Gilroy" pitchFamily="34" charset="-120"/>
-              </a:rPr>
-              <a:t>, no 27.</a:t>
-            </a:r>
-            <a:pPr indent="0" marL="0">
-              <a:lnSpc>
-                <a:spcPct val="125000"/>
-              </a:lnSpc>
-              <a:buNone/>
-            </a:pPr>
-            <a:r>
-              <a:rPr lang="en-US" sz="1250" dirty="0">
-                <a:solidFill>
-                  <a:srgbClr val="49454F"/>
-                </a:solidFill>
-                <a:latin typeface="Gilroy" pitchFamily="34" charset="0"/>
-                <a:ea typeface="Gilroy" pitchFamily="34" charset="-122"/>
-                <a:cs typeface="Gilroy" pitchFamily="34" charset="-120"/>
-              </a:rPr>
-              <a:t>
-</a:t>
-            </a:r>
-            <a:pPr indent="0" marL="0">
-              <a:lnSpc>
-                <a:spcPct val="125000"/>
-              </a:lnSpc>
-              <a:buNone/>
-            </a:pPr>
-            <a:r>
-              <a:rPr lang="en-US" sz="1250" b="1" dirty="0">
-                <a:solidFill>
-                  <a:srgbClr val="152663"/>
-                </a:solidFill>
-                <a:latin typeface="Gilroy" pitchFamily="34" charset="0"/>
-                <a:ea typeface="Gilroy" pitchFamily="34" charset="-122"/>
-                <a:cs typeface="Gilroy" pitchFamily="34" charset="-120"/>
-              </a:rPr>
-              <a:t>•  </a:t>
-            </a:r>
-            <a:pPr indent="0" marL="0">
-              <a:lnSpc>
-                <a:spcPct val="125000"/>
-              </a:lnSpc>
-              <a:buNone/>
-            </a:pPr>
-            <a:r>
-              <a:rPr lang="en-US" sz="1250" dirty="0">
-                <a:solidFill>
-                  <a:srgbClr val="49454F"/>
-                </a:solidFill>
-                <a:latin typeface="Gilroy" pitchFamily="34" charset="0"/>
-                <a:ea typeface="Gilroy" pitchFamily="34" charset="-122"/>
-                <a:cs typeface="Gilroy" pitchFamily="34" charset="-120"/>
-              </a:rPr>
-              <a:t>La categoría "Fulfillment" directamente no existe en esta vista.</a:t>
-            </a:r>
-            <a:endParaRPr lang="en-US" sz="1250" dirty="0"/>
-          </a:p>
-        </p:txBody>
-      </p:sp>
-      <p:sp>
-        <p:nvSpPr>
-          <p:cNvPr id="11" name="Shape 8"/>
-          <p:cNvSpPr/>
-          <p:nvPr/>
-        </p:nvSpPr>
-        <p:spPr>
-          <a:xfrm>
-            <a:off x="548640" y="5989320"/>
-            <a:ext cx="1472184" cy="310896"/>
-          </a:xfrm>
-          <a:prstGeom prst="roundRect">
-            <a:avLst>
-              <a:gd name="adj" fmla="val 50000"/>
-            </a:avLst>
-          </a:prstGeom>
-          <a:solidFill>
-            <a:srgbClr val="F6E8F4"/>
-          </a:solidFill>
-          <a:ln/>
-        </p:spPr>
-      </p:sp>
-      <p:sp>
-        <p:nvSpPr>
-          <p:cNvPr id="12" name="Text 9"/>
-          <p:cNvSpPr/>
-          <p:nvPr/>
-        </p:nvSpPr>
-        <p:spPr>
-          <a:xfrm>
-            <a:off x="548640" y="5989320"/>
-            <a:ext cx="1472184" cy="310896"/>
-          </a:xfrm>
-          <a:prstGeom prst="rect">
-            <a:avLst/>
-          </a:prstGeom>
-          <a:noFill/>
-          <a:ln/>
-        </p:spPr>
-        <p:txBody>
-          <a:bodyPr wrap="square" rtlCol="0" anchor="ctr"/>
-          <a:lstStyle/>
-          <a:p>
-            <a:pPr algn="ctr" indent="0" marL="0">
-              <a:buNone/>
-            </a:pPr>
-            <a:r>
-              <a:rPr lang="en-US" sz="1150" b="1" dirty="0">
-                <a:solidFill>
-                  <a:srgbClr val="A02B93"/>
-                </a:solidFill>
-                <a:latin typeface="Gilroy" pitchFamily="34" charset="0"/>
-                <a:ea typeface="Gilroy" pitchFamily="34" charset="-122"/>
-                <a:cs typeface="Gilroy" pitchFamily="34" charset="-120"/>
-              </a:rPr>
-              <a:t>Franquicias</a:t>
-            </a:r>
-            <a:endParaRPr lang="en-US" sz="1150" dirty="0"/>
-          </a:p>
-        </p:txBody>
-      </p:sp>
-      <p:sp>
-        <p:nvSpPr>
-          <p:cNvPr id="13" name="Shape 10"/>
-          <p:cNvSpPr/>
-          <p:nvPr/>
-        </p:nvSpPr>
-        <p:spPr>
-          <a:xfrm>
-            <a:off x="5001768" y="1344168"/>
-            <a:ext cx="6668719" cy="4188524"/>
-          </a:xfrm>
-          <a:prstGeom prst="roundRect">
-            <a:avLst>
-              <a:gd name="adj" fmla="val 1746"/>
-            </a:avLst>
-          </a:prstGeom>
-          <a:solidFill>
-            <a:srgbClr val="191919"/>
-          </a:solidFill>
-          <a:ln/>
-          <a:effectLst>
-            <a:outerShdw sx="100000" sy="100000" kx="0" ky="0" algn="bl" rotWithShape="0" blurRad="152400" dist="50800" dir="5400000">
-              <a:srgbClr val="152663">
-                <a:alpha val="35000"/>
-              </a:srgbClr>
-            </a:outerShdw>
-          </a:effectLst>
-        </p:spPr>
-      </p:sp>
-      <p:pic>
-        <p:nvPicPr>
-          <p:cNvPr id="14" name="Image 1" descr="C:\MLOF 01\VORTEX\CORREO ARGENTINO\Reclamos\Reclamos claude\hub\presentaciones\screenshots\04-franquicias.png">    </p:cNvPr>
-          <p:cNvPicPr>
-            <a:picLocks noChangeAspect="1"/>
-          </p:cNvPicPr>
-          <p:nvPr/>
-        </p:nvPicPr>
-        <p:blipFill>
-          <a:blip r:embed="rId2"/>
-          <a:srcRect l="0" r="0" t="0" b="0"/>
-          <a:stretch/>
-        </p:blipFill>
-        <p:spPr>
-          <a:xfrm>
-            <a:off x="5029200" y="1371600"/>
-            <a:ext cx="6613855" cy="4133660"/>
-          </a:xfrm>
-          <a:prstGeom prst="rect">
-            <a:avLst/>
-          </a:prstGeom>
-        </p:spPr>
-      </p:pic>
     </p:spTree>
   </p:cSld>
   <p:clrMapOvr>
